--- a/single-house-proposal/dist/単身者向け戸建て提案資料.pptx
+++ b/single-house-proposal/dist/単身者向け戸建て提案資料.pptx
@@ -23,9 +23,12 @@
     <p:sldId id="271" r:id="rId17"/>
     <p:sldId id="272" r:id="rId18"/>
     <p:sldId id="273" r:id="rId19"/>
+    <p:sldId id="274" r:id="rId20"/>
+    <p:sldId id="275" r:id="rId21"/>
+    <p:sldId id="276" r:id="rId22"/>
   </p:sldIdLst>
   <p:notesMasterIdLst>
-    <p:notesMasterId r:id="rId20"/>
+    <p:notesMasterId r:id="rId23"/>
   </p:notesMasterIdLst>
   <p:sldSz cx="12192000" cy="6858000"/>
   <p:notesSz cx="6858000" cy="12192000"/>
@@ -124,14 +127,14 @@
   <p:extLst>
     <p:ext uri="{521415D9-36F7-43E2-AB2F-B90AF26B5E84}">
       <p14:sectionLst xmlns:p14="http://schemas.microsoft.com/office/powerpoint/2010/main">
-        <p14:section name="導入｜暮らしから考える" id="{199f7d95-08ac-eda0-0e78-e665a392a7d3}">
+        <p14:section name="導入｜暮らしから考える" id="{e7729046-e466-0fbd-7631-70b952b6ed6f}">
           <p14:sldIdLst>
             <p14:sldId id="256"/>
             <p14:sldId id="257"/>
             <p14:sldId id="258"/>
           </p14:sldIdLst>
         </p14:section>
-        <p14:section name="価値｜不動産だけが持つもの" id="{68cc3c39-2fd6-0e13-5cf2-0f0cbc7be01b}">
+        <p14:section name="価値｜不動産だけが持つもの" id="{61c818bd-e016-d73c-1102-86862e35b84f}">
           <p14:sldIdLst>
             <p14:sldId id="259"/>
             <p14:sldId id="260"/>
@@ -142,7 +145,7 @@
             <p14:sldId id="265"/>
           </p14:sldIdLst>
         </p14:section>
-        <p14:section name="資金｜数字で確かめる" id="{8e7e4350-fae7-7703-cf18-5fc06cac53a2}">
+        <p14:section name="資金｜数字で確かめる" id="{71cce8a3-52f1-64fc-0645-0da09f90fb5c}">
           <p14:sldIdLst>
             <p14:sldId id="266"/>
             <p14:sldId id="267"/>
@@ -151,11 +154,18 @@
             <p14:sldId id="270"/>
           </p14:sldIdLst>
         </p14:section>
-        <p14:section name="判断｜自分で選ぶ" id="{286918bd-1843-3aba-4088-e3b1421feb22}">
+        <p14:section name="判断｜自分で選ぶ" id="{5361d3cb-095c-ed2f-52e6-8764faad2b17}">
           <p14:sldIdLst>
             <p14:sldId id="271"/>
             <p14:sldId id="272"/>
             <p14:sldId id="273"/>
+          </p14:sldIdLst>
+        </p14:section>
+        <p14:section name="税制｜住宅ローン控除" id="{d8c4673a-403d-2042-1f98-7bbbe84ab6ae}">
+          <p14:sldIdLst>
+            <p14:sldId id="274"/>
+            <p14:sldId id="275"/>
+            <p14:sldId id="276"/>
           </p14:sldIdLst>
         </p14:section>
       </p14:sectionLst>
@@ -1887,6 +1897,647 @@
 </c:chartSpace>
 </file>
 
+<file path=ppt/charts/chart5.xml><?xml version="1.0" encoding="utf-8"?>
+<c:chartSpace xmlns:c="http://schemas.openxmlformats.org/drawingml/2006/chart" xmlns:a="http://schemas.openxmlformats.org/drawingml/2006/main" xmlns:r="http://schemas.openxmlformats.org/officeDocument/2006/relationships">
+  <c:date1904 val="0"/>
+  <c:roundedCorners val="1"/>
+  <c:chart>
+    <c:title>
+      <c:tx>
+        <c:rich>
+          <a:bodyPr/>
+          <a:lstStyle/>
+          <a:p>
+            <a:pPr>
+              <a:defRPr sz="1300" b="0" i="0" u="none" strike="noStrike">
+                <a:solidFill>
+                  <a:srgbClr val="2B2F36"/>
+                </a:solidFill>
+                <a:latin typeface="+mn-lt"/>
+              </a:defRPr>
+            </a:pPr>
+            <a:r>
+              <a:rPr sz="1300" b="0" i="0" u="none" strike="noStrike">
+                <a:solidFill>
+                  <a:srgbClr val="2B2F36"/>
+                </a:solidFill>
+                <a:latin typeface="+mn-lt"/>
+              </a:rPr>
+              <a:t>年ごとの控除見込額（万円）— 新築・ZEH水準・2027年入居</a:t>
+            </a:r>
+          </a:p>
+        </c:rich>
+      </c:tx>
+      <c:layout/>
+      <c:overlay val="0"/>
+    </c:title>
+    <c:autoTitleDeleted val="0"/>
+    <c:plotArea>
+      <c:layout/>
+      <c:barChart>
+        <c:barDir val="col"/>
+        <c:grouping val="stacked"/>
+        <c:varyColors val="0"/>
+        <c:ser>
+          <c:idx val="0"/>
+          <c:order val="0"/>
+          <c:tx>
+            <c:strRef>
+              <c:f>Sheet1!$B$1</c:f>
+              <c:strCache>
+                <c:ptCount val="1"/>
+                <c:pt idx="0">
+                  <c:v>所得税から控除</c:v>
+                </c:pt>
+              </c:strCache>
+            </c:strRef>
+          </c:tx>
+          <c:spPr>
+            <a:solidFill>
+              <a:srgbClr val="1C2B45"/>
+            </a:solidFill>
+            <a:effectLst/>
+          </c:spPr>
+          <c:invertIfNegative val="0"/>
+          <c:dLbls>
+            <c:numFmt formatCode="[&lt;1.5]&quot;&quot;;0.0" sourceLinked="0"/>
+            <c:txPr>
+              <a:bodyPr/>
+              <a:lstStyle/>
+              <a:p>
+                <a:pPr>
+                  <a:defRPr b="0" i="0" strike="noStrike" sz="900" u="none">
+                    <a:solidFill>
+                      <a:srgbClr val="FFFFFF"/>
+                    </a:solidFill>
+                    <a:latin typeface="+mn-lt"/>
+                  </a:defRPr>
+                </a:pPr>
+              </a:p>
+            </c:txPr>
+            <c:dLblPos val="ctr"/>
+            <c:showLegendKey val="0"/>
+            <c:showVal val="1"/>
+            <c:showCatName val="0"/>
+            <c:showSerName val="0"/>
+            <c:showPercent val="0"/>
+            <c:showBubbleSize val="0"/>
+            <c:showLeaderLines val="0"/>
+          </c:dLbls>
+          <c:cat>
+            <c:multiLvlStrRef>
+              <c:f>Sheet1!$A$2:$A$14</c:f>
+              <c:multiLvlStrCache>
+                <c:ptCount val="13"/>
+                <c:lvl>
+                  <c:pt idx="0">
+                    <c:v>1年目</c:v>
+                  </c:pt>
+                  <c:pt idx="1">
+                    <c:v>2年目</c:v>
+                  </c:pt>
+                  <c:pt idx="2">
+                    <c:v>3年目</c:v>
+                  </c:pt>
+                  <c:pt idx="3">
+                    <c:v>4年目</c:v>
+                  </c:pt>
+                  <c:pt idx="4">
+                    <c:v>5年目</c:v>
+                  </c:pt>
+                  <c:pt idx="5">
+                    <c:v>6年目</c:v>
+                  </c:pt>
+                  <c:pt idx="6">
+                    <c:v>7年目</c:v>
+                  </c:pt>
+                  <c:pt idx="7">
+                    <c:v>8年目</c:v>
+                  </c:pt>
+                  <c:pt idx="8">
+                    <c:v>9年目</c:v>
+                  </c:pt>
+                  <c:pt idx="9">
+                    <c:v>10年目</c:v>
+                  </c:pt>
+                  <c:pt idx="10">
+                    <c:v>11年目</c:v>
+                  </c:pt>
+                  <c:pt idx="11">
+                    <c:v>12年目</c:v>
+                  </c:pt>
+                  <c:pt idx="12">
+                    <c:v>13年目</c:v>
+                  </c:pt>
+                </c:lvl>
+              </c:multiLvlStrCache>
+            </c:multiLvlStrRef>
+          </c:cat>
+          <c:val>
+            <c:numRef>
+              <c:f>Sheet1!$B$2:$B$14</c:f>
+              <c:numCache>
+                <c:formatCode>General</c:formatCode>
+                <c:ptCount val="13"/>
+                <c:pt idx="0">
+                  <c:v>11.2</c:v>
+                </c:pt>
+                <c:pt idx="1">
+                  <c:v>11.2</c:v>
+                </c:pt>
+                <c:pt idx="2">
+                  <c:v>11.2</c:v>
+                </c:pt>
+                <c:pt idx="3">
+                  <c:v>11.2</c:v>
+                </c:pt>
+                <c:pt idx="4">
+                  <c:v>11.2</c:v>
+                </c:pt>
+                <c:pt idx="5">
+                  <c:v>11.2</c:v>
+                </c:pt>
+                <c:pt idx="6">
+                  <c:v>11.2</c:v>
+                </c:pt>
+                <c:pt idx="7">
+                  <c:v>11.2</c:v>
+                </c:pt>
+                <c:pt idx="8">
+                  <c:v>11.2</c:v>
+                </c:pt>
+                <c:pt idx="9">
+                  <c:v>11.2</c:v>
+                </c:pt>
+                <c:pt idx="10">
+                  <c:v>11.2</c:v>
+                </c:pt>
+                <c:pt idx="11">
+                  <c:v>11.2</c:v>
+                </c:pt>
+                <c:pt idx="12">
+                  <c:v>11.2</c:v>
+                </c:pt>
+              </c:numCache>
+            </c:numRef>
+          </c:val>
+        </c:ser>
+        <c:ser>
+          <c:idx val="1"/>
+          <c:order val="1"/>
+          <c:tx>
+            <c:strRef>
+              <c:f>Sheet1!$C$1</c:f>
+              <c:strCache>
+                <c:ptCount val="1"/>
+                <c:pt idx="0">
+                  <c:v>住民税から控除</c:v>
+                </c:pt>
+              </c:strCache>
+            </c:strRef>
+          </c:tx>
+          <c:spPr>
+            <a:solidFill>
+              <a:srgbClr val="A8854A"/>
+            </a:solidFill>
+            <a:effectLst/>
+          </c:spPr>
+          <c:invertIfNegative val="0"/>
+          <c:dLbls>
+            <c:numFmt formatCode="[&lt;1.5]&quot;&quot;;0.0" sourceLinked="0"/>
+            <c:txPr>
+              <a:bodyPr/>
+              <a:lstStyle/>
+              <a:p>
+                <a:pPr>
+                  <a:defRPr b="0" i="0" strike="noStrike" sz="900" u="none">
+                    <a:solidFill>
+                      <a:srgbClr val="FFFFFF"/>
+                    </a:solidFill>
+                    <a:latin typeface="+mn-lt"/>
+                  </a:defRPr>
+                </a:pPr>
+              </a:p>
+            </c:txPr>
+            <c:dLblPos val="ctr"/>
+            <c:showLegendKey val="0"/>
+            <c:showVal val="1"/>
+            <c:showCatName val="0"/>
+            <c:showSerName val="0"/>
+            <c:showPercent val="0"/>
+            <c:showBubbleSize val="0"/>
+            <c:showLeaderLines val="0"/>
+          </c:dLbls>
+          <c:cat>
+            <c:multiLvlStrRef>
+              <c:f>Sheet1!$A$2:$A$14</c:f>
+              <c:multiLvlStrCache>
+                <c:ptCount val="13"/>
+                <c:lvl>
+                  <c:pt idx="0">
+                    <c:v>1年目</c:v>
+                  </c:pt>
+                  <c:pt idx="1">
+                    <c:v>2年目</c:v>
+                  </c:pt>
+                  <c:pt idx="2">
+                    <c:v>3年目</c:v>
+                  </c:pt>
+                  <c:pt idx="3">
+                    <c:v>4年目</c:v>
+                  </c:pt>
+                  <c:pt idx="4">
+                    <c:v>5年目</c:v>
+                  </c:pt>
+                  <c:pt idx="5">
+                    <c:v>6年目</c:v>
+                  </c:pt>
+                  <c:pt idx="6">
+                    <c:v>7年目</c:v>
+                  </c:pt>
+                  <c:pt idx="7">
+                    <c:v>8年目</c:v>
+                  </c:pt>
+                  <c:pt idx="8">
+                    <c:v>9年目</c:v>
+                  </c:pt>
+                  <c:pt idx="9">
+                    <c:v>10年目</c:v>
+                  </c:pt>
+                  <c:pt idx="10">
+                    <c:v>11年目</c:v>
+                  </c:pt>
+                  <c:pt idx="11">
+                    <c:v>12年目</c:v>
+                  </c:pt>
+                  <c:pt idx="12">
+                    <c:v>13年目</c:v>
+                  </c:pt>
+                </c:lvl>
+              </c:multiLvlStrCache>
+            </c:multiLvlStrRef>
+          </c:cat>
+          <c:val>
+            <c:numRef>
+              <c:f>Sheet1!$C$2:$C$14</c:f>
+              <c:numCache>
+                <c:formatCode>General</c:formatCode>
+                <c:ptCount val="13"/>
+                <c:pt idx="0">
+                  <c:v>9.8</c:v>
+                </c:pt>
+                <c:pt idx="1">
+                  <c:v>9.8</c:v>
+                </c:pt>
+                <c:pt idx="2">
+                  <c:v>9.8</c:v>
+                </c:pt>
+                <c:pt idx="3">
+                  <c:v>9.3</c:v>
+                </c:pt>
+                <c:pt idx="4">
+                  <c:v>8.8</c:v>
+                </c:pt>
+                <c:pt idx="5">
+                  <c:v>8.3</c:v>
+                </c:pt>
+                <c:pt idx="6">
+                  <c:v>7.7</c:v>
+                </c:pt>
+                <c:pt idx="7">
+                  <c:v>7.2</c:v>
+                </c:pt>
+                <c:pt idx="8">
+                  <c:v>6.6</c:v>
+                </c:pt>
+                <c:pt idx="9">
+                  <c:v>6.1</c:v>
+                </c:pt>
+                <c:pt idx="10">
+                  <c:v>5.5</c:v>
+                </c:pt>
+                <c:pt idx="11">
+                  <c:v>4.9</c:v>
+                </c:pt>
+                <c:pt idx="12">
+                  <c:v>4.4</c:v>
+                </c:pt>
+              </c:numCache>
+            </c:numRef>
+          </c:val>
+        </c:ser>
+        <c:ser>
+          <c:idx val="2"/>
+          <c:order val="2"/>
+          <c:tx>
+            <c:strRef>
+              <c:f>Sheet1!$D$1</c:f>
+              <c:strCache>
+                <c:ptCount val="1"/>
+                <c:pt idx="0">
+                  <c:v>控除しきれない額（受け取れない）</c:v>
+                </c:pt>
+              </c:strCache>
+            </c:strRef>
+          </c:tx>
+          <c:spPr>
+            <a:solidFill>
+              <a:srgbClr val="C9CED6"/>
+            </a:solidFill>
+            <a:effectLst/>
+          </c:spPr>
+          <c:invertIfNegative val="0"/>
+          <c:dLbls>
+            <c:numFmt formatCode="[&lt;1.5]&quot;&quot;;0.0" sourceLinked="0"/>
+            <c:txPr>
+              <a:bodyPr/>
+              <a:lstStyle/>
+              <a:p>
+                <a:pPr>
+                  <a:defRPr b="0" i="0" strike="noStrike" sz="900" u="none">
+                    <a:solidFill>
+                      <a:srgbClr val="FFFFFF"/>
+                    </a:solidFill>
+                    <a:latin typeface="+mn-lt"/>
+                  </a:defRPr>
+                </a:pPr>
+              </a:p>
+            </c:txPr>
+            <c:dLblPos val="ctr"/>
+            <c:showLegendKey val="0"/>
+            <c:showVal val="1"/>
+            <c:showCatName val="0"/>
+            <c:showSerName val="0"/>
+            <c:showPercent val="0"/>
+            <c:showBubbleSize val="0"/>
+            <c:showLeaderLines val="0"/>
+          </c:dLbls>
+          <c:cat>
+            <c:multiLvlStrRef>
+              <c:f>Sheet1!$A$2:$A$14</c:f>
+              <c:multiLvlStrCache>
+                <c:ptCount val="13"/>
+                <c:lvl>
+                  <c:pt idx="0">
+                    <c:v>1年目</c:v>
+                  </c:pt>
+                  <c:pt idx="1">
+                    <c:v>2年目</c:v>
+                  </c:pt>
+                  <c:pt idx="2">
+                    <c:v>3年目</c:v>
+                  </c:pt>
+                  <c:pt idx="3">
+                    <c:v>4年目</c:v>
+                  </c:pt>
+                  <c:pt idx="4">
+                    <c:v>5年目</c:v>
+                  </c:pt>
+                  <c:pt idx="5">
+                    <c:v>6年目</c:v>
+                  </c:pt>
+                  <c:pt idx="6">
+                    <c:v>7年目</c:v>
+                  </c:pt>
+                  <c:pt idx="7">
+                    <c:v>8年目</c:v>
+                  </c:pt>
+                  <c:pt idx="8">
+                    <c:v>9年目</c:v>
+                  </c:pt>
+                  <c:pt idx="9">
+                    <c:v>10年目</c:v>
+                  </c:pt>
+                  <c:pt idx="10">
+                    <c:v>11年目</c:v>
+                  </c:pt>
+                  <c:pt idx="11">
+                    <c:v>12年目</c:v>
+                  </c:pt>
+                  <c:pt idx="12">
+                    <c:v>13年目</c:v>
+                  </c:pt>
+                </c:lvl>
+              </c:multiLvlStrCache>
+            </c:multiLvlStrRef>
+          </c:cat>
+          <c:val>
+            <c:numRef>
+              <c:f>Sheet1!$D$2:$D$14</c:f>
+              <c:numCache>
+                <c:formatCode>General</c:formatCode>
+                <c:ptCount val="13"/>
+                <c:pt idx="0">
+                  <c:v>1.1</c:v>
+                </c:pt>
+                <c:pt idx="1">
+                  <c:v>0.6</c:v>
+                </c:pt>
+                <c:pt idx="2">
+                  <c:v>0.1</c:v>
+                </c:pt>
+                <c:pt idx="3">
+                  <c:v>0</c:v>
+                </c:pt>
+                <c:pt idx="4">
+                  <c:v>0</c:v>
+                </c:pt>
+                <c:pt idx="5">
+                  <c:v>0</c:v>
+                </c:pt>
+                <c:pt idx="6">
+                  <c:v>0</c:v>
+                </c:pt>
+                <c:pt idx="7">
+                  <c:v>0</c:v>
+                </c:pt>
+                <c:pt idx="8">
+                  <c:v>0</c:v>
+                </c:pt>
+                <c:pt idx="9">
+                  <c:v>0</c:v>
+                </c:pt>
+                <c:pt idx="10">
+                  <c:v>0</c:v>
+                </c:pt>
+                <c:pt idx="11">
+                  <c:v>0</c:v>
+                </c:pt>
+                <c:pt idx="12">
+                  <c:v>0</c:v>
+                </c:pt>
+              </c:numCache>
+            </c:numRef>
+          </c:val>
+        </c:ser>
+        <c:dLbls>
+          <c:numFmt formatCode="[&lt;1.5]&quot;&quot;;0.0" sourceLinked="0"/>
+          <c:txPr>
+            <a:bodyPr/>
+            <a:lstStyle/>
+            <a:p>
+              <a:pPr>
+                <a:defRPr b="0" i="0" strike="noStrike" sz="900" u="none">
+                  <a:solidFill>
+                    <a:srgbClr val="FFFFFF"/>
+                  </a:solidFill>
+                  <a:latin typeface="+mn-lt"/>
+                </a:defRPr>
+              </a:pPr>
+            </a:p>
+          </c:txPr>
+          <c:dLblPos val="ctr"/>
+          <c:showLegendKey val="0"/>
+          <c:showVal val="1"/>
+          <c:showCatName val="0"/>
+          <c:showSerName val="0"/>
+          <c:showPercent val="0"/>
+          <c:showBubbleSize val="0"/>
+          <c:showLeaderLines val="0"/>
+        </c:dLbls>
+        <c:gapWidth val="45"/>
+        <c:overlap val="100"/>
+        <c:axId val="2094734554"/>
+        <c:axId val="2094734552"/>
+        <c:axId val="2094734556"/>
+      </c:barChart>
+      <c:catAx>
+        <c:axId val="2094734554"/>
+        <c:scaling>
+          <c:orientation val="minMax"/>
+        </c:scaling>
+        <c:delete val="0"/>
+        <c:axPos val="b"/>
+        <c:numFmt formatCode="General" sourceLinked="1"/>
+        <c:majorTickMark val="out"/>
+        <c:minorTickMark val="none"/>
+        <c:tickLblPos val="low"/>
+        <c:spPr>
+          <a:ln w="12700" cap="flat">
+            <a:solidFill>
+              <a:srgbClr val="888888"/>
+            </a:solidFill>
+            <a:prstDash val="solid"/>
+            <a:round/>
+          </a:ln>
+        </c:spPr>
+        <c:txPr>
+          <a:bodyPr/>
+          <a:lstStyle/>
+          <a:p>
+            <a:pPr>
+              <a:defRPr sz="1000" b="0" i="0" u="none" strike="noStrike">
+                <a:solidFill>
+                  <a:srgbClr val="6B7280"/>
+                </a:solidFill>
+                <a:latin typeface="+mn-lt"/>
+              </a:defRPr>
+            </a:pPr>
+            <a:endParaRPr lang="en-US"/>
+          </a:p>
+        </c:txPr>
+        <c:crossAx val="2094734552"/>
+        <c:crosses val="autoZero"/>
+        <c:auto val="1"/>
+        <c:lblAlgn val="ctr"/>
+        <c:noMultiLvlLbl val="1"/>
+      </c:catAx>
+      <c:valAx>
+        <c:axId val="2094734552"/>
+        <c:scaling>
+          <c:orientation val="minMax"/>
+          <c:max val="25"/>
+          <c:min val="0"/>
+        </c:scaling>
+        <c:delete val="0"/>
+        <c:axPos val="l"/>
+        <c:majorGridlines>
+          <c:spPr>
+            <a:ln w="6350" cap="flat">
+              <a:solidFill>
+                <a:srgbClr val="E5E7EB"/>
+              </a:solidFill>
+              <a:prstDash val="solid"/>
+              <a:round/>
+            </a:ln>
+          </c:spPr>
+        </c:majorGridlines>
+        <c:numFmt formatCode="General" sourceLinked="0"/>
+        <c:majorTickMark val="out"/>
+        <c:minorTickMark val="none"/>
+        <c:tickLblPos val="nextTo"/>
+        <c:spPr>
+          <a:ln w="12700" cap="flat">
+            <a:solidFill>
+              <a:srgbClr val="888888"/>
+            </a:solidFill>
+            <a:prstDash val="solid"/>
+            <a:round/>
+          </a:ln>
+        </c:spPr>
+        <c:txPr>
+          <a:bodyPr/>
+          <a:lstStyle/>
+          <a:p>
+            <a:pPr>
+              <a:defRPr sz="1000" b="0" i="0" u="none" strike="noStrike">
+                <a:solidFill>
+                  <a:srgbClr val="6B7280"/>
+                </a:solidFill>
+                <a:latin typeface="+mn-lt"/>
+              </a:defRPr>
+            </a:pPr>
+            <a:endParaRPr lang="en-US"/>
+          </a:p>
+        </c:txPr>
+        <c:crossAx val="2094734554"/>
+        <c:crosses val="autoZero"/>
+        <c:crossBetween val="between"/>
+      </c:valAx>
+      <c:spPr>
+        <a:noFill/>
+        <a:ln>
+          <a:noFill/>
+        </a:ln>
+        <a:effectLst/>
+      </c:spPr>
+    </c:plotArea>
+    <c:legend>
+      <c:legendPos val="b"/>
+      <c:overlay val="0"/>
+      <c:txPr>
+        <a:bodyPr/>
+        <a:lstStyle/>
+        <a:p>
+          <a:pPr>
+            <a:defRPr sz="1100">
+              <a:solidFill>
+                <a:srgbClr val="2B2F36"/>
+              </a:solidFill>
+              <a:latin typeface="+mn-lt"/>
+              <a:cs typeface="+mn-lt"/>
+            </a:defRPr>
+          </a:pPr>
+          <a:endParaRPr lang="en-US"/>
+        </a:p>
+      </c:txPr>
+    </c:legend>
+    <c:plotVisOnly val="1"/>
+    <c:dispBlanksAs val="span"/>
+  </c:chart>
+  <c:spPr>
+    <a:noFill/>
+    <a:ln>
+      <a:noFill/>
+    </a:ln>
+    <a:effectLst/>
+  </c:spPr>
+  <c:externalData r:id="rId1">
+    <c:autoUpdate val="0"/>
+  </c:externalData>
+</c:chartSpace>
+</file>
+
 <file path=ppt/notesMasters/notesMaster1.xml><?xml version="1.0" encoding="utf-8"?>
 <p:notesMaster xmlns:a="http://schemas.openxmlformats.org/drawingml/2006/main" xmlns:r="http://schemas.openxmlformats.org/officeDocument/2006/relationships" xmlns:p="http://schemas.openxmlformats.org/presentationml/2006/main">
   <p:cSld>
@@ -2578,7 +3229,7 @@
 Q「家賃とほぼ同じ返済額なら、買ったほうが得では？」
 A 返済額だけならそう見えますが、所有には税金・保険・修繕の費用がかかります。本当の住居費で比べると、今の賃貸より負担は増えます。その差額で何が得られるかが判断のポイントです。
 Q「住宅ローン控除は入っていないの？」
-A 入っていません。控除額は入居年・住宅の省エネ性能・所得などで変わるため、本試算では保守的に除外しています。適用されれば実質負担は軽くなります。</a:t>
+A このページの住居費には入れていません。控除は返済額を減らすものではなく、所得税・住民税が軽くなる制度で、金額は入居年・住宅性能・税額で変わるためです。新築・中古別の控除見込額はP19〜P21で確認します。</a:t>
             </a:r>
             <a:endParaRPr lang="en-US" dirty="0"/>
           </a:p>
@@ -3199,6 +3850,115 @@
 </p:notes>
 </file>
 
+<file path=ppt/notesSlides/notesSlide19.xml><?xml version="1.0" encoding="utf-8"?>
+<p:notes xmlns:a="http://schemas.openxmlformats.org/drawingml/2006/main" xmlns:r="http://schemas.openxmlformats.org/officeDocument/2006/relationships" xmlns:p="http://schemas.openxmlformats.org/presentationml/2006/main">
+  <p:cSld>
+    <p:spTree>
+      <p:nvGrpSpPr>
+        <p:cNvPr id="1" name=""/>
+        <p:cNvGrpSpPr/>
+        <p:nvPr/>
+      </p:nvGrpSpPr>
+      <p:grpSpPr>
+        <a:xfrm>
+          <a:off x="0" y="0"/>
+          <a:ext cx="0" cy="0"/>
+          <a:chOff x="0" y="0"/>
+          <a:chExt cx="0" cy="0"/>
+        </a:xfrm>
+      </p:grpSpPr>
+      <p:sp>
+        <p:nvSpPr>
+          <p:cNvPr id="2" name="Slide Image Placeholder 1"/>
+          <p:cNvSpPr>
+            <a:spLocks noGrp="1" noRot="1" noChangeAspect="1"/>
+          </p:cNvSpPr>
+          <p:nvPr>
+            <p:ph type="sldImg"/>
+          </p:nvPr>
+        </p:nvSpPr>
+        <p:spPr/>
+      </p:sp>
+      <p:sp>
+        <p:nvSpPr>
+          <p:cNvPr id="3" name="Notes Placeholder 2"/>
+          <p:cNvSpPr>
+            <a:spLocks noGrp="1"/>
+          </p:cNvSpPr>
+          <p:nvPr>
+            <p:ph type="body" idx="1"/>
+          </p:nvPr>
+        </p:nvSpPr>
+        <p:spPr/>
+        <p:txBody>
+          <a:bodyPr/>
+          <a:lstStyle/>
+          <a:p>
+            <a:r>
+              <a:rPr lang="en-US" dirty="0"/>
+              <a:t>【このページで伝えるべきこと】
+住宅ローン控除の借入限度額と控除期間は、新築・中古の区分と住宅の省エネ性能で変わる。2026年以降は中古でもZEH水準・認定住宅なら3,500万円・13年に拡充された。一方、省エネ基準を満たさない新築は原則対象外。物件を比べるときは、性能を証明する書類があるかを必ず確認する。
+【顧客に投げかける質問】
+・検討中の物件は、省エネ性能の証明書（BELSや性能評価書など）が付いていますか？
+・入居はいつ頃を考えていますか？（2028年以降の新築は条件が変わります）
+【よくある反論と回答】
+Q「中古は控除が少ないと聞きました。」
+A 2026年以降は改正で、性能の高い中古（ZEH水準・認定住宅）は3,500万円・13年に拡充されました。性能の証明がない中古は2,000万円・10年です。中古でも書類しだいで差が出ます。
+Q「新築なら必ず控除を受けられる？」
+A 受けられないケースがあります。省エネ基準を満たさない新築は原則対象外で、2028年以降の入居では省エネ基準適合住宅も、2027年までに建築確認を受けたもの等に限られます。
+【お客様への説明例】
+「住宅ローン控除は、年末のローン残高の0.7%を、その年の所得税と翌年の住民税から差し引く制度です。どこまでの残高が対象になるか（借入限度額）と何年続くか（控除期間）は、新築か中古か、そして家の省エネ性能で決まります。」
+【住宅ローン控除のメリット】
+最長13年間、所得税・住民税の負担が軽くなります。ZEH水準の新築なら借入限度額3,500万円まで対象です。
+【適用されない場合の注意点】
+床面積40㎡未満、合計所得2,000万円超、返済期間10年未満、親族からの取得、1981年以前の建築で耐震を証明できない中古、2024年以降に建築確認を受けた省エネ基準未満の新築などは対象外です。40〜50㎡は合計所得1,000万円以下の年のみ対象です。
+【新築と中古の違い】
+新築の認定住宅は4,500万円、中古の認定住宅・ZEH水準は3,500万円が限度。省エネ基準適合は新築・中古とも2,000万円・13年（新築は2027年入居まで）。性能証明のない中古は2,000万円・10年。
+【購入前に確認する証明書】
+購入前に確認する証明書：新築＝住宅省エネルギー性能証明書・建設住宅性能評価書（ZEH水準・省エネ基準）／長期優良住宅・低炭素建築物の認定通知書（認定住宅）。中古＝上記の性能証明（あれば）、1981年以前の建築なら耐震基準適合証明書・建設住宅性能評価書（耐震等級）・既存住宅売買瑕疵保険の付保証明書のいずれか。共通＝登記事項証明書、売買契約書（請負契約書）の写し、金融機関の年末残高等証明書。
+【確定申告の案内】
+確定申告の案内：1年目は入居した翌年の2月16日〜3月15日に確定申告が必要です（e-Tax可）。給与所得者は2年目以降、勤務先の年末調整で控除を受けられます（税務署から届く申告書と年末残高等証明書を勤務先へ提出）。住民税からの控除は、所得税で引ききれなかった分が翌年度の住民税から自動的に差し引かれます。</a:t>
+            </a:r>
+            <a:endParaRPr lang="en-US" dirty="0"/>
+          </a:p>
+        </p:txBody>
+      </p:sp>
+      <p:sp>
+        <p:nvSpPr>
+          <p:cNvPr id="4" name="Slide Number Placeholder 3"/>
+          <p:cNvSpPr>
+            <a:spLocks noGrp="1"/>
+          </p:cNvSpPr>
+          <p:nvPr>
+            <p:ph type="sldNum" sz="quarter" idx="10"/>
+          </p:nvPr>
+        </p:nvSpPr>
+        <p:spPr/>
+        <p:txBody>
+          <a:bodyPr/>
+          <a:lstStyle/>
+          <a:p>
+            <a:fld id="{F7021451-1387-4CA6-816F-3879F97B5CBC}" type="slidenum">
+              <a:rPr lang="en-US"/>
+              <a:t>19</a:t>
+            </a:fld>
+            <a:endParaRPr lang="en-US"/>
+          </a:p>
+        </p:txBody>
+      </p:sp>
+    </p:spTree>
+    <p:extLst>
+      <p:ext uri="{BB962C8B-B14F-4D97-AF65-F5344CB8AC3E}">
+        <p14:creationId xmlns:p14="http://schemas.microsoft.com/office/powerpoint/2010/main" val="1024086991"/>
+      </p:ext>
+    </p:extLst>
+  </p:cSld>
+  <p:clrMapOvr>
+    <a:masterClrMapping/>
+  </p:clrMapOvr>
+</p:notes>
+</file>
+
 <file path=ppt/notesSlides/notesSlide2.xml><?xml version="1.0" encoding="utf-8"?>
 <p:notes xmlns:a="http://schemas.openxmlformats.org/drawingml/2006/main" xmlns:r="http://schemas.openxmlformats.org/officeDocument/2006/relationships" xmlns:p="http://schemas.openxmlformats.org/presentationml/2006/main">
   <p:cSld>
@@ -3277,6 +4037,226 @@
             <a:fld id="{F7021451-1387-4CA6-816F-3879F97B5CBC}" type="slidenum">
               <a:rPr lang="en-US"/>
               <a:t>2</a:t>
+            </a:fld>
+            <a:endParaRPr lang="en-US"/>
+          </a:p>
+        </p:txBody>
+      </p:sp>
+    </p:spTree>
+    <p:extLst>
+      <p:ext uri="{BB962C8B-B14F-4D97-AF65-F5344CB8AC3E}">
+        <p14:creationId xmlns:p14="http://schemas.microsoft.com/office/powerpoint/2010/main" val="1024086991"/>
+      </p:ext>
+    </p:extLst>
+  </p:cSld>
+  <p:clrMapOvr>
+    <a:masterClrMapping/>
+  </p:clrMapOvr>
+</p:notes>
+</file>
+
+<file path=ppt/notesSlides/notesSlide20.xml><?xml version="1.0" encoding="utf-8"?>
+<p:notes xmlns:a="http://schemas.openxmlformats.org/drawingml/2006/main" xmlns:r="http://schemas.openxmlformats.org/officeDocument/2006/relationships" xmlns:p="http://schemas.openxmlformats.org/presentationml/2006/main">
+  <p:cSld>
+    <p:spTree>
+      <p:nvGrpSpPr>
+        <p:cNvPr id="1" name=""/>
+        <p:cNvGrpSpPr/>
+        <p:nvPr/>
+      </p:nvGrpSpPr>
+      <p:grpSpPr>
+        <a:xfrm>
+          <a:off x="0" y="0"/>
+          <a:ext cx="0" cy="0"/>
+          <a:chOff x="0" y="0"/>
+          <a:chExt cx="0" cy="0"/>
+        </a:xfrm>
+      </p:grpSpPr>
+      <p:sp>
+        <p:nvSpPr>
+          <p:cNvPr id="2" name="Slide Image Placeholder 1"/>
+          <p:cNvSpPr>
+            <a:spLocks noGrp="1" noRot="1" noChangeAspect="1"/>
+          </p:cNvSpPr>
+          <p:nvPr>
+            <p:ph type="sldImg"/>
+          </p:nvPr>
+        </p:nvSpPr>
+        <p:spPr/>
+      </p:sp>
+      <p:sp>
+        <p:nvSpPr>
+          <p:cNvPr id="3" name="Notes Placeholder 2"/>
+          <p:cNvSpPr>
+            <a:spLocks noGrp="1"/>
+          </p:cNvSpPr>
+          <p:nvPr>
+            <p:ph type="body" idx="1"/>
+          </p:nvPr>
+        </p:nvSpPr>
+        <p:spPr/>
+        <p:txBody>
+          <a:bodyPr/>
+          <a:lstStyle/>
+          <a:p>
+            <a:r>
+              <a:rPr lang="en-US" dirty="0"/>
+              <a:t>【このページで伝えるべきこと】
+制度上の上限（年末残高×0.7%）は13年で約245万円だが、実際に控除できるのは「その年の所得税＋住民税（上限9.75万円）」まで。サンプルの年収550万円では初年度の上限220,300円に対し税額が足りず、控除しきれない額が出る。控除は毎月の返済額を減らすものではなく、税金が軽くなる（所得税は還付・年末調整、住民税は翌年度に減額）という違いを明確にする。
+【顧客に投げかける質問】
+・昨年の源泉徴収票はお手元にありますか？（所得税額が分かると精度が上がります）
+・iDeCoや医療費控除、ふるさと納税など、ほかに税金が減る制度を使っていますか？
+【よくある反論と回答】
+Q「控除で毎月の返済が安くなるんですよね？」
+A いいえ。毎月の返済は97,979円のままです。控除は所得税の還付と翌年度の住民税の減額という形で戻ります。月割りにすると平均約1.6万円相当ですが、受け取る時期はずれます。
+Q「最大額の245万円が戻るんでしょう？」
+A それは制度上の上限です。実際は税額の範囲までしか控除できず、本試算の見込みは約243.7万円です。所得が下がれば見込みも下がります。
+Q「ふるさと納税と一緒に使える？」
+A 併用はできますが、住民税からの住宅ローン控除が増えると、ふるさと納税の上限額が下がる場合があります。シミュレーションで確認しましょう。
+【お客様への説明例】
+「年収550万円の方なら、所得税は年11万円ほど、住民税から引ける上限は9.75万円です。初年度の控除上限は220,300円ですが、実際に戻るのは209,500円の見込みです。返済が進んで残高が減ると、控除額も少しずつ減ります。」
+【住宅ローン控除のメリット】
+13年間の累計で約243.7万円（概算）の税負担が軽くなる見込み。ZEH水準なら省エネ基準適合（同条件で約182.0万円）より枠が大きい。
+【適用されない場合の注意点】
+税額が少ない年（転職・休職・収入減）は控除額も減ります。控除しきれない額は受け取れません。税額は概算（社会保険料を年収の15%と仮定）なので、源泉徴収票で詳細計算をします。
+【新築と中古の違い】
+同じ年収でも、中古（その他の住宅）は限度額2,000万円・10年のため、累計見込みは約133.0万円（P21）。
+【購入前に確認する証明書】
+購入前に確認する証明書：新築＝住宅省エネルギー性能証明書・建設住宅性能評価書（ZEH水準・省エネ基準）／長期優良住宅・低炭素建築物の認定通知書（認定住宅）。中古＝上記の性能証明（あれば）、1981年以前の建築なら耐震基準適合証明書・建設住宅性能評価書（耐震等級）・既存住宅売買瑕疵保険の付保証明書のいずれか。共通＝登記事項証明書、売買契約書（請負契約書）の写し、金融機関の年末残高等証明書。
+【確定申告の案内】
+確定申告の案内：1年目は入居した翌年の2月16日〜3月15日に確定申告が必要です（e-Tax可）。給与所得者は2年目以降、勤務先の年末調整で控除を受けられます（税務署から届く申告書と年末残高等証明書を勤務先へ提出）。住民税からの控除は、所得税で引ききれなかった分が翌年度の住民税から自動的に差し引かれます。</a:t>
+            </a:r>
+            <a:endParaRPr lang="en-US" dirty="0"/>
+          </a:p>
+        </p:txBody>
+      </p:sp>
+      <p:sp>
+        <p:nvSpPr>
+          <p:cNvPr id="4" name="Slide Number Placeholder 3"/>
+          <p:cNvSpPr>
+            <a:spLocks noGrp="1"/>
+          </p:cNvSpPr>
+          <p:nvPr>
+            <p:ph type="sldNum" sz="quarter" idx="10"/>
+          </p:nvPr>
+        </p:nvSpPr>
+        <p:spPr/>
+        <p:txBody>
+          <a:bodyPr/>
+          <a:lstStyle/>
+          <a:p>
+            <a:fld id="{F7021451-1387-4CA6-816F-3879F97B5CBC}" type="slidenum">
+              <a:rPr lang="en-US"/>
+              <a:t>20</a:t>
+            </a:fld>
+            <a:endParaRPr lang="en-US"/>
+          </a:p>
+        </p:txBody>
+      </p:sp>
+    </p:spTree>
+    <p:extLst>
+      <p:ext uri="{BB962C8B-B14F-4D97-AF65-F5344CB8AC3E}">
+        <p14:creationId xmlns:p14="http://schemas.microsoft.com/office/powerpoint/2010/main" val="1024086991"/>
+      </p:ext>
+    </p:extLst>
+  </p:cSld>
+  <p:clrMapOvr>
+    <a:masterClrMapping/>
+  </p:clrMapOvr>
+</p:notes>
+</file>
+
+<file path=ppt/notesSlides/notesSlide21.xml><?xml version="1.0" encoding="utf-8"?>
+<p:notes xmlns:a="http://schemas.openxmlformats.org/drawingml/2006/main" xmlns:r="http://schemas.openxmlformats.org/officeDocument/2006/relationships" xmlns:p="http://schemas.openxmlformats.org/presentationml/2006/main">
+  <p:cSld>
+    <p:spTree>
+      <p:nvGrpSpPr>
+        <p:cNvPr id="1" name=""/>
+        <p:cNvGrpSpPr/>
+        <p:nvPr/>
+      </p:nvGrpSpPr>
+      <p:grpSpPr>
+        <a:xfrm>
+          <a:off x="0" y="0"/>
+          <a:ext cx="0" cy="0"/>
+          <a:chOff x="0" y="0"/>
+          <a:chExt cx="0" cy="0"/>
+        </a:xfrm>
+      </p:grpSpPr>
+      <p:sp>
+        <p:nvSpPr>
+          <p:cNvPr id="2" name="Slide Image Placeholder 1"/>
+          <p:cNvSpPr>
+            <a:spLocks noGrp="1" noRot="1" noChangeAspect="1"/>
+          </p:cNvSpPr>
+          <p:nvPr>
+            <p:ph type="sldImg"/>
+          </p:nvPr>
+        </p:nvSpPr>
+        <p:spPr/>
+      </p:sp>
+      <p:sp>
+        <p:nvSpPr>
+          <p:cNvPr id="3" name="Notes Placeholder 2"/>
+          <p:cNvSpPr>
+            <a:spLocks noGrp="1"/>
+          </p:cNvSpPr>
+          <p:nvPr>
+            <p:ph type="body" idx="1"/>
+          </p:nvPr>
+        </p:nvSpPr>
+        <p:spPr/>
+        <p:txBody>
+          <a:bodyPr/>
+          <a:lstStyle/>
+          <a:p>
+            <a:r>
+              <a:rPr lang="en-US" dirty="0"/>
+              <a:t>【このページで伝えるべきこと】
+控除込みの10年間の累計支出は、新築約1,855万円・中古約1,595万円で、差は約260万円。控除は新築のほうが大きい（10年で195.3万円 対 133.0万円）が、支出の差を埋めるほどではない。一方で10年後の想定売却価格と残債の差、修繕の手間、住み心地まで含めて比べることが大切。控除額だけで有利・不利を決めない。
+【顧客に投げかける質問】
+・新築と中古で、いちばん気になる違いは「価格」「性能」「修繕」のどれですか？
+・中古の場合、購入前にインスペクション（建物状況調査）を入れたいですか？
+【よくある反論と回答】
+Q「控除が多い新築のほうが得ですよね？」
+A 控除は新築のほうが10年で約62.4万円多い見込みですが、物件価格や返済額の差のほうが大きいため、支出の合計では中古のほうが少ない試算です。そのぶん修繕費や将来の売却価格まで含めて判断します。
+Q「中古は修繕費が怖いです。」
+A 本試算では中古の修繕積立を月2.5万円（新築は1.5万円）と多めに置いています。購入前のインスペクションで劣化状況を確認し、必要な工事費を見積もってから判断しましょう。
+【お客様への説明例】
+「左が新築、右が中古です。控除は新築のほうが大きいのですが、10年間で出ていくお金の合計は中古のほうが少なくなります。ただし、どちらが良いかは、性能・修繕・住み心地・売るときの価値まで含めて考えましょう。」
+【住宅ローン控除のメリット】
+控除込みで10年間の実質的な支出が、新築で約195.3万円、中古で約133.0万円少なくなる見込み。
+【適用されない場合の注意点】
+中古は性能証明がないと「その他の住宅」（2,000万円・10年）。1981年以前の建築は耐震の証明がないと対象外。新築でも省エネ基準未満なら対象外です。
+【新築と中古の違い】
+新築は性能が高く修繕が当面少ない一方、価格と購入直後の値下がりが大きい。中古は価格が抑えられる一方、修繕・設備交換が早めに来る。控除の枠は性能の証明しだい（P19）。
+【購入前に確認する証明書】
+購入前に確認する証明書：新築＝住宅省エネルギー性能証明書・建設住宅性能評価書（ZEH水準・省エネ基準）／長期優良住宅・低炭素建築物の認定通知書（認定住宅）。中古＝上記の性能証明（あれば）、1981年以前の建築なら耐震基準適合証明書・建設住宅性能評価書（耐震等級）・既存住宅売買瑕疵保険の付保証明書のいずれか。共通＝登記事項証明書、売買契約書（請負契約書）の写し、金融機関の年末残高等証明書。
+【確定申告の案内】
+確定申告の案内：1年目は入居した翌年の2月16日〜3月15日に確定申告が必要です（e-Tax可）。給与所得者は2年目以降、勤務先の年末調整で控除を受けられます（税務署から届く申告書と年末残高等証明書を勤務先へ提出）。住民税からの控除は、所得税で引ききれなかった分が翌年度の住民税から自動的に差し引かれます。</a:t>
+            </a:r>
+            <a:endParaRPr lang="en-US" dirty="0"/>
+          </a:p>
+        </p:txBody>
+      </p:sp>
+      <p:sp>
+        <p:nvSpPr>
+          <p:cNvPr id="4" name="Slide Number Placeholder 3"/>
+          <p:cNvSpPr>
+            <a:spLocks noGrp="1"/>
+          </p:cNvSpPr>
+          <p:nvPr>
+            <p:ph type="sldNum" sz="quarter" idx="10"/>
+          </p:nvPr>
+        </p:nvSpPr>
+        <p:spPr/>
+        <p:txBody>
+          <a:bodyPr/>
+          <a:lstStyle/>
+          <a:p>
+            <a:fld id="{F7021451-1387-4CA6-816F-3879F97B5CBC}" type="slidenum">
+              <a:rPr lang="en-US"/>
+              <a:t>21</a:t>
             </a:fld>
             <a:endParaRPr lang="en-US"/>
           </a:p>
@@ -19099,6 +20079,4246 @@
 </p:sld>
 </file>
 
+<file path=ppt/slides/slide19.xml><?xml version="1.0" encoding="utf-8"?>
+<p:sld xmlns:a="http://schemas.openxmlformats.org/drawingml/2006/main" xmlns:r="http://schemas.openxmlformats.org/officeDocument/2006/relationships" xmlns:p="http://schemas.openxmlformats.org/presentationml/2006/main">
+  <p:cSld name="Slide 19">
+    <p:spTree>
+      <p:nvGrpSpPr>
+        <p:cNvPr id="1" name=""/>
+        <p:cNvGrpSpPr/>
+        <p:nvPr/>
+      </p:nvGrpSpPr>
+      <p:grpSpPr>
+        <a:xfrm>
+          <a:off x="0" y="0"/>
+          <a:ext cx="0" cy="0"/>
+          <a:chOff x="0" y="0"/>
+          <a:chExt cx="0" cy="0"/>
+        </a:xfrm>
+      </p:grpSpPr>
+      <p:sp>
+        <p:nvSpPr>
+          <p:cNvPr id="2" name="Text 2"/>
+          <p:cNvSpPr/>
+          <p:nvPr>
+            <p:ph idx="102" type="body" hasCustomPrompt="1"/>
+          </p:nvPr>
+        </p:nvSpPr>
+        <p:spPr>
+          <a:xfrm>
+            <a:off x="548640" y="365760"/>
+            <a:ext cx="11094415" cy="310896"/>
+          </a:xfrm>
+          <a:prstGeom prst="rect">
+            <a:avLst/>
+          </a:prstGeom>
+          <a:noFill/>
+          <a:ln/>
+        </p:spPr>
+        <p:txBody>
+          <a:bodyPr wrap="square" lIns="0" tIns="0" rIns="0" bIns="0" rtlCol="0" anchor="ctr"/>
+          <a:lstStyle/>
+          <a:p>
+            <a:pPr algn="l" indent="0" marL="0">
+              <a:buNone/>
+            </a:pPr>
+            <a:r>
+              <a:rPr lang="en-US" sz="1200" b="1" dirty="0">
+                <a:solidFill>
+                  <a:srgbClr val="A8854A"/>
+                </a:solidFill>
+                <a:latin typeface="Yu Gothic" pitchFamily="34" charset="0"/>
+                <a:ea typeface="Yu Gothic" pitchFamily="34" charset="-122"/>
+                <a:cs typeface="Yu Gothic" pitchFamily="34" charset="-120"/>
+              </a:rPr>
+              <a:t>P19｜新築と中古で住宅ローン控除はどう違う？</a:t>
+            </a:r>
+            <a:endParaRPr lang="en-US" sz="1200" dirty="0"/>
+          </a:p>
+        </p:txBody>
+      </p:sp>
+      <p:sp>
+        <p:nvSpPr>
+          <p:cNvPr id="3" name="Text 2"/>
+          <p:cNvSpPr/>
+          <p:nvPr>
+            <p:ph idx="103" type="title" hasCustomPrompt="1"/>
+          </p:nvPr>
+        </p:nvSpPr>
+        <p:spPr>
+          <a:xfrm>
+            <a:off x="548640" y="694944"/>
+            <a:ext cx="11094415" cy="731520"/>
+          </a:xfrm>
+          <a:prstGeom prst="rect">
+            <a:avLst/>
+          </a:prstGeom>
+          <a:noFill/>
+          <a:ln/>
+        </p:spPr>
+        <p:txBody>
+          <a:bodyPr wrap="square" lIns="0" tIns="0" rIns="0" bIns="0" rtlCol="0" anchor="ctr"/>
+          <a:lstStyle/>
+          <a:p>
+            <a:pPr algn="l" indent="0" marL="0">
+              <a:buNone/>
+            </a:pPr>
+            <a:r>
+              <a:rPr lang="en-US" sz="2600" b="1" dirty="0">
+                <a:solidFill>
+                  <a:srgbClr val="1C2B45"/>
+                </a:solidFill>
+                <a:latin typeface="Yu Mincho" pitchFamily="34" charset="0"/>
+                <a:ea typeface="Yu Mincho" pitchFamily="34" charset="-122"/>
+                <a:cs typeface="Yu Mincho" pitchFamily="34" charset="-120"/>
+              </a:rPr>
+              <a:t>控除の枠は「新築か中古か」より、「住宅の性能」で決まる</a:t>
+            </a:r>
+            <a:endParaRPr lang="en-US" sz="2600" dirty="0"/>
+          </a:p>
+        </p:txBody>
+      </p:sp>
+      <p:sp>
+        <p:nvSpPr>
+          <p:cNvPr id="5" name="Shape 2"/>
+          <p:cNvSpPr/>
+          <p:nvPr/>
+        </p:nvSpPr>
+        <p:spPr>
+          <a:xfrm>
+            <a:off x="548640" y="1645920"/>
+            <a:ext cx="5410048" cy="3246120"/>
+          </a:xfrm>
+          <a:prstGeom prst="roundRect">
+            <a:avLst>
+              <a:gd name="adj" fmla="val 2254"/>
+            </a:avLst>
+          </a:prstGeom>
+          <a:solidFill>
+            <a:srgbClr val="F2F3F5"/>
+          </a:solidFill>
+          <a:ln w="12700">
+            <a:solidFill>
+              <a:srgbClr val="F2F3F5"/>
+            </a:solidFill>
+            <a:prstDash val="solid"/>
+          </a:ln>
+        </p:spPr>
+      </p:sp>
+      <p:sp>
+        <p:nvSpPr>
+          <p:cNvPr id="6" name="Text 3"/>
+          <p:cNvSpPr txBox="1"/>
+          <p:nvPr/>
+        </p:nvSpPr>
+        <p:spPr>
+          <a:xfrm>
+            <a:off x="777240" y="1719072"/>
+            <a:ext cx="4952848" cy="365760"/>
+          </a:xfrm>
+          <a:prstGeom prst="rect">
+            <a:avLst/>
+          </a:prstGeom>
+          <a:noFill/>
+          <a:ln/>
+        </p:spPr>
+        <p:txBody>
+          <a:bodyPr wrap="square" lIns="0" tIns="0" rIns="0" bIns="0" rtlCol="0" anchor="ctr"/>
+          <a:lstStyle/>
+          <a:p>
+            <a:pPr indent="0" marL="0">
+              <a:buNone/>
+            </a:pPr>
+            <a:r>
+              <a:rPr lang="en-US" sz="1600" b="1" dirty="0">
+                <a:solidFill>
+                  <a:srgbClr val="1C2B45"/>
+                </a:solidFill>
+                <a:latin typeface="Yu Gothic" pitchFamily="34" charset="0"/>
+                <a:ea typeface="Yu Gothic" pitchFamily="34" charset="-122"/>
+                <a:cs typeface="Yu Gothic" pitchFamily="34" charset="-120"/>
+              </a:rPr>
+              <a:t>新築（買取再販は新築に準じる）</a:t>
+            </a:r>
+            <a:endParaRPr lang="en-US" sz="1600" dirty="0"/>
+          </a:p>
+        </p:txBody>
+      </p:sp>
+      <p:sp>
+        <p:nvSpPr>
+          <p:cNvPr id="7" name="Text 4"/>
+          <p:cNvSpPr txBox="1"/>
+          <p:nvPr/>
+        </p:nvSpPr>
+        <p:spPr>
+          <a:xfrm>
+            <a:off x="3828136" y="1755648"/>
+            <a:ext cx="1901952" cy="274320"/>
+          </a:xfrm>
+          <a:prstGeom prst="rect">
+            <a:avLst/>
+          </a:prstGeom>
+          <a:noFill/>
+          <a:ln/>
+        </p:spPr>
+        <p:txBody>
+          <a:bodyPr wrap="square" lIns="0" tIns="0" rIns="0" bIns="0" rtlCol="0" anchor="ctr"/>
+          <a:lstStyle/>
+          <a:p>
+            <a:pPr algn="r" indent="0" marL="0">
+              <a:buNone/>
+            </a:pPr>
+            <a:r>
+              <a:rPr lang="en-US" sz="1000" dirty="0">
+                <a:solidFill>
+                  <a:srgbClr val="6B7280"/>
+                </a:solidFill>
+                <a:latin typeface="Yu Gothic" pitchFamily="34" charset="0"/>
+                <a:ea typeface="Yu Gothic" pitchFamily="34" charset="-122"/>
+                <a:cs typeface="Yu Gothic" pitchFamily="34" charset="-120"/>
+              </a:rPr>
+              <a:t>控除期間</a:t>
+            </a:r>
+            <a:endParaRPr lang="en-US" sz="1000" dirty="0"/>
+          </a:p>
+        </p:txBody>
+      </p:sp>
+      <p:sp>
+        <p:nvSpPr>
+          <p:cNvPr id="8" name="Text 5"/>
+          <p:cNvSpPr txBox="1"/>
+          <p:nvPr/>
+        </p:nvSpPr>
+        <p:spPr>
+          <a:xfrm>
+            <a:off x="2560320" y="2103120"/>
+            <a:ext cx="1097280" cy="228600"/>
+          </a:xfrm>
+          <a:prstGeom prst="rect">
+            <a:avLst/>
+          </a:prstGeom>
+          <a:noFill/>
+          <a:ln/>
+        </p:spPr>
+        <p:txBody>
+          <a:bodyPr wrap="square" lIns="0" tIns="0" rIns="0" bIns="0" rtlCol="0" anchor="t"/>
+          <a:lstStyle/>
+          <a:p>
+            <a:pPr indent="0" marL="0">
+              <a:buNone/>
+            </a:pPr>
+            <a:r>
+              <a:rPr lang="en-US" sz="1000" dirty="0">
+                <a:solidFill>
+                  <a:srgbClr val="6B7280"/>
+                </a:solidFill>
+                <a:latin typeface="Yu Gothic" pitchFamily="34" charset="0"/>
+                <a:ea typeface="Yu Gothic" pitchFamily="34" charset="-122"/>
+                <a:cs typeface="Yu Gothic" pitchFamily="34" charset="-120"/>
+              </a:rPr>
+              <a:t>借入限度額</a:t>
+            </a:r>
+            <a:endParaRPr lang="en-US" sz="1000" dirty="0"/>
+          </a:p>
+        </p:txBody>
+      </p:sp>
+      <p:sp>
+        <p:nvSpPr>
+          <p:cNvPr id="9" name="Text 6"/>
+          <p:cNvSpPr txBox="1"/>
+          <p:nvPr/>
+        </p:nvSpPr>
+        <p:spPr>
+          <a:xfrm>
+            <a:off x="3736696" y="2103120"/>
+            <a:ext cx="365760" cy="228600"/>
+          </a:xfrm>
+          <a:prstGeom prst="rect">
+            <a:avLst/>
+          </a:prstGeom>
+          <a:noFill/>
+          <a:ln/>
+        </p:spPr>
+        <p:txBody>
+          <a:bodyPr wrap="square" lIns="0" tIns="0" rIns="0" bIns="0" rtlCol="0" anchor="t"/>
+          <a:lstStyle/>
+          <a:p>
+            <a:pPr algn="ctr" indent="0" marL="0">
+              <a:buNone/>
+            </a:pPr>
+            <a:r>
+              <a:rPr lang="en-US" sz="900" dirty="0">
+                <a:solidFill>
+                  <a:srgbClr val="6B7280"/>
+                </a:solidFill>
+                <a:latin typeface="Yu Gothic" pitchFamily="34" charset="0"/>
+                <a:ea typeface="Yu Gothic" pitchFamily="34" charset="-122"/>
+                <a:cs typeface="Yu Gothic" pitchFamily="34" charset="-120"/>
+              </a:rPr>
+              <a:t>1年</a:t>
+            </a:r>
+            <a:endParaRPr lang="en-US" sz="900" dirty="0"/>
+          </a:p>
+        </p:txBody>
+      </p:sp>
+      <p:sp>
+        <p:nvSpPr>
+          <p:cNvPr id="10" name="Text 7"/>
+          <p:cNvSpPr txBox="1"/>
+          <p:nvPr/>
+        </p:nvSpPr>
+        <p:spPr>
+          <a:xfrm>
+            <a:off x="4321912" y="2103120"/>
+            <a:ext cx="365760" cy="228600"/>
+          </a:xfrm>
+          <a:prstGeom prst="rect">
+            <a:avLst/>
+          </a:prstGeom>
+          <a:noFill/>
+          <a:ln/>
+        </p:spPr>
+        <p:txBody>
+          <a:bodyPr wrap="square" lIns="0" tIns="0" rIns="0" bIns="0" rtlCol="0" anchor="t"/>
+          <a:lstStyle/>
+          <a:p>
+            <a:pPr algn="ctr" indent="0" marL="0">
+              <a:buNone/>
+            </a:pPr>
+            <a:r>
+              <a:rPr lang="en-US" sz="900" dirty="0">
+                <a:solidFill>
+                  <a:srgbClr val="6B7280"/>
+                </a:solidFill>
+                <a:latin typeface="Yu Gothic" pitchFamily="34" charset="0"/>
+                <a:ea typeface="Yu Gothic" pitchFamily="34" charset="-122"/>
+                <a:cs typeface="Yu Gothic" pitchFamily="34" charset="-120"/>
+              </a:rPr>
+              <a:t>5年</a:t>
+            </a:r>
+            <a:endParaRPr lang="en-US" sz="900" dirty="0"/>
+          </a:p>
+        </p:txBody>
+      </p:sp>
+      <p:sp>
+        <p:nvSpPr>
+          <p:cNvPr id="11" name="Text 8"/>
+          <p:cNvSpPr txBox="1"/>
+          <p:nvPr/>
+        </p:nvSpPr>
+        <p:spPr>
+          <a:xfrm>
+            <a:off x="5053432" y="2103120"/>
+            <a:ext cx="365760" cy="228600"/>
+          </a:xfrm>
+          <a:prstGeom prst="rect">
+            <a:avLst/>
+          </a:prstGeom>
+          <a:noFill/>
+          <a:ln/>
+        </p:spPr>
+        <p:txBody>
+          <a:bodyPr wrap="square" lIns="0" tIns="0" rIns="0" bIns="0" rtlCol="0" anchor="t"/>
+          <a:lstStyle/>
+          <a:p>
+            <a:pPr algn="ctr" indent="0" marL="0">
+              <a:buNone/>
+            </a:pPr>
+            <a:r>
+              <a:rPr lang="en-US" sz="900" dirty="0">
+                <a:solidFill>
+                  <a:srgbClr val="6B7280"/>
+                </a:solidFill>
+                <a:latin typeface="Yu Gothic" pitchFamily="34" charset="0"/>
+                <a:ea typeface="Yu Gothic" pitchFamily="34" charset="-122"/>
+                <a:cs typeface="Yu Gothic" pitchFamily="34" charset="-120"/>
+              </a:rPr>
+              <a:t>10年</a:t>
+            </a:r>
+            <a:endParaRPr lang="en-US" sz="900" dirty="0"/>
+          </a:p>
+        </p:txBody>
+      </p:sp>
+      <p:sp>
+        <p:nvSpPr>
+          <p:cNvPr id="12" name="Text 9"/>
+          <p:cNvSpPr txBox="1"/>
+          <p:nvPr/>
+        </p:nvSpPr>
+        <p:spPr>
+          <a:xfrm>
+            <a:off x="5492344" y="2103120"/>
+            <a:ext cx="365760" cy="228600"/>
+          </a:xfrm>
+          <a:prstGeom prst="rect">
+            <a:avLst/>
+          </a:prstGeom>
+          <a:noFill/>
+          <a:ln/>
+        </p:spPr>
+        <p:txBody>
+          <a:bodyPr wrap="square" lIns="0" tIns="0" rIns="0" bIns="0" rtlCol="0" anchor="t"/>
+          <a:lstStyle/>
+          <a:p>
+            <a:pPr algn="ctr" indent="0" marL="0">
+              <a:buNone/>
+            </a:pPr>
+            <a:r>
+              <a:rPr lang="en-US" sz="900" dirty="0">
+                <a:solidFill>
+                  <a:srgbClr val="6B7280"/>
+                </a:solidFill>
+                <a:latin typeface="Yu Gothic" pitchFamily="34" charset="0"/>
+                <a:ea typeface="Yu Gothic" pitchFamily="34" charset="-122"/>
+                <a:cs typeface="Yu Gothic" pitchFamily="34" charset="-120"/>
+              </a:rPr>
+              <a:t>13年</a:t>
+            </a:r>
+            <a:endParaRPr lang="en-US" sz="900" dirty="0"/>
+          </a:p>
+        </p:txBody>
+      </p:sp>
+      <p:sp>
+        <p:nvSpPr>
+          <p:cNvPr id="13" name="Text 10"/>
+          <p:cNvSpPr txBox="1"/>
+          <p:nvPr/>
+        </p:nvSpPr>
+        <p:spPr>
+          <a:xfrm>
+            <a:off x="777240" y="2377440"/>
+            <a:ext cx="1783080" cy="329184"/>
+          </a:xfrm>
+          <a:prstGeom prst="rect">
+            <a:avLst/>
+          </a:prstGeom>
+          <a:noFill/>
+          <a:ln/>
+        </p:spPr>
+        <p:txBody>
+          <a:bodyPr wrap="square" lIns="0" tIns="0" rIns="0" bIns="0" rtlCol="0" anchor="ctr"/>
+          <a:lstStyle/>
+          <a:p>
+            <a:pPr indent="0" marL="0">
+              <a:buNone/>
+            </a:pPr>
+            <a:r>
+              <a:rPr lang="en-US" sz="1300" b="1" dirty="0">
+                <a:solidFill>
+                  <a:srgbClr val="1C2B45"/>
+                </a:solidFill>
+                <a:latin typeface="Yu Gothic" pitchFamily="34" charset="0"/>
+                <a:ea typeface="Yu Gothic" pitchFamily="34" charset="-122"/>
+                <a:cs typeface="Yu Gothic" pitchFamily="34" charset="-120"/>
+              </a:rPr>
+              <a:t>認定長期優良・低炭素</a:t>
+            </a:r>
+            <a:endParaRPr lang="en-US" sz="1300" dirty="0"/>
+          </a:p>
+        </p:txBody>
+      </p:sp>
+      <p:sp>
+        <p:nvSpPr>
+          <p:cNvPr id="14" name="Text 11"/>
+          <p:cNvSpPr txBox="1"/>
+          <p:nvPr/>
+        </p:nvSpPr>
+        <p:spPr>
+          <a:xfrm>
+            <a:off x="2560320" y="2377440"/>
+            <a:ext cx="1188720" cy="329184"/>
+          </a:xfrm>
+          <a:prstGeom prst="rect">
+            <a:avLst/>
+          </a:prstGeom>
+          <a:noFill/>
+          <a:ln/>
+        </p:spPr>
+        <p:txBody>
+          <a:bodyPr wrap="square" lIns="0" tIns="0" rIns="0" bIns="0" rtlCol="0" anchor="ctr"/>
+          <a:lstStyle/>
+          <a:p>
+            <a:pPr indent="0" marL="0">
+              <a:buNone/>
+            </a:pPr>
+            <a:r>
+              <a:rPr lang="en-US" sz="1600" b="1" dirty="0">
+                <a:solidFill>
+                  <a:srgbClr val="A8854A"/>
+                </a:solidFill>
+                <a:latin typeface="Yu Gothic" pitchFamily="34" charset="0"/>
+                <a:ea typeface="Yu Gothic" pitchFamily="34" charset="-122"/>
+                <a:cs typeface="Yu Gothic" pitchFamily="34" charset="-120"/>
+              </a:rPr>
+              <a:t>4,500万円</a:t>
+            </a:r>
+            <a:endParaRPr lang="en-US" sz="1600" dirty="0"/>
+          </a:p>
+        </p:txBody>
+      </p:sp>
+      <p:sp>
+        <p:nvSpPr>
+          <p:cNvPr id="15" name="Shape 12"/>
+          <p:cNvSpPr/>
+          <p:nvPr/>
+        </p:nvSpPr>
+        <p:spPr>
+          <a:xfrm>
+            <a:off x="3828136" y="2450592"/>
+            <a:ext cx="118872" cy="182880"/>
+          </a:xfrm>
+          <a:prstGeom prst="rect">
+            <a:avLst/>
+          </a:prstGeom>
+          <a:solidFill>
+            <a:srgbClr val="1C2B45"/>
+          </a:solidFill>
+          <a:ln w="12700">
+            <a:solidFill>
+              <a:srgbClr val="1C2B45"/>
+            </a:solidFill>
+            <a:prstDash val="solid"/>
+          </a:ln>
+        </p:spPr>
+      </p:sp>
+      <p:sp>
+        <p:nvSpPr>
+          <p:cNvPr id="16" name="Shape 13"/>
+          <p:cNvSpPr/>
+          <p:nvPr/>
+        </p:nvSpPr>
+        <p:spPr>
+          <a:xfrm>
+            <a:off x="3974440" y="2450592"/>
+            <a:ext cx="118872" cy="182880"/>
+          </a:xfrm>
+          <a:prstGeom prst="rect">
+            <a:avLst/>
+          </a:prstGeom>
+          <a:solidFill>
+            <a:srgbClr val="1C2B45"/>
+          </a:solidFill>
+          <a:ln w="12700">
+            <a:solidFill>
+              <a:srgbClr val="1C2B45"/>
+            </a:solidFill>
+            <a:prstDash val="solid"/>
+          </a:ln>
+        </p:spPr>
+      </p:sp>
+      <p:sp>
+        <p:nvSpPr>
+          <p:cNvPr id="17" name="Shape 14"/>
+          <p:cNvSpPr/>
+          <p:nvPr/>
+        </p:nvSpPr>
+        <p:spPr>
+          <a:xfrm>
+            <a:off x="4120744" y="2450592"/>
+            <a:ext cx="118872" cy="182880"/>
+          </a:xfrm>
+          <a:prstGeom prst="rect">
+            <a:avLst/>
+          </a:prstGeom>
+          <a:solidFill>
+            <a:srgbClr val="1C2B45"/>
+          </a:solidFill>
+          <a:ln w="12700">
+            <a:solidFill>
+              <a:srgbClr val="1C2B45"/>
+            </a:solidFill>
+            <a:prstDash val="solid"/>
+          </a:ln>
+        </p:spPr>
+      </p:sp>
+      <p:sp>
+        <p:nvSpPr>
+          <p:cNvPr id="18" name="Shape 15"/>
+          <p:cNvSpPr/>
+          <p:nvPr/>
+        </p:nvSpPr>
+        <p:spPr>
+          <a:xfrm>
+            <a:off x="4267048" y="2450592"/>
+            <a:ext cx="118872" cy="182880"/>
+          </a:xfrm>
+          <a:prstGeom prst="rect">
+            <a:avLst/>
+          </a:prstGeom>
+          <a:solidFill>
+            <a:srgbClr val="1C2B45"/>
+          </a:solidFill>
+          <a:ln w="12700">
+            <a:solidFill>
+              <a:srgbClr val="1C2B45"/>
+            </a:solidFill>
+            <a:prstDash val="solid"/>
+          </a:ln>
+        </p:spPr>
+      </p:sp>
+      <p:sp>
+        <p:nvSpPr>
+          <p:cNvPr id="19" name="Shape 16"/>
+          <p:cNvSpPr/>
+          <p:nvPr/>
+        </p:nvSpPr>
+        <p:spPr>
+          <a:xfrm>
+            <a:off x="4413352" y="2450592"/>
+            <a:ext cx="118872" cy="182880"/>
+          </a:xfrm>
+          <a:prstGeom prst="rect">
+            <a:avLst/>
+          </a:prstGeom>
+          <a:solidFill>
+            <a:srgbClr val="1C2B45"/>
+          </a:solidFill>
+          <a:ln w="12700">
+            <a:solidFill>
+              <a:srgbClr val="1C2B45"/>
+            </a:solidFill>
+            <a:prstDash val="solid"/>
+          </a:ln>
+        </p:spPr>
+      </p:sp>
+      <p:sp>
+        <p:nvSpPr>
+          <p:cNvPr id="20" name="Shape 17"/>
+          <p:cNvSpPr/>
+          <p:nvPr/>
+        </p:nvSpPr>
+        <p:spPr>
+          <a:xfrm>
+            <a:off x="4559656" y="2450592"/>
+            <a:ext cx="118872" cy="182880"/>
+          </a:xfrm>
+          <a:prstGeom prst="rect">
+            <a:avLst/>
+          </a:prstGeom>
+          <a:solidFill>
+            <a:srgbClr val="1C2B45"/>
+          </a:solidFill>
+          <a:ln w="12700">
+            <a:solidFill>
+              <a:srgbClr val="1C2B45"/>
+            </a:solidFill>
+            <a:prstDash val="solid"/>
+          </a:ln>
+        </p:spPr>
+      </p:sp>
+      <p:sp>
+        <p:nvSpPr>
+          <p:cNvPr id="21" name="Shape 18"/>
+          <p:cNvSpPr/>
+          <p:nvPr/>
+        </p:nvSpPr>
+        <p:spPr>
+          <a:xfrm>
+            <a:off x="4705960" y="2450592"/>
+            <a:ext cx="118872" cy="182880"/>
+          </a:xfrm>
+          <a:prstGeom prst="rect">
+            <a:avLst/>
+          </a:prstGeom>
+          <a:solidFill>
+            <a:srgbClr val="1C2B45"/>
+          </a:solidFill>
+          <a:ln w="12700">
+            <a:solidFill>
+              <a:srgbClr val="1C2B45"/>
+            </a:solidFill>
+            <a:prstDash val="solid"/>
+          </a:ln>
+        </p:spPr>
+      </p:sp>
+      <p:sp>
+        <p:nvSpPr>
+          <p:cNvPr id="22" name="Shape 19"/>
+          <p:cNvSpPr/>
+          <p:nvPr/>
+        </p:nvSpPr>
+        <p:spPr>
+          <a:xfrm>
+            <a:off x="4852264" y="2450592"/>
+            <a:ext cx="118872" cy="182880"/>
+          </a:xfrm>
+          <a:prstGeom prst="rect">
+            <a:avLst/>
+          </a:prstGeom>
+          <a:solidFill>
+            <a:srgbClr val="1C2B45"/>
+          </a:solidFill>
+          <a:ln w="12700">
+            <a:solidFill>
+              <a:srgbClr val="1C2B45"/>
+            </a:solidFill>
+            <a:prstDash val="solid"/>
+          </a:ln>
+        </p:spPr>
+      </p:sp>
+      <p:sp>
+        <p:nvSpPr>
+          <p:cNvPr id="23" name="Shape 20"/>
+          <p:cNvSpPr/>
+          <p:nvPr/>
+        </p:nvSpPr>
+        <p:spPr>
+          <a:xfrm>
+            <a:off x="4998568" y="2450592"/>
+            <a:ext cx="118872" cy="182880"/>
+          </a:xfrm>
+          <a:prstGeom prst="rect">
+            <a:avLst/>
+          </a:prstGeom>
+          <a:solidFill>
+            <a:srgbClr val="1C2B45"/>
+          </a:solidFill>
+          <a:ln w="12700">
+            <a:solidFill>
+              <a:srgbClr val="1C2B45"/>
+            </a:solidFill>
+            <a:prstDash val="solid"/>
+          </a:ln>
+        </p:spPr>
+      </p:sp>
+      <p:sp>
+        <p:nvSpPr>
+          <p:cNvPr id="24" name="Shape 21"/>
+          <p:cNvSpPr/>
+          <p:nvPr/>
+        </p:nvSpPr>
+        <p:spPr>
+          <a:xfrm>
+            <a:off x="5144872" y="2450592"/>
+            <a:ext cx="118872" cy="182880"/>
+          </a:xfrm>
+          <a:prstGeom prst="rect">
+            <a:avLst/>
+          </a:prstGeom>
+          <a:solidFill>
+            <a:srgbClr val="1C2B45"/>
+          </a:solidFill>
+          <a:ln w="12700">
+            <a:solidFill>
+              <a:srgbClr val="1C2B45"/>
+            </a:solidFill>
+            <a:prstDash val="solid"/>
+          </a:ln>
+        </p:spPr>
+      </p:sp>
+      <p:sp>
+        <p:nvSpPr>
+          <p:cNvPr id="25" name="Shape 22"/>
+          <p:cNvSpPr/>
+          <p:nvPr/>
+        </p:nvSpPr>
+        <p:spPr>
+          <a:xfrm>
+            <a:off x="5291176" y="2450592"/>
+            <a:ext cx="118872" cy="182880"/>
+          </a:xfrm>
+          <a:prstGeom prst="rect">
+            <a:avLst/>
+          </a:prstGeom>
+          <a:solidFill>
+            <a:srgbClr val="1C2B45"/>
+          </a:solidFill>
+          <a:ln w="12700">
+            <a:solidFill>
+              <a:srgbClr val="1C2B45"/>
+            </a:solidFill>
+            <a:prstDash val="solid"/>
+          </a:ln>
+        </p:spPr>
+      </p:sp>
+      <p:sp>
+        <p:nvSpPr>
+          <p:cNvPr id="26" name="Shape 23"/>
+          <p:cNvSpPr/>
+          <p:nvPr/>
+        </p:nvSpPr>
+        <p:spPr>
+          <a:xfrm>
+            <a:off x="5437480" y="2450592"/>
+            <a:ext cx="118872" cy="182880"/>
+          </a:xfrm>
+          <a:prstGeom prst="rect">
+            <a:avLst/>
+          </a:prstGeom>
+          <a:solidFill>
+            <a:srgbClr val="1C2B45"/>
+          </a:solidFill>
+          <a:ln w="12700">
+            <a:solidFill>
+              <a:srgbClr val="1C2B45"/>
+            </a:solidFill>
+            <a:prstDash val="solid"/>
+          </a:ln>
+        </p:spPr>
+      </p:sp>
+      <p:sp>
+        <p:nvSpPr>
+          <p:cNvPr id="27" name="Shape 24"/>
+          <p:cNvSpPr/>
+          <p:nvPr/>
+        </p:nvSpPr>
+        <p:spPr>
+          <a:xfrm>
+            <a:off x="5583784" y="2450592"/>
+            <a:ext cx="118872" cy="182880"/>
+          </a:xfrm>
+          <a:prstGeom prst="rect">
+            <a:avLst/>
+          </a:prstGeom>
+          <a:solidFill>
+            <a:srgbClr val="1C2B45"/>
+          </a:solidFill>
+          <a:ln w="12700">
+            <a:solidFill>
+              <a:srgbClr val="1C2B45"/>
+            </a:solidFill>
+            <a:prstDash val="solid"/>
+          </a:ln>
+        </p:spPr>
+      </p:sp>
+      <p:sp>
+        <p:nvSpPr>
+          <p:cNvPr id="28" name="Text 25"/>
+          <p:cNvSpPr txBox="1"/>
+          <p:nvPr/>
+        </p:nvSpPr>
+        <p:spPr>
+          <a:xfrm>
+            <a:off x="777240" y="2999232"/>
+            <a:ext cx="1783080" cy="329184"/>
+          </a:xfrm>
+          <a:prstGeom prst="rect">
+            <a:avLst/>
+          </a:prstGeom>
+          <a:noFill/>
+          <a:ln/>
+        </p:spPr>
+        <p:txBody>
+          <a:bodyPr wrap="square" lIns="0" tIns="0" rIns="0" bIns="0" rtlCol="0" anchor="ctr"/>
+          <a:lstStyle/>
+          <a:p>
+            <a:pPr indent="0" marL="0">
+              <a:buNone/>
+            </a:pPr>
+            <a:r>
+              <a:rPr lang="en-US" sz="1300" b="1" dirty="0">
+                <a:solidFill>
+                  <a:srgbClr val="1C2B45"/>
+                </a:solidFill>
+                <a:latin typeface="Yu Gothic" pitchFamily="34" charset="0"/>
+                <a:ea typeface="Yu Gothic" pitchFamily="34" charset="-122"/>
+                <a:cs typeface="Yu Gothic" pitchFamily="34" charset="-120"/>
+              </a:rPr>
+              <a:t>ZEH水準省エネ</a:t>
+            </a:r>
+            <a:endParaRPr lang="en-US" sz="1300" dirty="0"/>
+          </a:p>
+        </p:txBody>
+      </p:sp>
+      <p:sp>
+        <p:nvSpPr>
+          <p:cNvPr id="29" name="Text 26"/>
+          <p:cNvSpPr txBox="1"/>
+          <p:nvPr/>
+        </p:nvSpPr>
+        <p:spPr>
+          <a:xfrm>
+            <a:off x="2560320" y="2999232"/>
+            <a:ext cx="1188720" cy="329184"/>
+          </a:xfrm>
+          <a:prstGeom prst="rect">
+            <a:avLst/>
+          </a:prstGeom>
+          <a:noFill/>
+          <a:ln/>
+        </p:spPr>
+        <p:txBody>
+          <a:bodyPr wrap="square" lIns="0" tIns="0" rIns="0" bIns="0" rtlCol="0" anchor="ctr"/>
+          <a:lstStyle/>
+          <a:p>
+            <a:pPr indent="0" marL="0">
+              <a:buNone/>
+            </a:pPr>
+            <a:r>
+              <a:rPr lang="en-US" sz="1600" b="1" dirty="0">
+                <a:solidFill>
+                  <a:srgbClr val="A8854A"/>
+                </a:solidFill>
+                <a:latin typeface="Yu Gothic" pitchFamily="34" charset="0"/>
+                <a:ea typeface="Yu Gothic" pitchFamily="34" charset="-122"/>
+                <a:cs typeface="Yu Gothic" pitchFamily="34" charset="-120"/>
+              </a:rPr>
+              <a:t>3,500万円</a:t>
+            </a:r>
+            <a:endParaRPr lang="en-US" sz="1600" dirty="0"/>
+          </a:p>
+        </p:txBody>
+      </p:sp>
+      <p:sp>
+        <p:nvSpPr>
+          <p:cNvPr id="30" name="Shape 27"/>
+          <p:cNvSpPr/>
+          <p:nvPr/>
+        </p:nvSpPr>
+        <p:spPr>
+          <a:xfrm>
+            <a:off x="3828136" y="3072384"/>
+            <a:ext cx="118872" cy="182880"/>
+          </a:xfrm>
+          <a:prstGeom prst="rect">
+            <a:avLst/>
+          </a:prstGeom>
+          <a:solidFill>
+            <a:srgbClr val="1C2B45"/>
+          </a:solidFill>
+          <a:ln w="12700">
+            <a:solidFill>
+              <a:srgbClr val="1C2B45"/>
+            </a:solidFill>
+            <a:prstDash val="solid"/>
+          </a:ln>
+        </p:spPr>
+      </p:sp>
+      <p:sp>
+        <p:nvSpPr>
+          <p:cNvPr id="31" name="Shape 28"/>
+          <p:cNvSpPr/>
+          <p:nvPr/>
+        </p:nvSpPr>
+        <p:spPr>
+          <a:xfrm>
+            <a:off x="3974440" y="3072384"/>
+            <a:ext cx="118872" cy="182880"/>
+          </a:xfrm>
+          <a:prstGeom prst="rect">
+            <a:avLst/>
+          </a:prstGeom>
+          <a:solidFill>
+            <a:srgbClr val="1C2B45"/>
+          </a:solidFill>
+          <a:ln w="12700">
+            <a:solidFill>
+              <a:srgbClr val="1C2B45"/>
+            </a:solidFill>
+            <a:prstDash val="solid"/>
+          </a:ln>
+        </p:spPr>
+      </p:sp>
+      <p:sp>
+        <p:nvSpPr>
+          <p:cNvPr id="32" name="Shape 29"/>
+          <p:cNvSpPr/>
+          <p:nvPr/>
+        </p:nvSpPr>
+        <p:spPr>
+          <a:xfrm>
+            <a:off x="4120744" y="3072384"/>
+            <a:ext cx="118872" cy="182880"/>
+          </a:xfrm>
+          <a:prstGeom prst="rect">
+            <a:avLst/>
+          </a:prstGeom>
+          <a:solidFill>
+            <a:srgbClr val="1C2B45"/>
+          </a:solidFill>
+          <a:ln w="12700">
+            <a:solidFill>
+              <a:srgbClr val="1C2B45"/>
+            </a:solidFill>
+            <a:prstDash val="solid"/>
+          </a:ln>
+        </p:spPr>
+      </p:sp>
+      <p:sp>
+        <p:nvSpPr>
+          <p:cNvPr id="33" name="Shape 30"/>
+          <p:cNvSpPr/>
+          <p:nvPr/>
+        </p:nvSpPr>
+        <p:spPr>
+          <a:xfrm>
+            <a:off x="4267048" y="3072384"/>
+            <a:ext cx="118872" cy="182880"/>
+          </a:xfrm>
+          <a:prstGeom prst="rect">
+            <a:avLst/>
+          </a:prstGeom>
+          <a:solidFill>
+            <a:srgbClr val="1C2B45"/>
+          </a:solidFill>
+          <a:ln w="12700">
+            <a:solidFill>
+              <a:srgbClr val="1C2B45"/>
+            </a:solidFill>
+            <a:prstDash val="solid"/>
+          </a:ln>
+        </p:spPr>
+      </p:sp>
+      <p:sp>
+        <p:nvSpPr>
+          <p:cNvPr id="34" name="Shape 31"/>
+          <p:cNvSpPr/>
+          <p:nvPr/>
+        </p:nvSpPr>
+        <p:spPr>
+          <a:xfrm>
+            <a:off x="4413352" y="3072384"/>
+            <a:ext cx="118872" cy="182880"/>
+          </a:xfrm>
+          <a:prstGeom prst="rect">
+            <a:avLst/>
+          </a:prstGeom>
+          <a:solidFill>
+            <a:srgbClr val="1C2B45"/>
+          </a:solidFill>
+          <a:ln w="12700">
+            <a:solidFill>
+              <a:srgbClr val="1C2B45"/>
+            </a:solidFill>
+            <a:prstDash val="solid"/>
+          </a:ln>
+        </p:spPr>
+      </p:sp>
+      <p:sp>
+        <p:nvSpPr>
+          <p:cNvPr id="35" name="Shape 32"/>
+          <p:cNvSpPr/>
+          <p:nvPr/>
+        </p:nvSpPr>
+        <p:spPr>
+          <a:xfrm>
+            <a:off x="4559656" y="3072384"/>
+            <a:ext cx="118872" cy="182880"/>
+          </a:xfrm>
+          <a:prstGeom prst="rect">
+            <a:avLst/>
+          </a:prstGeom>
+          <a:solidFill>
+            <a:srgbClr val="1C2B45"/>
+          </a:solidFill>
+          <a:ln w="12700">
+            <a:solidFill>
+              <a:srgbClr val="1C2B45"/>
+            </a:solidFill>
+            <a:prstDash val="solid"/>
+          </a:ln>
+        </p:spPr>
+      </p:sp>
+      <p:sp>
+        <p:nvSpPr>
+          <p:cNvPr id="36" name="Shape 33"/>
+          <p:cNvSpPr/>
+          <p:nvPr/>
+        </p:nvSpPr>
+        <p:spPr>
+          <a:xfrm>
+            <a:off x="4705960" y="3072384"/>
+            <a:ext cx="118872" cy="182880"/>
+          </a:xfrm>
+          <a:prstGeom prst="rect">
+            <a:avLst/>
+          </a:prstGeom>
+          <a:solidFill>
+            <a:srgbClr val="1C2B45"/>
+          </a:solidFill>
+          <a:ln w="12700">
+            <a:solidFill>
+              <a:srgbClr val="1C2B45"/>
+            </a:solidFill>
+            <a:prstDash val="solid"/>
+          </a:ln>
+        </p:spPr>
+      </p:sp>
+      <p:sp>
+        <p:nvSpPr>
+          <p:cNvPr id="37" name="Shape 34"/>
+          <p:cNvSpPr/>
+          <p:nvPr/>
+        </p:nvSpPr>
+        <p:spPr>
+          <a:xfrm>
+            <a:off x="4852264" y="3072384"/>
+            <a:ext cx="118872" cy="182880"/>
+          </a:xfrm>
+          <a:prstGeom prst="rect">
+            <a:avLst/>
+          </a:prstGeom>
+          <a:solidFill>
+            <a:srgbClr val="1C2B45"/>
+          </a:solidFill>
+          <a:ln w="12700">
+            <a:solidFill>
+              <a:srgbClr val="1C2B45"/>
+            </a:solidFill>
+            <a:prstDash val="solid"/>
+          </a:ln>
+        </p:spPr>
+      </p:sp>
+      <p:sp>
+        <p:nvSpPr>
+          <p:cNvPr id="38" name="Shape 35"/>
+          <p:cNvSpPr/>
+          <p:nvPr/>
+        </p:nvSpPr>
+        <p:spPr>
+          <a:xfrm>
+            <a:off x="4998568" y="3072384"/>
+            <a:ext cx="118872" cy="182880"/>
+          </a:xfrm>
+          <a:prstGeom prst="rect">
+            <a:avLst/>
+          </a:prstGeom>
+          <a:solidFill>
+            <a:srgbClr val="1C2B45"/>
+          </a:solidFill>
+          <a:ln w="12700">
+            <a:solidFill>
+              <a:srgbClr val="1C2B45"/>
+            </a:solidFill>
+            <a:prstDash val="solid"/>
+          </a:ln>
+        </p:spPr>
+      </p:sp>
+      <p:sp>
+        <p:nvSpPr>
+          <p:cNvPr id="39" name="Shape 36"/>
+          <p:cNvSpPr/>
+          <p:nvPr/>
+        </p:nvSpPr>
+        <p:spPr>
+          <a:xfrm>
+            <a:off x="5144872" y="3072384"/>
+            <a:ext cx="118872" cy="182880"/>
+          </a:xfrm>
+          <a:prstGeom prst="rect">
+            <a:avLst/>
+          </a:prstGeom>
+          <a:solidFill>
+            <a:srgbClr val="1C2B45"/>
+          </a:solidFill>
+          <a:ln w="12700">
+            <a:solidFill>
+              <a:srgbClr val="1C2B45"/>
+            </a:solidFill>
+            <a:prstDash val="solid"/>
+          </a:ln>
+        </p:spPr>
+      </p:sp>
+      <p:sp>
+        <p:nvSpPr>
+          <p:cNvPr id="40" name="Shape 37"/>
+          <p:cNvSpPr/>
+          <p:nvPr/>
+        </p:nvSpPr>
+        <p:spPr>
+          <a:xfrm>
+            <a:off x="5291176" y="3072384"/>
+            <a:ext cx="118872" cy="182880"/>
+          </a:xfrm>
+          <a:prstGeom prst="rect">
+            <a:avLst/>
+          </a:prstGeom>
+          <a:solidFill>
+            <a:srgbClr val="1C2B45"/>
+          </a:solidFill>
+          <a:ln w="12700">
+            <a:solidFill>
+              <a:srgbClr val="1C2B45"/>
+            </a:solidFill>
+            <a:prstDash val="solid"/>
+          </a:ln>
+        </p:spPr>
+      </p:sp>
+      <p:sp>
+        <p:nvSpPr>
+          <p:cNvPr id="41" name="Shape 38"/>
+          <p:cNvSpPr/>
+          <p:nvPr/>
+        </p:nvSpPr>
+        <p:spPr>
+          <a:xfrm>
+            <a:off x="5437480" y="3072384"/>
+            <a:ext cx="118872" cy="182880"/>
+          </a:xfrm>
+          <a:prstGeom prst="rect">
+            <a:avLst/>
+          </a:prstGeom>
+          <a:solidFill>
+            <a:srgbClr val="1C2B45"/>
+          </a:solidFill>
+          <a:ln w="12700">
+            <a:solidFill>
+              <a:srgbClr val="1C2B45"/>
+            </a:solidFill>
+            <a:prstDash val="solid"/>
+          </a:ln>
+        </p:spPr>
+      </p:sp>
+      <p:sp>
+        <p:nvSpPr>
+          <p:cNvPr id="42" name="Shape 39"/>
+          <p:cNvSpPr/>
+          <p:nvPr/>
+        </p:nvSpPr>
+        <p:spPr>
+          <a:xfrm>
+            <a:off x="5583784" y="3072384"/>
+            <a:ext cx="118872" cy="182880"/>
+          </a:xfrm>
+          <a:prstGeom prst="rect">
+            <a:avLst/>
+          </a:prstGeom>
+          <a:solidFill>
+            <a:srgbClr val="1C2B45"/>
+          </a:solidFill>
+          <a:ln w="12700">
+            <a:solidFill>
+              <a:srgbClr val="1C2B45"/>
+            </a:solidFill>
+            <a:prstDash val="solid"/>
+          </a:ln>
+        </p:spPr>
+      </p:sp>
+      <p:sp>
+        <p:nvSpPr>
+          <p:cNvPr id="43" name="Text 40"/>
+          <p:cNvSpPr txBox="1"/>
+          <p:nvPr/>
+        </p:nvSpPr>
+        <p:spPr>
+          <a:xfrm>
+            <a:off x="777240" y="3621024"/>
+            <a:ext cx="1783080" cy="329184"/>
+          </a:xfrm>
+          <a:prstGeom prst="rect">
+            <a:avLst/>
+          </a:prstGeom>
+          <a:noFill/>
+          <a:ln/>
+        </p:spPr>
+        <p:txBody>
+          <a:bodyPr wrap="square" lIns="0" tIns="0" rIns="0" bIns="0" rtlCol="0" anchor="ctr"/>
+          <a:lstStyle/>
+          <a:p>
+            <a:pPr indent="0" marL="0">
+              <a:buNone/>
+            </a:pPr>
+            <a:r>
+              <a:rPr lang="en-US" sz="1300" b="1" dirty="0">
+                <a:solidFill>
+                  <a:srgbClr val="1C2B45"/>
+                </a:solidFill>
+                <a:latin typeface="Yu Gothic" pitchFamily="34" charset="0"/>
+                <a:ea typeface="Yu Gothic" pitchFamily="34" charset="-122"/>
+                <a:cs typeface="Yu Gothic" pitchFamily="34" charset="-120"/>
+              </a:rPr>
+              <a:t>省エネ基準適合</a:t>
+            </a:r>
+            <a:endParaRPr lang="en-US" sz="1300" dirty="0"/>
+          </a:p>
+        </p:txBody>
+      </p:sp>
+      <p:sp>
+        <p:nvSpPr>
+          <p:cNvPr id="44" name="Text 41"/>
+          <p:cNvSpPr txBox="1"/>
+          <p:nvPr/>
+        </p:nvSpPr>
+        <p:spPr>
+          <a:xfrm>
+            <a:off x="2560320" y="3621024"/>
+            <a:ext cx="1188720" cy="329184"/>
+          </a:xfrm>
+          <a:prstGeom prst="rect">
+            <a:avLst/>
+          </a:prstGeom>
+          <a:noFill/>
+          <a:ln/>
+        </p:spPr>
+        <p:txBody>
+          <a:bodyPr wrap="square" lIns="0" tIns="0" rIns="0" bIns="0" rtlCol="0" anchor="ctr"/>
+          <a:lstStyle/>
+          <a:p>
+            <a:pPr indent="0" marL="0">
+              <a:buNone/>
+            </a:pPr>
+            <a:r>
+              <a:rPr lang="en-US" sz="1600" b="1" dirty="0">
+                <a:solidFill>
+                  <a:srgbClr val="A8854A"/>
+                </a:solidFill>
+                <a:latin typeface="Yu Gothic" pitchFamily="34" charset="0"/>
+                <a:ea typeface="Yu Gothic" pitchFamily="34" charset="-122"/>
+                <a:cs typeface="Yu Gothic" pitchFamily="34" charset="-120"/>
+              </a:rPr>
+              <a:t>2,000万円</a:t>
+            </a:r>
+            <a:endParaRPr lang="en-US" sz="1600" dirty="0"/>
+          </a:p>
+        </p:txBody>
+      </p:sp>
+      <p:sp>
+        <p:nvSpPr>
+          <p:cNvPr id="45" name="Shape 42"/>
+          <p:cNvSpPr/>
+          <p:nvPr/>
+        </p:nvSpPr>
+        <p:spPr>
+          <a:xfrm>
+            <a:off x="3828136" y="3694176"/>
+            <a:ext cx="118872" cy="182880"/>
+          </a:xfrm>
+          <a:prstGeom prst="rect">
+            <a:avLst/>
+          </a:prstGeom>
+          <a:solidFill>
+            <a:srgbClr val="1C2B45"/>
+          </a:solidFill>
+          <a:ln w="12700">
+            <a:solidFill>
+              <a:srgbClr val="1C2B45"/>
+            </a:solidFill>
+            <a:prstDash val="solid"/>
+          </a:ln>
+        </p:spPr>
+      </p:sp>
+      <p:sp>
+        <p:nvSpPr>
+          <p:cNvPr id="46" name="Shape 43"/>
+          <p:cNvSpPr/>
+          <p:nvPr/>
+        </p:nvSpPr>
+        <p:spPr>
+          <a:xfrm>
+            <a:off x="3974440" y="3694176"/>
+            <a:ext cx="118872" cy="182880"/>
+          </a:xfrm>
+          <a:prstGeom prst="rect">
+            <a:avLst/>
+          </a:prstGeom>
+          <a:solidFill>
+            <a:srgbClr val="1C2B45"/>
+          </a:solidFill>
+          <a:ln w="12700">
+            <a:solidFill>
+              <a:srgbClr val="1C2B45"/>
+            </a:solidFill>
+            <a:prstDash val="solid"/>
+          </a:ln>
+        </p:spPr>
+      </p:sp>
+      <p:sp>
+        <p:nvSpPr>
+          <p:cNvPr id="47" name="Shape 44"/>
+          <p:cNvSpPr/>
+          <p:nvPr/>
+        </p:nvSpPr>
+        <p:spPr>
+          <a:xfrm>
+            <a:off x="4120744" y="3694176"/>
+            <a:ext cx="118872" cy="182880"/>
+          </a:xfrm>
+          <a:prstGeom prst="rect">
+            <a:avLst/>
+          </a:prstGeom>
+          <a:solidFill>
+            <a:srgbClr val="1C2B45"/>
+          </a:solidFill>
+          <a:ln w="12700">
+            <a:solidFill>
+              <a:srgbClr val="1C2B45"/>
+            </a:solidFill>
+            <a:prstDash val="solid"/>
+          </a:ln>
+        </p:spPr>
+      </p:sp>
+      <p:sp>
+        <p:nvSpPr>
+          <p:cNvPr id="48" name="Shape 45"/>
+          <p:cNvSpPr/>
+          <p:nvPr/>
+        </p:nvSpPr>
+        <p:spPr>
+          <a:xfrm>
+            <a:off x="4267048" y="3694176"/>
+            <a:ext cx="118872" cy="182880"/>
+          </a:xfrm>
+          <a:prstGeom prst="rect">
+            <a:avLst/>
+          </a:prstGeom>
+          <a:solidFill>
+            <a:srgbClr val="1C2B45"/>
+          </a:solidFill>
+          <a:ln w="12700">
+            <a:solidFill>
+              <a:srgbClr val="1C2B45"/>
+            </a:solidFill>
+            <a:prstDash val="solid"/>
+          </a:ln>
+        </p:spPr>
+      </p:sp>
+      <p:sp>
+        <p:nvSpPr>
+          <p:cNvPr id="49" name="Shape 46"/>
+          <p:cNvSpPr/>
+          <p:nvPr/>
+        </p:nvSpPr>
+        <p:spPr>
+          <a:xfrm>
+            <a:off x="4413352" y="3694176"/>
+            <a:ext cx="118872" cy="182880"/>
+          </a:xfrm>
+          <a:prstGeom prst="rect">
+            <a:avLst/>
+          </a:prstGeom>
+          <a:solidFill>
+            <a:srgbClr val="1C2B45"/>
+          </a:solidFill>
+          <a:ln w="12700">
+            <a:solidFill>
+              <a:srgbClr val="1C2B45"/>
+            </a:solidFill>
+            <a:prstDash val="solid"/>
+          </a:ln>
+        </p:spPr>
+      </p:sp>
+      <p:sp>
+        <p:nvSpPr>
+          <p:cNvPr id="50" name="Shape 47"/>
+          <p:cNvSpPr/>
+          <p:nvPr/>
+        </p:nvSpPr>
+        <p:spPr>
+          <a:xfrm>
+            <a:off x="4559656" y="3694176"/>
+            <a:ext cx="118872" cy="182880"/>
+          </a:xfrm>
+          <a:prstGeom prst="rect">
+            <a:avLst/>
+          </a:prstGeom>
+          <a:solidFill>
+            <a:srgbClr val="1C2B45"/>
+          </a:solidFill>
+          <a:ln w="12700">
+            <a:solidFill>
+              <a:srgbClr val="1C2B45"/>
+            </a:solidFill>
+            <a:prstDash val="solid"/>
+          </a:ln>
+        </p:spPr>
+      </p:sp>
+      <p:sp>
+        <p:nvSpPr>
+          <p:cNvPr id="51" name="Shape 48"/>
+          <p:cNvSpPr/>
+          <p:nvPr/>
+        </p:nvSpPr>
+        <p:spPr>
+          <a:xfrm>
+            <a:off x="4705960" y="3694176"/>
+            <a:ext cx="118872" cy="182880"/>
+          </a:xfrm>
+          <a:prstGeom prst="rect">
+            <a:avLst/>
+          </a:prstGeom>
+          <a:solidFill>
+            <a:srgbClr val="1C2B45"/>
+          </a:solidFill>
+          <a:ln w="12700">
+            <a:solidFill>
+              <a:srgbClr val="1C2B45"/>
+            </a:solidFill>
+            <a:prstDash val="solid"/>
+          </a:ln>
+        </p:spPr>
+      </p:sp>
+      <p:sp>
+        <p:nvSpPr>
+          <p:cNvPr id="52" name="Shape 49"/>
+          <p:cNvSpPr/>
+          <p:nvPr/>
+        </p:nvSpPr>
+        <p:spPr>
+          <a:xfrm>
+            <a:off x="4852264" y="3694176"/>
+            <a:ext cx="118872" cy="182880"/>
+          </a:xfrm>
+          <a:prstGeom prst="rect">
+            <a:avLst/>
+          </a:prstGeom>
+          <a:solidFill>
+            <a:srgbClr val="1C2B45"/>
+          </a:solidFill>
+          <a:ln w="12700">
+            <a:solidFill>
+              <a:srgbClr val="1C2B45"/>
+            </a:solidFill>
+            <a:prstDash val="solid"/>
+          </a:ln>
+        </p:spPr>
+      </p:sp>
+      <p:sp>
+        <p:nvSpPr>
+          <p:cNvPr id="53" name="Shape 50"/>
+          <p:cNvSpPr/>
+          <p:nvPr/>
+        </p:nvSpPr>
+        <p:spPr>
+          <a:xfrm>
+            <a:off x="4998568" y="3694176"/>
+            <a:ext cx="118872" cy="182880"/>
+          </a:xfrm>
+          <a:prstGeom prst="rect">
+            <a:avLst/>
+          </a:prstGeom>
+          <a:solidFill>
+            <a:srgbClr val="1C2B45"/>
+          </a:solidFill>
+          <a:ln w="12700">
+            <a:solidFill>
+              <a:srgbClr val="1C2B45"/>
+            </a:solidFill>
+            <a:prstDash val="solid"/>
+          </a:ln>
+        </p:spPr>
+      </p:sp>
+      <p:sp>
+        <p:nvSpPr>
+          <p:cNvPr id="54" name="Shape 51"/>
+          <p:cNvSpPr/>
+          <p:nvPr/>
+        </p:nvSpPr>
+        <p:spPr>
+          <a:xfrm>
+            <a:off x="5144872" y="3694176"/>
+            <a:ext cx="118872" cy="182880"/>
+          </a:xfrm>
+          <a:prstGeom prst="rect">
+            <a:avLst/>
+          </a:prstGeom>
+          <a:solidFill>
+            <a:srgbClr val="1C2B45"/>
+          </a:solidFill>
+          <a:ln w="12700">
+            <a:solidFill>
+              <a:srgbClr val="1C2B45"/>
+            </a:solidFill>
+            <a:prstDash val="solid"/>
+          </a:ln>
+        </p:spPr>
+      </p:sp>
+      <p:sp>
+        <p:nvSpPr>
+          <p:cNvPr id="55" name="Shape 52"/>
+          <p:cNvSpPr/>
+          <p:nvPr/>
+        </p:nvSpPr>
+        <p:spPr>
+          <a:xfrm>
+            <a:off x="5291176" y="3694176"/>
+            <a:ext cx="118872" cy="182880"/>
+          </a:xfrm>
+          <a:prstGeom prst="rect">
+            <a:avLst/>
+          </a:prstGeom>
+          <a:solidFill>
+            <a:srgbClr val="1C2B45"/>
+          </a:solidFill>
+          <a:ln w="12700">
+            <a:solidFill>
+              <a:srgbClr val="1C2B45"/>
+            </a:solidFill>
+            <a:prstDash val="solid"/>
+          </a:ln>
+        </p:spPr>
+      </p:sp>
+      <p:sp>
+        <p:nvSpPr>
+          <p:cNvPr id="56" name="Shape 53"/>
+          <p:cNvSpPr/>
+          <p:nvPr/>
+        </p:nvSpPr>
+        <p:spPr>
+          <a:xfrm>
+            <a:off x="5437480" y="3694176"/>
+            <a:ext cx="118872" cy="182880"/>
+          </a:xfrm>
+          <a:prstGeom prst="rect">
+            <a:avLst/>
+          </a:prstGeom>
+          <a:solidFill>
+            <a:srgbClr val="1C2B45"/>
+          </a:solidFill>
+          <a:ln w="12700">
+            <a:solidFill>
+              <a:srgbClr val="1C2B45"/>
+            </a:solidFill>
+            <a:prstDash val="solid"/>
+          </a:ln>
+        </p:spPr>
+      </p:sp>
+      <p:sp>
+        <p:nvSpPr>
+          <p:cNvPr id="57" name="Shape 54"/>
+          <p:cNvSpPr/>
+          <p:nvPr/>
+        </p:nvSpPr>
+        <p:spPr>
+          <a:xfrm>
+            <a:off x="5583784" y="3694176"/>
+            <a:ext cx="118872" cy="182880"/>
+          </a:xfrm>
+          <a:prstGeom prst="rect">
+            <a:avLst/>
+          </a:prstGeom>
+          <a:solidFill>
+            <a:srgbClr val="1C2B45"/>
+          </a:solidFill>
+          <a:ln w="12700">
+            <a:solidFill>
+              <a:srgbClr val="1C2B45"/>
+            </a:solidFill>
+            <a:prstDash val="solid"/>
+          </a:ln>
+        </p:spPr>
+      </p:sp>
+      <p:sp>
+        <p:nvSpPr>
+          <p:cNvPr id="58" name="Text 55"/>
+          <p:cNvSpPr txBox="1"/>
+          <p:nvPr/>
+        </p:nvSpPr>
+        <p:spPr>
+          <a:xfrm>
+            <a:off x="777240" y="3950208"/>
+            <a:ext cx="4952848" cy="237744"/>
+          </a:xfrm>
+          <a:prstGeom prst="rect">
+            <a:avLst/>
+          </a:prstGeom>
+          <a:noFill/>
+          <a:ln/>
+        </p:spPr>
+        <p:txBody>
+          <a:bodyPr wrap="square" lIns="0" tIns="0" rIns="0" bIns="0" rtlCol="0" anchor="t"/>
+          <a:lstStyle/>
+          <a:p>
+            <a:pPr indent="0" marL="0">
+              <a:buNone/>
+            </a:pPr>
+            <a:r>
+              <a:rPr lang="en-US" sz="1000" dirty="0">
+                <a:solidFill>
+                  <a:srgbClr val="6B7280"/>
+                </a:solidFill>
+                <a:latin typeface="Yu Gothic" pitchFamily="34" charset="0"/>
+                <a:ea typeface="Yu Gothic" pitchFamily="34" charset="-122"/>
+                <a:cs typeface="Yu Gothic" pitchFamily="34" charset="-120"/>
+              </a:rPr>
+              <a:t>2028年以降入居は経過措置のみ（2,000万円・10年）</a:t>
+            </a:r>
+            <a:endParaRPr lang="en-US" sz="1000" dirty="0"/>
+          </a:p>
+        </p:txBody>
+      </p:sp>
+      <p:sp>
+        <p:nvSpPr>
+          <p:cNvPr id="59" name="Text 56"/>
+          <p:cNvSpPr txBox="1"/>
+          <p:nvPr/>
+        </p:nvSpPr>
+        <p:spPr>
+          <a:xfrm>
+            <a:off x="777240" y="4242816"/>
+            <a:ext cx="1783080" cy="329184"/>
+          </a:xfrm>
+          <a:prstGeom prst="rect">
+            <a:avLst/>
+          </a:prstGeom>
+          <a:noFill/>
+          <a:ln/>
+        </p:spPr>
+        <p:txBody>
+          <a:bodyPr wrap="square" lIns="0" tIns="0" rIns="0" bIns="0" rtlCol="0" anchor="ctr"/>
+          <a:lstStyle/>
+          <a:p>
+            <a:pPr indent="0" marL="0">
+              <a:buNone/>
+            </a:pPr>
+            <a:r>
+              <a:rPr lang="en-US" sz="1300" b="1" dirty="0">
+                <a:solidFill>
+                  <a:srgbClr val="1C2B45"/>
+                </a:solidFill>
+                <a:latin typeface="Yu Gothic" pitchFamily="34" charset="0"/>
+                <a:ea typeface="Yu Gothic" pitchFamily="34" charset="-122"/>
+                <a:cs typeface="Yu Gothic" pitchFamily="34" charset="-120"/>
+              </a:rPr>
+              <a:t>その他（基準未満）</a:t>
+            </a:r>
+            <a:endParaRPr lang="en-US" sz="1300" dirty="0"/>
+          </a:p>
+        </p:txBody>
+      </p:sp>
+      <p:sp>
+        <p:nvSpPr>
+          <p:cNvPr id="60" name="Text 57"/>
+          <p:cNvSpPr txBox="1"/>
+          <p:nvPr/>
+        </p:nvSpPr>
+        <p:spPr>
+          <a:xfrm>
+            <a:off x="2560320" y="4242816"/>
+            <a:ext cx="1188720" cy="329184"/>
+          </a:xfrm>
+          <a:prstGeom prst="rect">
+            <a:avLst/>
+          </a:prstGeom>
+          <a:noFill/>
+          <a:ln/>
+        </p:spPr>
+        <p:txBody>
+          <a:bodyPr wrap="square" lIns="0" tIns="0" rIns="0" bIns="0" rtlCol="0" anchor="ctr"/>
+          <a:lstStyle/>
+          <a:p>
+            <a:pPr indent="0" marL="0">
+              <a:buNone/>
+            </a:pPr>
+            <a:r>
+              <a:rPr lang="en-US" sz="1600" b="1" dirty="0">
+                <a:solidFill>
+                  <a:srgbClr val="A65440"/>
+                </a:solidFill>
+                <a:latin typeface="Yu Gothic" pitchFamily="34" charset="0"/>
+                <a:ea typeface="Yu Gothic" pitchFamily="34" charset="-122"/>
+                <a:cs typeface="Yu Gothic" pitchFamily="34" charset="-120"/>
+              </a:rPr>
+              <a:t>対象外</a:t>
+            </a:r>
+            <a:endParaRPr lang="en-US" sz="1600" dirty="0"/>
+          </a:p>
+        </p:txBody>
+      </p:sp>
+      <p:sp>
+        <p:nvSpPr>
+          <p:cNvPr id="61" name="Shape 58"/>
+          <p:cNvSpPr/>
+          <p:nvPr/>
+        </p:nvSpPr>
+        <p:spPr>
+          <a:xfrm>
+            <a:off x="3828136" y="4315968"/>
+            <a:ext cx="118872" cy="182880"/>
+          </a:xfrm>
+          <a:prstGeom prst="rect">
+            <a:avLst/>
+          </a:prstGeom>
+          <a:solidFill>
+            <a:srgbClr val="DADDE2"/>
+          </a:solidFill>
+          <a:ln w="12700">
+            <a:solidFill>
+              <a:srgbClr val="DADDE2"/>
+            </a:solidFill>
+            <a:prstDash val="solid"/>
+          </a:ln>
+        </p:spPr>
+      </p:sp>
+      <p:sp>
+        <p:nvSpPr>
+          <p:cNvPr id="62" name="Shape 59"/>
+          <p:cNvSpPr/>
+          <p:nvPr/>
+        </p:nvSpPr>
+        <p:spPr>
+          <a:xfrm>
+            <a:off x="3974440" y="4315968"/>
+            <a:ext cx="118872" cy="182880"/>
+          </a:xfrm>
+          <a:prstGeom prst="rect">
+            <a:avLst/>
+          </a:prstGeom>
+          <a:solidFill>
+            <a:srgbClr val="DADDE2"/>
+          </a:solidFill>
+          <a:ln w="12700">
+            <a:solidFill>
+              <a:srgbClr val="DADDE2"/>
+            </a:solidFill>
+            <a:prstDash val="solid"/>
+          </a:ln>
+        </p:spPr>
+      </p:sp>
+      <p:sp>
+        <p:nvSpPr>
+          <p:cNvPr id="63" name="Shape 60"/>
+          <p:cNvSpPr/>
+          <p:nvPr/>
+        </p:nvSpPr>
+        <p:spPr>
+          <a:xfrm>
+            <a:off x="4120744" y="4315968"/>
+            <a:ext cx="118872" cy="182880"/>
+          </a:xfrm>
+          <a:prstGeom prst="rect">
+            <a:avLst/>
+          </a:prstGeom>
+          <a:solidFill>
+            <a:srgbClr val="DADDE2"/>
+          </a:solidFill>
+          <a:ln w="12700">
+            <a:solidFill>
+              <a:srgbClr val="DADDE2"/>
+            </a:solidFill>
+            <a:prstDash val="solid"/>
+          </a:ln>
+        </p:spPr>
+      </p:sp>
+      <p:sp>
+        <p:nvSpPr>
+          <p:cNvPr id="64" name="Shape 61"/>
+          <p:cNvSpPr/>
+          <p:nvPr/>
+        </p:nvSpPr>
+        <p:spPr>
+          <a:xfrm>
+            <a:off x="4267048" y="4315968"/>
+            <a:ext cx="118872" cy="182880"/>
+          </a:xfrm>
+          <a:prstGeom prst="rect">
+            <a:avLst/>
+          </a:prstGeom>
+          <a:solidFill>
+            <a:srgbClr val="DADDE2"/>
+          </a:solidFill>
+          <a:ln w="12700">
+            <a:solidFill>
+              <a:srgbClr val="DADDE2"/>
+            </a:solidFill>
+            <a:prstDash val="solid"/>
+          </a:ln>
+        </p:spPr>
+      </p:sp>
+      <p:sp>
+        <p:nvSpPr>
+          <p:cNvPr id="65" name="Shape 62"/>
+          <p:cNvSpPr/>
+          <p:nvPr/>
+        </p:nvSpPr>
+        <p:spPr>
+          <a:xfrm>
+            <a:off x="4413352" y="4315968"/>
+            <a:ext cx="118872" cy="182880"/>
+          </a:xfrm>
+          <a:prstGeom prst="rect">
+            <a:avLst/>
+          </a:prstGeom>
+          <a:solidFill>
+            <a:srgbClr val="DADDE2"/>
+          </a:solidFill>
+          <a:ln w="12700">
+            <a:solidFill>
+              <a:srgbClr val="DADDE2"/>
+            </a:solidFill>
+            <a:prstDash val="solid"/>
+          </a:ln>
+        </p:spPr>
+      </p:sp>
+      <p:sp>
+        <p:nvSpPr>
+          <p:cNvPr id="66" name="Shape 63"/>
+          <p:cNvSpPr/>
+          <p:nvPr/>
+        </p:nvSpPr>
+        <p:spPr>
+          <a:xfrm>
+            <a:off x="4559656" y="4315968"/>
+            <a:ext cx="118872" cy="182880"/>
+          </a:xfrm>
+          <a:prstGeom prst="rect">
+            <a:avLst/>
+          </a:prstGeom>
+          <a:solidFill>
+            <a:srgbClr val="DADDE2"/>
+          </a:solidFill>
+          <a:ln w="12700">
+            <a:solidFill>
+              <a:srgbClr val="DADDE2"/>
+            </a:solidFill>
+            <a:prstDash val="solid"/>
+          </a:ln>
+        </p:spPr>
+      </p:sp>
+      <p:sp>
+        <p:nvSpPr>
+          <p:cNvPr id="67" name="Shape 64"/>
+          <p:cNvSpPr/>
+          <p:nvPr/>
+        </p:nvSpPr>
+        <p:spPr>
+          <a:xfrm>
+            <a:off x="4705960" y="4315968"/>
+            <a:ext cx="118872" cy="182880"/>
+          </a:xfrm>
+          <a:prstGeom prst="rect">
+            <a:avLst/>
+          </a:prstGeom>
+          <a:solidFill>
+            <a:srgbClr val="DADDE2"/>
+          </a:solidFill>
+          <a:ln w="12700">
+            <a:solidFill>
+              <a:srgbClr val="DADDE2"/>
+            </a:solidFill>
+            <a:prstDash val="solid"/>
+          </a:ln>
+        </p:spPr>
+      </p:sp>
+      <p:sp>
+        <p:nvSpPr>
+          <p:cNvPr id="68" name="Shape 65"/>
+          <p:cNvSpPr/>
+          <p:nvPr/>
+        </p:nvSpPr>
+        <p:spPr>
+          <a:xfrm>
+            <a:off x="4852264" y="4315968"/>
+            <a:ext cx="118872" cy="182880"/>
+          </a:xfrm>
+          <a:prstGeom prst="rect">
+            <a:avLst/>
+          </a:prstGeom>
+          <a:solidFill>
+            <a:srgbClr val="DADDE2"/>
+          </a:solidFill>
+          <a:ln w="12700">
+            <a:solidFill>
+              <a:srgbClr val="DADDE2"/>
+            </a:solidFill>
+            <a:prstDash val="solid"/>
+          </a:ln>
+        </p:spPr>
+      </p:sp>
+      <p:sp>
+        <p:nvSpPr>
+          <p:cNvPr id="69" name="Shape 66"/>
+          <p:cNvSpPr/>
+          <p:nvPr/>
+        </p:nvSpPr>
+        <p:spPr>
+          <a:xfrm>
+            <a:off x="4998568" y="4315968"/>
+            <a:ext cx="118872" cy="182880"/>
+          </a:xfrm>
+          <a:prstGeom prst="rect">
+            <a:avLst/>
+          </a:prstGeom>
+          <a:solidFill>
+            <a:srgbClr val="DADDE2"/>
+          </a:solidFill>
+          <a:ln w="12700">
+            <a:solidFill>
+              <a:srgbClr val="DADDE2"/>
+            </a:solidFill>
+            <a:prstDash val="solid"/>
+          </a:ln>
+        </p:spPr>
+      </p:sp>
+      <p:sp>
+        <p:nvSpPr>
+          <p:cNvPr id="70" name="Shape 67"/>
+          <p:cNvSpPr/>
+          <p:nvPr/>
+        </p:nvSpPr>
+        <p:spPr>
+          <a:xfrm>
+            <a:off x="5144872" y="4315968"/>
+            <a:ext cx="118872" cy="182880"/>
+          </a:xfrm>
+          <a:prstGeom prst="rect">
+            <a:avLst/>
+          </a:prstGeom>
+          <a:solidFill>
+            <a:srgbClr val="DADDE2"/>
+          </a:solidFill>
+          <a:ln w="12700">
+            <a:solidFill>
+              <a:srgbClr val="DADDE2"/>
+            </a:solidFill>
+            <a:prstDash val="solid"/>
+          </a:ln>
+        </p:spPr>
+      </p:sp>
+      <p:sp>
+        <p:nvSpPr>
+          <p:cNvPr id="71" name="Shape 68"/>
+          <p:cNvSpPr/>
+          <p:nvPr/>
+        </p:nvSpPr>
+        <p:spPr>
+          <a:xfrm>
+            <a:off x="5291176" y="4315968"/>
+            <a:ext cx="118872" cy="182880"/>
+          </a:xfrm>
+          <a:prstGeom prst="rect">
+            <a:avLst/>
+          </a:prstGeom>
+          <a:solidFill>
+            <a:srgbClr val="DADDE2"/>
+          </a:solidFill>
+          <a:ln w="12700">
+            <a:solidFill>
+              <a:srgbClr val="DADDE2"/>
+            </a:solidFill>
+            <a:prstDash val="solid"/>
+          </a:ln>
+        </p:spPr>
+      </p:sp>
+      <p:sp>
+        <p:nvSpPr>
+          <p:cNvPr id="72" name="Shape 69"/>
+          <p:cNvSpPr/>
+          <p:nvPr/>
+        </p:nvSpPr>
+        <p:spPr>
+          <a:xfrm>
+            <a:off x="5437480" y="4315968"/>
+            <a:ext cx="118872" cy="182880"/>
+          </a:xfrm>
+          <a:prstGeom prst="rect">
+            <a:avLst/>
+          </a:prstGeom>
+          <a:solidFill>
+            <a:srgbClr val="DADDE2"/>
+          </a:solidFill>
+          <a:ln w="12700">
+            <a:solidFill>
+              <a:srgbClr val="DADDE2"/>
+            </a:solidFill>
+            <a:prstDash val="solid"/>
+          </a:ln>
+        </p:spPr>
+      </p:sp>
+      <p:sp>
+        <p:nvSpPr>
+          <p:cNvPr id="73" name="Shape 70"/>
+          <p:cNvSpPr/>
+          <p:nvPr/>
+        </p:nvSpPr>
+        <p:spPr>
+          <a:xfrm>
+            <a:off x="5583784" y="4315968"/>
+            <a:ext cx="118872" cy="182880"/>
+          </a:xfrm>
+          <a:prstGeom prst="rect">
+            <a:avLst/>
+          </a:prstGeom>
+          <a:solidFill>
+            <a:srgbClr val="DADDE2"/>
+          </a:solidFill>
+          <a:ln w="12700">
+            <a:solidFill>
+              <a:srgbClr val="DADDE2"/>
+            </a:solidFill>
+            <a:prstDash val="solid"/>
+          </a:ln>
+        </p:spPr>
+      </p:sp>
+      <p:sp>
+        <p:nvSpPr>
+          <p:cNvPr id="74" name="Text 71"/>
+          <p:cNvSpPr txBox="1"/>
+          <p:nvPr/>
+        </p:nvSpPr>
+        <p:spPr>
+          <a:xfrm>
+            <a:off x="777240" y="4572000"/>
+            <a:ext cx="4952848" cy="237744"/>
+          </a:xfrm>
+          <a:prstGeom prst="rect">
+            <a:avLst/>
+          </a:prstGeom>
+          <a:noFill/>
+          <a:ln/>
+        </p:spPr>
+        <p:txBody>
+          <a:bodyPr wrap="square" lIns="0" tIns="0" rIns="0" bIns="0" rtlCol="0" anchor="t"/>
+          <a:lstStyle/>
+          <a:p>
+            <a:pPr indent="0" marL="0">
+              <a:buNone/>
+            </a:pPr>
+            <a:r>
+              <a:rPr lang="en-US" sz="1000" dirty="0">
+                <a:solidFill>
+                  <a:srgbClr val="6B7280"/>
+                </a:solidFill>
+                <a:latin typeface="Yu Gothic" pitchFamily="34" charset="0"/>
+                <a:ea typeface="Yu Gothic" pitchFamily="34" charset="-122"/>
+                <a:cs typeface="Yu Gothic" pitchFamily="34" charset="-120"/>
+              </a:rPr>
+              <a:t>2023年末までの建築確認等なら2,000万円・10年</a:t>
+            </a:r>
+            <a:endParaRPr lang="en-US" sz="1000" dirty="0"/>
+          </a:p>
+        </p:txBody>
+      </p:sp>
+      <p:sp>
+        <p:nvSpPr>
+          <p:cNvPr id="75" name="Shape 72"/>
+          <p:cNvSpPr/>
+          <p:nvPr/>
+        </p:nvSpPr>
+        <p:spPr>
+          <a:xfrm>
+            <a:off x="6233008" y="1645920"/>
+            <a:ext cx="5410048" cy="3246120"/>
+          </a:xfrm>
+          <a:prstGeom prst="roundRect">
+            <a:avLst>
+              <a:gd name="adj" fmla="val 2254"/>
+            </a:avLst>
+          </a:prstGeom>
+          <a:solidFill>
+            <a:srgbClr val="1C2B45"/>
+          </a:solidFill>
+          <a:ln w="12700">
+            <a:solidFill>
+              <a:srgbClr val="1C2B45"/>
+            </a:solidFill>
+            <a:prstDash val="solid"/>
+          </a:ln>
+        </p:spPr>
+      </p:sp>
+      <p:sp>
+        <p:nvSpPr>
+          <p:cNvPr id="76" name="Text 73"/>
+          <p:cNvSpPr txBox="1"/>
+          <p:nvPr/>
+        </p:nvSpPr>
+        <p:spPr>
+          <a:xfrm>
+            <a:off x="6461608" y="1719072"/>
+            <a:ext cx="4952848" cy="365760"/>
+          </a:xfrm>
+          <a:prstGeom prst="rect">
+            <a:avLst/>
+          </a:prstGeom>
+          <a:noFill/>
+          <a:ln/>
+        </p:spPr>
+        <p:txBody>
+          <a:bodyPr wrap="square" lIns="0" tIns="0" rIns="0" bIns="0" rtlCol="0" anchor="ctr"/>
+          <a:lstStyle/>
+          <a:p>
+            <a:pPr indent="0" marL="0">
+              <a:buNone/>
+            </a:pPr>
+            <a:r>
+              <a:rPr lang="en-US" sz="1600" b="1" dirty="0">
+                <a:solidFill>
+                  <a:srgbClr val="FFFFFF"/>
+                </a:solidFill>
+                <a:latin typeface="Yu Gothic" pitchFamily="34" charset="0"/>
+                <a:ea typeface="Yu Gothic" pitchFamily="34" charset="-122"/>
+                <a:cs typeface="Yu Gothic" pitchFamily="34" charset="-120"/>
+              </a:rPr>
+              <a:t>中古（既存住宅）</a:t>
+            </a:r>
+            <a:endParaRPr lang="en-US" sz="1600" dirty="0"/>
+          </a:p>
+        </p:txBody>
+      </p:sp>
+      <p:sp>
+        <p:nvSpPr>
+          <p:cNvPr id="77" name="Text 74"/>
+          <p:cNvSpPr txBox="1"/>
+          <p:nvPr/>
+        </p:nvSpPr>
+        <p:spPr>
+          <a:xfrm>
+            <a:off x="9512503" y="1755648"/>
+            <a:ext cx="1901952" cy="274320"/>
+          </a:xfrm>
+          <a:prstGeom prst="rect">
+            <a:avLst/>
+          </a:prstGeom>
+          <a:noFill/>
+          <a:ln/>
+        </p:spPr>
+        <p:txBody>
+          <a:bodyPr wrap="square" lIns="0" tIns="0" rIns="0" bIns="0" rtlCol="0" anchor="ctr"/>
+          <a:lstStyle/>
+          <a:p>
+            <a:pPr algn="r" indent="0" marL="0">
+              <a:buNone/>
+            </a:pPr>
+            <a:r>
+              <a:rPr lang="en-US" sz="1000" dirty="0">
+                <a:solidFill>
+                  <a:srgbClr val="E9DFCB"/>
+                </a:solidFill>
+                <a:latin typeface="Yu Gothic" pitchFamily="34" charset="0"/>
+                <a:ea typeface="Yu Gothic" pitchFamily="34" charset="-122"/>
+                <a:cs typeface="Yu Gothic" pitchFamily="34" charset="-120"/>
+              </a:rPr>
+              <a:t>控除期間</a:t>
+            </a:r>
+            <a:endParaRPr lang="en-US" sz="1000" dirty="0"/>
+          </a:p>
+        </p:txBody>
+      </p:sp>
+      <p:sp>
+        <p:nvSpPr>
+          <p:cNvPr id="78" name="Text 75"/>
+          <p:cNvSpPr txBox="1"/>
+          <p:nvPr/>
+        </p:nvSpPr>
+        <p:spPr>
+          <a:xfrm>
+            <a:off x="8244688" y="2103120"/>
+            <a:ext cx="1097280" cy="228600"/>
+          </a:xfrm>
+          <a:prstGeom prst="rect">
+            <a:avLst/>
+          </a:prstGeom>
+          <a:noFill/>
+          <a:ln/>
+        </p:spPr>
+        <p:txBody>
+          <a:bodyPr wrap="square" lIns="0" tIns="0" rIns="0" bIns="0" rtlCol="0" anchor="t"/>
+          <a:lstStyle/>
+          <a:p>
+            <a:pPr indent="0" marL="0">
+              <a:buNone/>
+            </a:pPr>
+            <a:r>
+              <a:rPr lang="en-US" sz="1000" dirty="0">
+                <a:solidFill>
+                  <a:srgbClr val="E9DFCB"/>
+                </a:solidFill>
+                <a:latin typeface="Yu Gothic" pitchFamily="34" charset="0"/>
+                <a:ea typeface="Yu Gothic" pitchFamily="34" charset="-122"/>
+                <a:cs typeface="Yu Gothic" pitchFamily="34" charset="-120"/>
+              </a:rPr>
+              <a:t>借入限度額</a:t>
+            </a:r>
+            <a:endParaRPr lang="en-US" sz="1000" dirty="0"/>
+          </a:p>
+        </p:txBody>
+      </p:sp>
+      <p:sp>
+        <p:nvSpPr>
+          <p:cNvPr id="79" name="Text 76"/>
+          <p:cNvSpPr txBox="1"/>
+          <p:nvPr/>
+        </p:nvSpPr>
+        <p:spPr>
+          <a:xfrm>
+            <a:off x="9421063" y="2103120"/>
+            <a:ext cx="365760" cy="228600"/>
+          </a:xfrm>
+          <a:prstGeom prst="rect">
+            <a:avLst/>
+          </a:prstGeom>
+          <a:noFill/>
+          <a:ln/>
+        </p:spPr>
+        <p:txBody>
+          <a:bodyPr wrap="square" lIns="0" tIns="0" rIns="0" bIns="0" rtlCol="0" anchor="t"/>
+          <a:lstStyle/>
+          <a:p>
+            <a:pPr algn="ctr" indent="0" marL="0">
+              <a:buNone/>
+            </a:pPr>
+            <a:r>
+              <a:rPr lang="en-US" sz="900" dirty="0">
+                <a:solidFill>
+                  <a:srgbClr val="E9DFCB"/>
+                </a:solidFill>
+                <a:latin typeface="Yu Gothic" pitchFamily="34" charset="0"/>
+                <a:ea typeface="Yu Gothic" pitchFamily="34" charset="-122"/>
+                <a:cs typeface="Yu Gothic" pitchFamily="34" charset="-120"/>
+              </a:rPr>
+              <a:t>1年</a:t>
+            </a:r>
+            <a:endParaRPr lang="en-US" sz="900" dirty="0"/>
+          </a:p>
+        </p:txBody>
+      </p:sp>
+      <p:sp>
+        <p:nvSpPr>
+          <p:cNvPr id="80" name="Text 77"/>
+          <p:cNvSpPr txBox="1"/>
+          <p:nvPr/>
+        </p:nvSpPr>
+        <p:spPr>
+          <a:xfrm>
+            <a:off x="10006279" y="2103120"/>
+            <a:ext cx="365760" cy="228600"/>
+          </a:xfrm>
+          <a:prstGeom prst="rect">
+            <a:avLst/>
+          </a:prstGeom>
+          <a:noFill/>
+          <a:ln/>
+        </p:spPr>
+        <p:txBody>
+          <a:bodyPr wrap="square" lIns="0" tIns="0" rIns="0" bIns="0" rtlCol="0" anchor="t"/>
+          <a:lstStyle/>
+          <a:p>
+            <a:pPr algn="ctr" indent="0" marL="0">
+              <a:buNone/>
+            </a:pPr>
+            <a:r>
+              <a:rPr lang="en-US" sz="900" dirty="0">
+                <a:solidFill>
+                  <a:srgbClr val="E9DFCB"/>
+                </a:solidFill>
+                <a:latin typeface="Yu Gothic" pitchFamily="34" charset="0"/>
+                <a:ea typeface="Yu Gothic" pitchFamily="34" charset="-122"/>
+                <a:cs typeface="Yu Gothic" pitchFamily="34" charset="-120"/>
+              </a:rPr>
+              <a:t>5年</a:t>
+            </a:r>
+            <a:endParaRPr lang="en-US" sz="900" dirty="0"/>
+          </a:p>
+        </p:txBody>
+      </p:sp>
+      <p:sp>
+        <p:nvSpPr>
+          <p:cNvPr id="81" name="Text 78"/>
+          <p:cNvSpPr txBox="1"/>
+          <p:nvPr/>
+        </p:nvSpPr>
+        <p:spPr>
+          <a:xfrm>
+            <a:off x="10737799" y="2103120"/>
+            <a:ext cx="365760" cy="228600"/>
+          </a:xfrm>
+          <a:prstGeom prst="rect">
+            <a:avLst/>
+          </a:prstGeom>
+          <a:noFill/>
+          <a:ln/>
+        </p:spPr>
+        <p:txBody>
+          <a:bodyPr wrap="square" lIns="0" tIns="0" rIns="0" bIns="0" rtlCol="0" anchor="t"/>
+          <a:lstStyle/>
+          <a:p>
+            <a:pPr algn="ctr" indent="0" marL="0">
+              <a:buNone/>
+            </a:pPr>
+            <a:r>
+              <a:rPr lang="en-US" sz="900" dirty="0">
+                <a:solidFill>
+                  <a:srgbClr val="E9DFCB"/>
+                </a:solidFill>
+                <a:latin typeface="Yu Gothic" pitchFamily="34" charset="0"/>
+                <a:ea typeface="Yu Gothic" pitchFamily="34" charset="-122"/>
+                <a:cs typeface="Yu Gothic" pitchFamily="34" charset="-120"/>
+              </a:rPr>
+              <a:t>10年</a:t>
+            </a:r>
+            <a:endParaRPr lang="en-US" sz="900" dirty="0"/>
+          </a:p>
+        </p:txBody>
+      </p:sp>
+      <p:sp>
+        <p:nvSpPr>
+          <p:cNvPr id="82" name="Text 79"/>
+          <p:cNvSpPr txBox="1"/>
+          <p:nvPr/>
+        </p:nvSpPr>
+        <p:spPr>
+          <a:xfrm>
+            <a:off x="11176711" y="2103120"/>
+            <a:ext cx="365760" cy="228600"/>
+          </a:xfrm>
+          <a:prstGeom prst="rect">
+            <a:avLst/>
+          </a:prstGeom>
+          <a:noFill/>
+          <a:ln/>
+        </p:spPr>
+        <p:txBody>
+          <a:bodyPr wrap="square" lIns="0" tIns="0" rIns="0" bIns="0" rtlCol="0" anchor="t"/>
+          <a:lstStyle/>
+          <a:p>
+            <a:pPr algn="ctr" indent="0" marL="0">
+              <a:buNone/>
+            </a:pPr>
+            <a:r>
+              <a:rPr lang="en-US" sz="900" dirty="0">
+                <a:solidFill>
+                  <a:srgbClr val="E9DFCB"/>
+                </a:solidFill>
+                <a:latin typeface="Yu Gothic" pitchFamily="34" charset="0"/>
+                <a:ea typeface="Yu Gothic" pitchFamily="34" charset="-122"/>
+                <a:cs typeface="Yu Gothic" pitchFamily="34" charset="-120"/>
+              </a:rPr>
+              <a:t>13年</a:t>
+            </a:r>
+            <a:endParaRPr lang="en-US" sz="900" dirty="0"/>
+          </a:p>
+        </p:txBody>
+      </p:sp>
+      <p:sp>
+        <p:nvSpPr>
+          <p:cNvPr id="83" name="Text 80"/>
+          <p:cNvSpPr txBox="1"/>
+          <p:nvPr/>
+        </p:nvSpPr>
+        <p:spPr>
+          <a:xfrm>
+            <a:off x="6461608" y="2377440"/>
+            <a:ext cx="1783080" cy="329184"/>
+          </a:xfrm>
+          <a:prstGeom prst="rect">
+            <a:avLst/>
+          </a:prstGeom>
+          <a:noFill/>
+          <a:ln/>
+        </p:spPr>
+        <p:txBody>
+          <a:bodyPr wrap="square" lIns="0" tIns="0" rIns="0" bIns="0" rtlCol="0" anchor="ctr"/>
+          <a:lstStyle/>
+          <a:p>
+            <a:pPr indent="0" marL="0">
+              <a:buNone/>
+            </a:pPr>
+            <a:r>
+              <a:rPr lang="en-US" sz="1300" b="1" dirty="0">
+                <a:solidFill>
+                  <a:srgbClr val="FFFFFF"/>
+                </a:solidFill>
+                <a:latin typeface="Yu Gothic" pitchFamily="34" charset="0"/>
+                <a:ea typeface="Yu Gothic" pitchFamily="34" charset="-122"/>
+                <a:cs typeface="Yu Gothic" pitchFamily="34" charset="-120"/>
+              </a:rPr>
+              <a:t>認定長期優良・低炭素</a:t>
+            </a:r>
+            <a:endParaRPr lang="en-US" sz="1300" dirty="0"/>
+          </a:p>
+        </p:txBody>
+      </p:sp>
+      <p:sp>
+        <p:nvSpPr>
+          <p:cNvPr id="84" name="Text 81"/>
+          <p:cNvSpPr txBox="1"/>
+          <p:nvPr/>
+        </p:nvSpPr>
+        <p:spPr>
+          <a:xfrm>
+            <a:off x="8244688" y="2377440"/>
+            <a:ext cx="1188720" cy="329184"/>
+          </a:xfrm>
+          <a:prstGeom prst="rect">
+            <a:avLst/>
+          </a:prstGeom>
+          <a:noFill/>
+          <a:ln/>
+        </p:spPr>
+        <p:txBody>
+          <a:bodyPr wrap="square" lIns="0" tIns="0" rIns="0" bIns="0" rtlCol="0" anchor="ctr"/>
+          <a:lstStyle/>
+          <a:p>
+            <a:pPr indent="0" marL="0">
+              <a:buNone/>
+            </a:pPr>
+            <a:r>
+              <a:rPr lang="en-US" sz="1600" b="1" dirty="0">
+                <a:solidFill>
+                  <a:srgbClr val="E9DFCB"/>
+                </a:solidFill>
+                <a:latin typeface="Yu Gothic" pitchFamily="34" charset="0"/>
+                <a:ea typeface="Yu Gothic" pitchFamily="34" charset="-122"/>
+                <a:cs typeface="Yu Gothic" pitchFamily="34" charset="-120"/>
+              </a:rPr>
+              <a:t>3,500万円</a:t>
+            </a:r>
+            <a:endParaRPr lang="en-US" sz="1600" dirty="0"/>
+          </a:p>
+        </p:txBody>
+      </p:sp>
+      <p:sp>
+        <p:nvSpPr>
+          <p:cNvPr id="85" name="Shape 82"/>
+          <p:cNvSpPr/>
+          <p:nvPr/>
+        </p:nvSpPr>
+        <p:spPr>
+          <a:xfrm>
+            <a:off x="9512503" y="2450592"/>
+            <a:ext cx="118872" cy="182880"/>
+          </a:xfrm>
+          <a:prstGeom prst="rect">
+            <a:avLst/>
+          </a:prstGeom>
+          <a:solidFill>
+            <a:srgbClr val="A8854A"/>
+          </a:solidFill>
+          <a:ln w="12700">
+            <a:solidFill>
+              <a:srgbClr val="A8854A"/>
+            </a:solidFill>
+            <a:prstDash val="solid"/>
+          </a:ln>
+        </p:spPr>
+      </p:sp>
+      <p:sp>
+        <p:nvSpPr>
+          <p:cNvPr id="86" name="Shape 83"/>
+          <p:cNvSpPr/>
+          <p:nvPr/>
+        </p:nvSpPr>
+        <p:spPr>
+          <a:xfrm>
+            <a:off x="9658807" y="2450592"/>
+            <a:ext cx="118872" cy="182880"/>
+          </a:xfrm>
+          <a:prstGeom prst="rect">
+            <a:avLst/>
+          </a:prstGeom>
+          <a:solidFill>
+            <a:srgbClr val="A8854A"/>
+          </a:solidFill>
+          <a:ln w="12700">
+            <a:solidFill>
+              <a:srgbClr val="A8854A"/>
+            </a:solidFill>
+            <a:prstDash val="solid"/>
+          </a:ln>
+        </p:spPr>
+      </p:sp>
+      <p:sp>
+        <p:nvSpPr>
+          <p:cNvPr id="87" name="Shape 84"/>
+          <p:cNvSpPr/>
+          <p:nvPr/>
+        </p:nvSpPr>
+        <p:spPr>
+          <a:xfrm>
+            <a:off x="9805111" y="2450592"/>
+            <a:ext cx="118872" cy="182880"/>
+          </a:xfrm>
+          <a:prstGeom prst="rect">
+            <a:avLst/>
+          </a:prstGeom>
+          <a:solidFill>
+            <a:srgbClr val="A8854A"/>
+          </a:solidFill>
+          <a:ln w="12700">
+            <a:solidFill>
+              <a:srgbClr val="A8854A"/>
+            </a:solidFill>
+            <a:prstDash val="solid"/>
+          </a:ln>
+        </p:spPr>
+      </p:sp>
+      <p:sp>
+        <p:nvSpPr>
+          <p:cNvPr id="88" name="Shape 85"/>
+          <p:cNvSpPr/>
+          <p:nvPr/>
+        </p:nvSpPr>
+        <p:spPr>
+          <a:xfrm>
+            <a:off x="9951415" y="2450592"/>
+            <a:ext cx="118872" cy="182880"/>
+          </a:xfrm>
+          <a:prstGeom prst="rect">
+            <a:avLst/>
+          </a:prstGeom>
+          <a:solidFill>
+            <a:srgbClr val="A8854A"/>
+          </a:solidFill>
+          <a:ln w="12700">
+            <a:solidFill>
+              <a:srgbClr val="A8854A"/>
+            </a:solidFill>
+            <a:prstDash val="solid"/>
+          </a:ln>
+        </p:spPr>
+      </p:sp>
+      <p:sp>
+        <p:nvSpPr>
+          <p:cNvPr id="89" name="Shape 86"/>
+          <p:cNvSpPr/>
+          <p:nvPr/>
+        </p:nvSpPr>
+        <p:spPr>
+          <a:xfrm>
+            <a:off x="10097719" y="2450592"/>
+            <a:ext cx="118872" cy="182880"/>
+          </a:xfrm>
+          <a:prstGeom prst="rect">
+            <a:avLst/>
+          </a:prstGeom>
+          <a:solidFill>
+            <a:srgbClr val="A8854A"/>
+          </a:solidFill>
+          <a:ln w="12700">
+            <a:solidFill>
+              <a:srgbClr val="A8854A"/>
+            </a:solidFill>
+            <a:prstDash val="solid"/>
+          </a:ln>
+        </p:spPr>
+      </p:sp>
+      <p:sp>
+        <p:nvSpPr>
+          <p:cNvPr id="90" name="Shape 87"/>
+          <p:cNvSpPr/>
+          <p:nvPr/>
+        </p:nvSpPr>
+        <p:spPr>
+          <a:xfrm>
+            <a:off x="10244023" y="2450592"/>
+            <a:ext cx="118872" cy="182880"/>
+          </a:xfrm>
+          <a:prstGeom prst="rect">
+            <a:avLst/>
+          </a:prstGeom>
+          <a:solidFill>
+            <a:srgbClr val="A8854A"/>
+          </a:solidFill>
+          <a:ln w="12700">
+            <a:solidFill>
+              <a:srgbClr val="A8854A"/>
+            </a:solidFill>
+            <a:prstDash val="solid"/>
+          </a:ln>
+        </p:spPr>
+      </p:sp>
+      <p:sp>
+        <p:nvSpPr>
+          <p:cNvPr id="91" name="Shape 88"/>
+          <p:cNvSpPr/>
+          <p:nvPr/>
+        </p:nvSpPr>
+        <p:spPr>
+          <a:xfrm>
+            <a:off x="10390327" y="2450592"/>
+            <a:ext cx="118872" cy="182880"/>
+          </a:xfrm>
+          <a:prstGeom prst="rect">
+            <a:avLst/>
+          </a:prstGeom>
+          <a:solidFill>
+            <a:srgbClr val="A8854A"/>
+          </a:solidFill>
+          <a:ln w="12700">
+            <a:solidFill>
+              <a:srgbClr val="A8854A"/>
+            </a:solidFill>
+            <a:prstDash val="solid"/>
+          </a:ln>
+        </p:spPr>
+      </p:sp>
+      <p:sp>
+        <p:nvSpPr>
+          <p:cNvPr id="92" name="Shape 89"/>
+          <p:cNvSpPr/>
+          <p:nvPr/>
+        </p:nvSpPr>
+        <p:spPr>
+          <a:xfrm>
+            <a:off x="10536631" y="2450592"/>
+            <a:ext cx="118872" cy="182880"/>
+          </a:xfrm>
+          <a:prstGeom prst="rect">
+            <a:avLst/>
+          </a:prstGeom>
+          <a:solidFill>
+            <a:srgbClr val="A8854A"/>
+          </a:solidFill>
+          <a:ln w="12700">
+            <a:solidFill>
+              <a:srgbClr val="A8854A"/>
+            </a:solidFill>
+            <a:prstDash val="solid"/>
+          </a:ln>
+        </p:spPr>
+      </p:sp>
+      <p:sp>
+        <p:nvSpPr>
+          <p:cNvPr id="93" name="Shape 90"/>
+          <p:cNvSpPr/>
+          <p:nvPr/>
+        </p:nvSpPr>
+        <p:spPr>
+          <a:xfrm>
+            <a:off x="10682935" y="2450592"/>
+            <a:ext cx="118872" cy="182880"/>
+          </a:xfrm>
+          <a:prstGeom prst="rect">
+            <a:avLst/>
+          </a:prstGeom>
+          <a:solidFill>
+            <a:srgbClr val="A8854A"/>
+          </a:solidFill>
+          <a:ln w="12700">
+            <a:solidFill>
+              <a:srgbClr val="A8854A"/>
+            </a:solidFill>
+            <a:prstDash val="solid"/>
+          </a:ln>
+        </p:spPr>
+      </p:sp>
+      <p:sp>
+        <p:nvSpPr>
+          <p:cNvPr id="94" name="Shape 91"/>
+          <p:cNvSpPr/>
+          <p:nvPr/>
+        </p:nvSpPr>
+        <p:spPr>
+          <a:xfrm>
+            <a:off x="10829239" y="2450592"/>
+            <a:ext cx="118872" cy="182880"/>
+          </a:xfrm>
+          <a:prstGeom prst="rect">
+            <a:avLst/>
+          </a:prstGeom>
+          <a:solidFill>
+            <a:srgbClr val="A8854A"/>
+          </a:solidFill>
+          <a:ln w="12700">
+            <a:solidFill>
+              <a:srgbClr val="A8854A"/>
+            </a:solidFill>
+            <a:prstDash val="solid"/>
+          </a:ln>
+        </p:spPr>
+      </p:sp>
+      <p:sp>
+        <p:nvSpPr>
+          <p:cNvPr id="95" name="Shape 92"/>
+          <p:cNvSpPr/>
+          <p:nvPr/>
+        </p:nvSpPr>
+        <p:spPr>
+          <a:xfrm>
+            <a:off x="10975543" y="2450592"/>
+            <a:ext cx="118872" cy="182880"/>
+          </a:xfrm>
+          <a:prstGeom prst="rect">
+            <a:avLst/>
+          </a:prstGeom>
+          <a:solidFill>
+            <a:srgbClr val="A8854A"/>
+          </a:solidFill>
+          <a:ln w="12700">
+            <a:solidFill>
+              <a:srgbClr val="A8854A"/>
+            </a:solidFill>
+            <a:prstDash val="solid"/>
+          </a:ln>
+        </p:spPr>
+      </p:sp>
+      <p:sp>
+        <p:nvSpPr>
+          <p:cNvPr id="96" name="Shape 93"/>
+          <p:cNvSpPr/>
+          <p:nvPr/>
+        </p:nvSpPr>
+        <p:spPr>
+          <a:xfrm>
+            <a:off x="11121847" y="2450592"/>
+            <a:ext cx="118872" cy="182880"/>
+          </a:xfrm>
+          <a:prstGeom prst="rect">
+            <a:avLst/>
+          </a:prstGeom>
+          <a:solidFill>
+            <a:srgbClr val="A8854A"/>
+          </a:solidFill>
+          <a:ln w="12700">
+            <a:solidFill>
+              <a:srgbClr val="A8854A"/>
+            </a:solidFill>
+            <a:prstDash val="solid"/>
+          </a:ln>
+        </p:spPr>
+      </p:sp>
+      <p:sp>
+        <p:nvSpPr>
+          <p:cNvPr id="97" name="Shape 94"/>
+          <p:cNvSpPr/>
+          <p:nvPr/>
+        </p:nvSpPr>
+        <p:spPr>
+          <a:xfrm>
+            <a:off x="11268151" y="2450592"/>
+            <a:ext cx="118872" cy="182880"/>
+          </a:xfrm>
+          <a:prstGeom prst="rect">
+            <a:avLst/>
+          </a:prstGeom>
+          <a:solidFill>
+            <a:srgbClr val="A8854A"/>
+          </a:solidFill>
+          <a:ln w="12700">
+            <a:solidFill>
+              <a:srgbClr val="A8854A"/>
+            </a:solidFill>
+            <a:prstDash val="solid"/>
+          </a:ln>
+        </p:spPr>
+      </p:sp>
+      <p:sp>
+        <p:nvSpPr>
+          <p:cNvPr id="98" name="Text 95"/>
+          <p:cNvSpPr txBox="1"/>
+          <p:nvPr/>
+        </p:nvSpPr>
+        <p:spPr>
+          <a:xfrm>
+            <a:off x="6461608" y="2999232"/>
+            <a:ext cx="1783080" cy="329184"/>
+          </a:xfrm>
+          <a:prstGeom prst="rect">
+            <a:avLst/>
+          </a:prstGeom>
+          <a:noFill/>
+          <a:ln/>
+        </p:spPr>
+        <p:txBody>
+          <a:bodyPr wrap="square" lIns="0" tIns="0" rIns="0" bIns="0" rtlCol="0" anchor="ctr"/>
+          <a:lstStyle/>
+          <a:p>
+            <a:pPr indent="0" marL="0">
+              <a:buNone/>
+            </a:pPr>
+            <a:r>
+              <a:rPr lang="en-US" sz="1300" b="1" dirty="0">
+                <a:solidFill>
+                  <a:srgbClr val="FFFFFF"/>
+                </a:solidFill>
+                <a:latin typeface="Yu Gothic" pitchFamily="34" charset="0"/>
+                <a:ea typeface="Yu Gothic" pitchFamily="34" charset="-122"/>
+                <a:cs typeface="Yu Gothic" pitchFamily="34" charset="-120"/>
+              </a:rPr>
+              <a:t>ZEH水準省エネ</a:t>
+            </a:r>
+            <a:endParaRPr lang="en-US" sz="1300" dirty="0"/>
+          </a:p>
+        </p:txBody>
+      </p:sp>
+      <p:sp>
+        <p:nvSpPr>
+          <p:cNvPr id="99" name="Text 96"/>
+          <p:cNvSpPr txBox="1"/>
+          <p:nvPr/>
+        </p:nvSpPr>
+        <p:spPr>
+          <a:xfrm>
+            <a:off x="8244688" y="2999232"/>
+            <a:ext cx="1188720" cy="329184"/>
+          </a:xfrm>
+          <a:prstGeom prst="rect">
+            <a:avLst/>
+          </a:prstGeom>
+          <a:noFill/>
+          <a:ln/>
+        </p:spPr>
+        <p:txBody>
+          <a:bodyPr wrap="square" lIns="0" tIns="0" rIns="0" bIns="0" rtlCol="0" anchor="ctr"/>
+          <a:lstStyle/>
+          <a:p>
+            <a:pPr indent="0" marL="0">
+              <a:buNone/>
+            </a:pPr>
+            <a:r>
+              <a:rPr lang="en-US" sz="1600" b="1" dirty="0">
+                <a:solidFill>
+                  <a:srgbClr val="E9DFCB"/>
+                </a:solidFill>
+                <a:latin typeface="Yu Gothic" pitchFamily="34" charset="0"/>
+                <a:ea typeface="Yu Gothic" pitchFamily="34" charset="-122"/>
+                <a:cs typeface="Yu Gothic" pitchFamily="34" charset="-120"/>
+              </a:rPr>
+              <a:t>3,500万円</a:t>
+            </a:r>
+            <a:endParaRPr lang="en-US" sz="1600" dirty="0"/>
+          </a:p>
+        </p:txBody>
+      </p:sp>
+      <p:sp>
+        <p:nvSpPr>
+          <p:cNvPr id="100" name="Shape 97"/>
+          <p:cNvSpPr/>
+          <p:nvPr/>
+        </p:nvSpPr>
+        <p:spPr>
+          <a:xfrm>
+            <a:off x="9512503" y="3072384"/>
+            <a:ext cx="118872" cy="182880"/>
+          </a:xfrm>
+          <a:prstGeom prst="rect">
+            <a:avLst/>
+          </a:prstGeom>
+          <a:solidFill>
+            <a:srgbClr val="A8854A"/>
+          </a:solidFill>
+          <a:ln w="12700">
+            <a:solidFill>
+              <a:srgbClr val="A8854A"/>
+            </a:solidFill>
+            <a:prstDash val="solid"/>
+          </a:ln>
+        </p:spPr>
+      </p:sp>
+      <p:sp>
+        <p:nvSpPr>
+          <p:cNvPr id="101" name="Shape 98"/>
+          <p:cNvSpPr/>
+          <p:nvPr/>
+        </p:nvSpPr>
+        <p:spPr>
+          <a:xfrm>
+            <a:off x="9658807" y="3072384"/>
+            <a:ext cx="118872" cy="182880"/>
+          </a:xfrm>
+          <a:prstGeom prst="rect">
+            <a:avLst/>
+          </a:prstGeom>
+          <a:solidFill>
+            <a:srgbClr val="A8854A"/>
+          </a:solidFill>
+          <a:ln w="12700">
+            <a:solidFill>
+              <a:srgbClr val="A8854A"/>
+            </a:solidFill>
+            <a:prstDash val="solid"/>
+          </a:ln>
+        </p:spPr>
+      </p:sp>
+      <p:sp>
+        <p:nvSpPr>
+          <p:cNvPr id="102" name="Shape 99"/>
+          <p:cNvSpPr/>
+          <p:nvPr/>
+        </p:nvSpPr>
+        <p:spPr>
+          <a:xfrm>
+            <a:off x="9805111" y="3072384"/>
+            <a:ext cx="118872" cy="182880"/>
+          </a:xfrm>
+          <a:prstGeom prst="rect">
+            <a:avLst/>
+          </a:prstGeom>
+          <a:solidFill>
+            <a:srgbClr val="A8854A"/>
+          </a:solidFill>
+          <a:ln w="12700">
+            <a:solidFill>
+              <a:srgbClr val="A8854A"/>
+            </a:solidFill>
+            <a:prstDash val="solid"/>
+          </a:ln>
+        </p:spPr>
+      </p:sp>
+      <p:sp>
+        <p:nvSpPr>
+          <p:cNvPr id="103" name="Shape 100"/>
+          <p:cNvSpPr/>
+          <p:nvPr/>
+        </p:nvSpPr>
+        <p:spPr>
+          <a:xfrm>
+            <a:off x="9951415" y="3072384"/>
+            <a:ext cx="118872" cy="182880"/>
+          </a:xfrm>
+          <a:prstGeom prst="rect">
+            <a:avLst/>
+          </a:prstGeom>
+          <a:solidFill>
+            <a:srgbClr val="A8854A"/>
+          </a:solidFill>
+          <a:ln w="12700">
+            <a:solidFill>
+              <a:srgbClr val="A8854A"/>
+            </a:solidFill>
+            <a:prstDash val="solid"/>
+          </a:ln>
+        </p:spPr>
+      </p:sp>
+      <p:sp>
+        <p:nvSpPr>
+          <p:cNvPr id="104" name="Shape 101"/>
+          <p:cNvSpPr/>
+          <p:nvPr/>
+        </p:nvSpPr>
+        <p:spPr>
+          <a:xfrm>
+            <a:off x="10097719" y="3072384"/>
+            <a:ext cx="118872" cy="182880"/>
+          </a:xfrm>
+          <a:prstGeom prst="rect">
+            <a:avLst/>
+          </a:prstGeom>
+          <a:solidFill>
+            <a:srgbClr val="A8854A"/>
+          </a:solidFill>
+          <a:ln w="12700">
+            <a:solidFill>
+              <a:srgbClr val="A8854A"/>
+            </a:solidFill>
+            <a:prstDash val="solid"/>
+          </a:ln>
+        </p:spPr>
+      </p:sp>
+      <p:sp>
+        <p:nvSpPr>
+          <p:cNvPr id="105" name="Shape 102"/>
+          <p:cNvSpPr/>
+          <p:nvPr/>
+        </p:nvSpPr>
+        <p:spPr>
+          <a:xfrm>
+            <a:off x="10244023" y="3072384"/>
+            <a:ext cx="118872" cy="182880"/>
+          </a:xfrm>
+          <a:prstGeom prst="rect">
+            <a:avLst/>
+          </a:prstGeom>
+          <a:solidFill>
+            <a:srgbClr val="A8854A"/>
+          </a:solidFill>
+          <a:ln w="12700">
+            <a:solidFill>
+              <a:srgbClr val="A8854A"/>
+            </a:solidFill>
+            <a:prstDash val="solid"/>
+          </a:ln>
+        </p:spPr>
+      </p:sp>
+      <p:sp>
+        <p:nvSpPr>
+          <p:cNvPr id="106" name="Shape 103"/>
+          <p:cNvSpPr/>
+          <p:nvPr/>
+        </p:nvSpPr>
+        <p:spPr>
+          <a:xfrm>
+            <a:off x="10390327" y="3072384"/>
+            <a:ext cx="118872" cy="182880"/>
+          </a:xfrm>
+          <a:prstGeom prst="rect">
+            <a:avLst/>
+          </a:prstGeom>
+          <a:solidFill>
+            <a:srgbClr val="A8854A"/>
+          </a:solidFill>
+          <a:ln w="12700">
+            <a:solidFill>
+              <a:srgbClr val="A8854A"/>
+            </a:solidFill>
+            <a:prstDash val="solid"/>
+          </a:ln>
+        </p:spPr>
+      </p:sp>
+      <p:sp>
+        <p:nvSpPr>
+          <p:cNvPr id="107" name="Shape 104"/>
+          <p:cNvSpPr/>
+          <p:nvPr/>
+        </p:nvSpPr>
+        <p:spPr>
+          <a:xfrm>
+            <a:off x="10536631" y="3072384"/>
+            <a:ext cx="118872" cy="182880"/>
+          </a:xfrm>
+          <a:prstGeom prst="rect">
+            <a:avLst/>
+          </a:prstGeom>
+          <a:solidFill>
+            <a:srgbClr val="A8854A"/>
+          </a:solidFill>
+          <a:ln w="12700">
+            <a:solidFill>
+              <a:srgbClr val="A8854A"/>
+            </a:solidFill>
+            <a:prstDash val="solid"/>
+          </a:ln>
+        </p:spPr>
+      </p:sp>
+      <p:sp>
+        <p:nvSpPr>
+          <p:cNvPr id="108" name="Shape 105"/>
+          <p:cNvSpPr/>
+          <p:nvPr/>
+        </p:nvSpPr>
+        <p:spPr>
+          <a:xfrm>
+            <a:off x="10682935" y="3072384"/>
+            <a:ext cx="118872" cy="182880"/>
+          </a:xfrm>
+          <a:prstGeom prst="rect">
+            <a:avLst/>
+          </a:prstGeom>
+          <a:solidFill>
+            <a:srgbClr val="A8854A"/>
+          </a:solidFill>
+          <a:ln w="12700">
+            <a:solidFill>
+              <a:srgbClr val="A8854A"/>
+            </a:solidFill>
+            <a:prstDash val="solid"/>
+          </a:ln>
+        </p:spPr>
+      </p:sp>
+      <p:sp>
+        <p:nvSpPr>
+          <p:cNvPr id="109" name="Shape 106"/>
+          <p:cNvSpPr/>
+          <p:nvPr/>
+        </p:nvSpPr>
+        <p:spPr>
+          <a:xfrm>
+            <a:off x="10829239" y="3072384"/>
+            <a:ext cx="118872" cy="182880"/>
+          </a:xfrm>
+          <a:prstGeom prst="rect">
+            <a:avLst/>
+          </a:prstGeom>
+          <a:solidFill>
+            <a:srgbClr val="A8854A"/>
+          </a:solidFill>
+          <a:ln w="12700">
+            <a:solidFill>
+              <a:srgbClr val="A8854A"/>
+            </a:solidFill>
+            <a:prstDash val="solid"/>
+          </a:ln>
+        </p:spPr>
+      </p:sp>
+      <p:sp>
+        <p:nvSpPr>
+          <p:cNvPr id="110" name="Shape 107"/>
+          <p:cNvSpPr/>
+          <p:nvPr/>
+        </p:nvSpPr>
+        <p:spPr>
+          <a:xfrm>
+            <a:off x="10975543" y="3072384"/>
+            <a:ext cx="118872" cy="182880"/>
+          </a:xfrm>
+          <a:prstGeom prst="rect">
+            <a:avLst/>
+          </a:prstGeom>
+          <a:solidFill>
+            <a:srgbClr val="A8854A"/>
+          </a:solidFill>
+          <a:ln w="12700">
+            <a:solidFill>
+              <a:srgbClr val="A8854A"/>
+            </a:solidFill>
+            <a:prstDash val="solid"/>
+          </a:ln>
+        </p:spPr>
+      </p:sp>
+      <p:sp>
+        <p:nvSpPr>
+          <p:cNvPr id="111" name="Shape 108"/>
+          <p:cNvSpPr/>
+          <p:nvPr/>
+        </p:nvSpPr>
+        <p:spPr>
+          <a:xfrm>
+            <a:off x="11121847" y="3072384"/>
+            <a:ext cx="118872" cy="182880"/>
+          </a:xfrm>
+          <a:prstGeom prst="rect">
+            <a:avLst/>
+          </a:prstGeom>
+          <a:solidFill>
+            <a:srgbClr val="A8854A"/>
+          </a:solidFill>
+          <a:ln w="12700">
+            <a:solidFill>
+              <a:srgbClr val="A8854A"/>
+            </a:solidFill>
+            <a:prstDash val="solid"/>
+          </a:ln>
+        </p:spPr>
+      </p:sp>
+      <p:sp>
+        <p:nvSpPr>
+          <p:cNvPr id="112" name="Shape 109"/>
+          <p:cNvSpPr/>
+          <p:nvPr/>
+        </p:nvSpPr>
+        <p:spPr>
+          <a:xfrm>
+            <a:off x="11268151" y="3072384"/>
+            <a:ext cx="118872" cy="182880"/>
+          </a:xfrm>
+          <a:prstGeom prst="rect">
+            <a:avLst/>
+          </a:prstGeom>
+          <a:solidFill>
+            <a:srgbClr val="A8854A"/>
+          </a:solidFill>
+          <a:ln w="12700">
+            <a:solidFill>
+              <a:srgbClr val="A8854A"/>
+            </a:solidFill>
+            <a:prstDash val="solid"/>
+          </a:ln>
+        </p:spPr>
+      </p:sp>
+      <p:sp>
+        <p:nvSpPr>
+          <p:cNvPr id="113" name="Text 110"/>
+          <p:cNvSpPr txBox="1"/>
+          <p:nvPr/>
+        </p:nvSpPr>
+        <p:spPr>
+          <a:xfrm>
+            <a:off x="6461608" y="3621024"/>
+            <a:ext cx="1783080" cy="329184"/>
+          </a:xfrm>
+          <a:prstGeom prst="rect">
+            <a:avLst/>
+          </a:prstGeom>
+          <a:noFill/>
+          <a:ln/>
+        </p:spPr>
+        <p:txBody>
+          <a:bodyPr wrap="square" lIns="0" tIns="0" rIns="0" bIns="0" rtlCol="0" anchor="ctr"/>
+          <a:lstStyle/>
+          <a:p>
+            <a:pPr indent="0" marL="0">
+              <a:buNone/>
+            </a:pPr>
+            <a:r>
+              <a:rPr lang="en-US" sz="1300" b="1" dirty="0">
+                <a:solidFill>
+                  <a:srgbClr val="FFFFFF"/>
+                </a:solidFill>
+                <a:latin typeface="Yu Gothic" pitchFamily="34" charset="0"/>
+                <a:ea typeface="Yu Gothic" pitchFamily="34" charset="-122"/>
+                <a:cs typeface="Yu Gothic" pitchFamily="34" charset="-120"/>
+              </a:rPr>
+              <a:t>省エネ基準適合</a:t>
+            </a:r>
+            <a:endParaRPr lang="en-US" sz="1300" dirty="0"/>
+          </a:p>
+        </p:txBody>
+      </p:sp>
+      <p:sp>
+        <p:nvSpPr>
+          <p:cNvPr id="114" name="Text 111"/>
+          <p:cNvSpPr txBox="1"/>
+          <p:nvPr/>
+        </p:nvSpPr>
+        <p:spPr>
+          <a:xfrm>
+            <a:off x="8244688" y="3621024"/>
+            <a:ext cx="1188720" cy="329184"/>
+          </a:xfrm>
+          <a:prstGeom prst="rect">
+            <a:avLst/>
+          </a:prstGeom>
+          <a:noFill/>
+          <a:ln/>
+        </p:spPr>
+        <p:txBody>
+          <a:bodyPr wrap="square" lIns="0" tIns="0" rIns="0" bIns="0" rtlCol="0" anchor="ctr"/>
+          <a:lstStyle/>
+          <a:p>
+            <a:pPr indent="0" marL="0">
+              <a:buNone/>
+            </a:pPr>
+            <a:r>
+              <a:rPr lang="en-US" sz="1600" b="1" dirty="0">
+                <a:solidFill>
+                  <a:srgbClr val="E9DFCB"/>
+                </a:solidFill>
+                <a:latin typeface="Yu Gothic" pitchFamily="34" charset="0"/>
+                <a:ea typeface="Yu Gothic" pitchFamily="34" charset="-122"/>
+                <a:cs typeface="Yu Gothic" pitchFamily="34" charset="-120"/>
+              </a:rPr>
+              <a:t>2,000万円</a:t>
+            </a:r>
+            <a:endParaRPr lang="en-US" sz="1600" dirty="0"/>
+          </a:p>
+        </p:txBody>
+      </p:sp>
+      <p:sp>
+        <p:nvSpPr>
+          <p:cNvPr id="115" name="Shape 112"/>
+          <p:cNvSpPr/>
+          <p:nvPr/>
+        </p:nvSpPr>
+        <p:spPr>
+          <a:xfrm>
+            <a:off x="9512503" y="3694176"/>
+            <a:ext cx="118872" cy="182880"/>
+          </a:xfrm>
+          <a:prstGeom prst="rect">
+            <a:avLst/>
+          </a:prstGeom>
+          <a:solidFill>
+            <a:srgbClr val="A8854A"/>
+          </a:solidFill>
+          <a:ln w="12700">
+            <a:solidFill>
+              <a:srgbClr val="A8854A"/>
+            </a:solidFill>
+            <a:prstDash val="solid"/>
+          </a:ln>
+        </p:spPr>
+      </p:sp>
+      <p:sp>
+        <p:nvSpPr>
+          <p:cNvPr id="116" name="Shape 113"/>
+          <p:cNvSpPr/>
+          <p:nvPr/>
+        </p:nvSpPr>
+        <p:spPr>
+          <a:xfrm>
+            <a:off x="9658807" y="3694176"/>
+            <a:ext cx="118872" cy="182880"/>
+          </a:xfrm>
+          <a:prstGeom prst="rect">
+            <a:avLst/>
+          </a:prstGeom>
+          <a:solidFill>
+            <a:srgbClr val="A8854A"/>
+          </a:solidFill>
+          <a:ln w="12700">
+            <a:solidFill>
+              <a:srgbClr val="A8854A"/>
+            </a:solidFill>
+            <a:prstDash val="solid"/>
+          </a:ln>
+        </p:spPr>
+      </p:sp>
+      <p:sp>
+        <p:nvSpPr>
+          <p:cNvPr id="117" name="Shape 114"/>
+          <p:cNvSpPr/>
+          <p:nvPr/>
+        </p:nvSpPr>
+        <p:spPr>
+          <a:xfrm>
+            <a:off x="9805111" y="3694176"/>
+            <a:ext cx="118872" cy="182880"/>
+          </a:xfrm>
+          <a:prstGeom prst="rect">
+            <a:avLst/>
+          </a:prstGeom>
+          <a:solidFill>
+            <a:srgbClr val="A8854A"/>
+          </a:solidFill>
+          <a:ln w="12700">
+            <a:solidFill>
+              <a:srgbClr val="A8854A"/>
+            </a:solidFill>
+            <a:prstDash val="solid"/>
+          </a:ln>
+        </p:spPr>
+      </p:sp>
+      <p:sp>
+        <p:nvSpPr>
+          <p:cNvPr id="118" name="Shape 115"/>
+          <p:cNvSpPr/>
+          <p:nvPr/>
+        </p:nvSpPr>
+        <p:spPr>
+          <a:xfrm>
+            <a:off x="9951415" y="3694176"/>
+            <a:ext cx="118872" cy="182880"/>
+          </a:xfrm>
+          <a:prstGeom prst="rect">
+            <a:avLst/>
+          </a:prstGeom>
+          <a:solidFill>
+            <a:srgbClr val="A8854A"/>
+          </a:solidFill>
+          <a:ln w="12700">
+            <a:solidFill>
+              <a:srgbClr val="A8854A"/>
+            </a:solidFill>
+            <a:prstDash val="solid"/>
+          </a:ln>
+        </p:spPr>
+      </p:sp>
+      <p:sp>
+        <p:nvSpPr>
+          <p:cNvPr id="119" name="Shape 116"/>
+          <p:cNvSpPr/>
+          <p:nvPr/>
+        </p:nvSpPr>
+        <p:spPr>
+          <a:xfrm>
+            <a:off x="10097719" y="3694176"/>
+            <a:ext cx="118872" cy="182880"/>
+          </a:xfrm>
+          <a:prstGeom prst="rect">
+            <a:avLst/>
+          </a:prstGeom>
+          <a:solidFill>
+            <a:srgbClr val="A8854A"/>
+          </a:solidFill>
+          <a:ln w="12700">
+            <a:solidFill>
+              <a:srgbClr val="A8854A"/>
+            </a:solidFill>
+            <a:prstDash val="solid"/>
+          </a:ln>
+        </p:spPr>
+      </p:sp>
+      <p:sp>
+        <p:nvSpPr>
+          <p:cNvPr id="120" name="Shape 117"/>
+          <p:cNvSpPr/>
+          <p:nvPr/>
+        </p:nvSpPr>
+        <p:spPr>
+          <a:xfrm>
+            <a:off x="10244023" y="3694176"/>
+            <a:ext cx="118872" cy="182880"/>
+          </a:xfrm>
+          <a:prstGeom prst="rect">
+            <a:avLst/>
+          </a:prstGeom>
+          <a:solidFill>
+            <a:srgbClr val="A8854A"/>
+          </a:solidFill>
+          <a:ln w="12700">
+            <a:solidFill>
+              <a:srgbClr val="A8854A"/>
+            </a:solidFill>
+            <a:prstDash val="solid"/>
+          </a:ln>
+        </p:spPr>
+      </p:sp>
+      <p:sp>
+        <p:nvSpPr>
+          <p:cNvPr id="121" name="Shape 118"/>
+          <p:cNvSpPr/>
+          <p:nvPr/>
+        </p:nvSpPr>
+        <p:spPr>
+          <a:xfrm>
+            <a:off x="10390327" y="3694176"/>
+            <a:ext cx="118872" cy="182880"/>
+          </a:xfrm>
+          <a:prstGeom prst="rect">
+            <a:avLst/>
+          </a:prstGeom>
+          <a:solidFill>
+            <a:srgbClr val="A8854A"/>
+          </a:solidFill>
+          <a:ln w="12700">
+            <a:solidFill>
+              <a:srgbClr val="A8854A"/>
+            </a:solidFill>
+            <a:prstDash val="solid"/>
+          </a:ln>
+        </p:spPr>
+      </p:sp>
+      <p:sp>
+        <p:nvSpPr>
+          <p:cNvPr id="122" name="Shape 119"/>
+          <p:cNvSpPr/>
+          <p:nvPr/>
+        </p:nvSpPr>
+        <p:spPr>
+          <a:xfrm>
+            <a:off x="10536631" y="3694176"/>
+            <a:ext cx="118872" cy="182880"/>
+          </a:xfrm>
+          <a:prstGeom prst="rect">
+            <a:avLst/>
+          </a:prstGeom>
+          <a:solidFill>
+            <a:srgbClr val="A8854A"/>
+          </a:solidFill>
+          <a:ln w="12700">
+            <a:solidFill>
+              <a:srgbClr val="A8854A"/>
+            </a:solidFill>
+            <a:prstDash val="solid"/>
+          </a:ln>
+        </p:spPr>
+      </p:sp>
+      <p:sp>
+        <p:nvSpPr>
+          <p:cNvPr id="123" name="Shape 120"/>
+          <p:cNvSpPr/>
+          <p:nvPr/>
+        </p:nvSpPr>
+        <p:spPr>
+          <a:xfrm>
+            <a:off x="10682935" y="3694176"/>
+            <a:ext cx="118872" cy="182880"/>
+          </a:xfrm>
+          <a:prstGeom prst="rect">
+            <a:avLst/>
+          </a:prstGeom>
+          <a:solidFill>
+            <a:srgbClr val="A8854A"/>
+          </a:solidFill>
+          <a:ln w="12700">
+            <a:solidFill>
+              <a:srgbClr val="A8854A"/>
+            </a:solidFill>
+            <a:prstDash val="solid"/>
+          </a:ln>
+        </p:spPr>
+      </p:sp>
+      <p:sp>
+        <p:nvSpPr>
+          <p:cNvPr id="124" name="Shape 121"/>
+          <p:cNvSpPr/>
+          <p:nvPr/>
+        </p:nvSpPr>
+        <p:spPr>
+          <a:xfrm>
+            <a:off x="10829239" y="3694176"/>
+            <a:ext cx="118872" cy="182880"/>
+          </a:xfrm>
+          <a:prstGeom prst="rect">
+            <a:avLst/>
+          </a:prstGeom>
+          <a:solidFill>
+            <a:srgbClr val="A8854A"/>
+          </a:solidFill>
+          <a:ln w="12700">
+            <a:solidFill>
+              <a:srgbClr val="A8854A"/>
+            </a:solidFill>
+            <a:prstDash val="solid"/>
+          </a:ln>
+        </p:spPr>
+      </p:sp>
+      <p:sp>
+        <p:nvSpPr>
+          <p:cNvPr id="125" name="Shape 122"/>
+          <p:cNvSpPr/>
+          <p:nvPr/>
+        </p:nvSpPr>
+        <p:spPr>
+          <a:xfrm>
+            <a:off x="10975543" y="3694176"/>
+            <a:ext cx="118872" cy="182880"/>
+          </a:xfrm>
+          <a:prstGeom prst="rect">
+            <a:avLst/>
+          </a:prstGeom>
+          <a:solidFill>
+            <a:srgbClr val="A8854A"/>
+          </a:solidFill>
+          <a:ln w="12700">
+            <a:solidFill>
+              <a:srgbClr val="A8854A"/>
+            </a:solidFill>
+            <a:prstDash val="solid"/>
+          </a:ln>
+        </p:spPr>
+      </p:sp>
+      <p:sp>
+        <p:nvSpPr>
+          <p:cNvPr id="126" name="Shape 123"/>
+          <p:cNvSpPr/>
+          <p:nvPr/>
+        </p:nvSpPr>
+        <p:spPr>
+          <a:xfrm>
+            <a:off x="11121847" y="3694176"/>
+            <a:ext cx="118872" cy="182880"/>
+          </a:xfrm>
+          <a:prstGeom prst="rect">
+            <a:avLst/>
+          </a:prstGeom>
+          <a:solidFill>
+            <a:srgbClr val="A8854A"/>
+          </a:solidFill>
+          <a:ln w="12700">
+            <a:solidFill>
+              <a:srgbClr val="A8854A"/>
+            </a:solidFill>
+            <a:prstDash val="solid"/>
+          </a:ln>
+        </p:spPr>
+      </p:sp>
+      <p:sp>
+        <p:nvSpPr>
+          <p:cNvPr id="127" name="Shape 124"/>
+          <p:cNvSpPr/>
+          <p:nvPr/>
+        </p:nvSpPr>
+        <p:spPr>
+          <a:xfrm>
+            <a:off x="11268151" y="3694176"/>
+            <a:ext cx="118872" cy="182880"/>
+          </a:xfrm>
+          <a:prstGeom prst="rect">
+            <a:avLst/>
+          </a:prstGeom>
+          <a:solidFill>
+            <a:srgbClr val="A8854A"/>
+          </a:solidFill>
+          <a:ln w="12700">
+            <a:solidFill>
+              <a:srgbClr val="A8854A"/>
+            </a:solidFill>
+            <a:prstDash val="solid"/>
+          </a:ln>
+        </p:spPr>
+      </p:sp>
+      <p:sp>
+        <p:nvSpPr>
+          <p:cNvPr id="128" name="Text 125"/>
+          <p:cNvSpPr txBox="1"/>
+          <p:nvPr/>
+        </p:nvSpPr>
+        <p:spPr>
+          <a:xfrm>
+            <a:off x="6461608" y="4242816"/>
+            <a:ext cx="1783080" cy="329184"/>
+          </a:xfrm>
+          <a:prstGeom prst="rect">
+            <a:avLst/>
+          </a:prstGeom>
+          <a:noFill/>
+          <a:ln/>
+        </p:spPr>
+        <p:txBody>
+          <a:bodyPr wrap="square" lIns="0" tIns="0" rIns="0" bIns="0" rtlCol="0" anchor="ctr"/>
+          <a:lstStyle/>
+          <a:p>
+            <a:pPr indent="0" marL="0">
+              <a:buNone/>
+            </a:pPr>
+            <a:r>
+              <a:rPr lang="en-US" sz="1300" b="1" dirty="0">
+                <a:solidFill>
+                  <a:srgbClr val="FFFFFF"/>
+                </a:solidFill>
+                <a:latin typeface="Yu Gothic" pitchFamily="34" charset="0"/>
+                <a:ea typeface="Yu Gothic" pitchFamily="34" charset="-122"/>
+                <a:cs typeface="Yu Gothic" pitchFamily="34" charset="-120"/>
+              </a:rPr>
+              <a:t>その他（証明なし）</a:t>
+            </a:r>
+            <a:endParaRPr lang="en-US" sz="1300" dirty="0"/>
+          </a:p>
+        </p:txBody>
+      </p:sp>
+      <p:sp>
+        <p:nvSpPr>
+          <p:cNvPr id="129" name="Text 126"/>
+          <p:cNvSpPr txBox="1"/>
+          <p:nvPr/>
+        </p:nvSpPr>
+        <p:spPr>
+          <a:xfrm>
+            <a:off x="8244688" y="4242816"/>
+            <a:ext cx="1188720" cy="329184"/>
+          </a:xfrm>
+          <a:prstGeom prst="rect">
+            <a:avLst/>
+          </a:prstGeom>
+          <a:noFill/>
+          <a:ln/>
+        </p:spPr>
+        <p:txBody>
+          <a:bodyPr wrap="square" lIns="0" tIns="0" rIns="0" bIns="0" rtlCol="0" anchor="ctr"/>
+          <a:lstStyle/>
+          <a:p>
+            <a:pPr indent="0" marL="0">
+              <a:buNone/>
+            </a:pPr>
+            <a:r>
+              <a:rPr lang="en-US" sz="1600" b="1" dirty="0">
+                <a:solidFill>
+                  <a:srgbClr val="E9DFCB"/>
+                </a:solidFill>
+                <a:latin typeface="Yu Gothic" pitchFamily="34" charset="0"/>
+                <a:ea typeface="Yu Gothic" pitchFamily="34" charset="-122"/>
+                <a:cs typeface="Yu Gothic" pitchFamily="34" charset="-120"/>
+              </a:rPr>
+              <a:t>2,000万円</a:t>
+            </a:r>
+            <a:endParaRPr lang="en-US" sz="1600" dirty="0"/>
+          </a:p>
+        </p:txBody>
+      </p:sp>
+      <p:sp>
+        <p:nvSpPr>
+          <p:cNvPr id="130" name="Shape 127"/>
+          <p:cNvSpPr/>
+          <p:nvPr/>
+        </p:nvSpPr>
+        <p:spPr>
+          <a:xfrm>
+            <a:off x="9512503" y="4315968"/>
+            <a:ext cx="118872" cy="182880"/>
+          </a:xfrm>
+          <a:prstGeom prst="rect">
+            <a:avLst/>
+          </a:prstGeom>
+          <a:solidFill>
+            <a:srgbClr val="A8854A"/>
+          </a:solidFill>
+          <a:ln w="12700">
+            <a:solidFill>
+              <a:srgbClr val="A8854A"/>
+            </a:solidFill>
+            <a:prstDash val="solid"/>
+          </a:ln>
+        </p:spPr>
+      </p:sp>
+      <p:sp>
+        <p:nvSpPr>
+          <p:cNvPr id="131" name="Shape 128"/>
+          <p:cNvSpPr/>
+          <p:nvPr/>
+        </p:nvSpPr>
+        <p:spPr>
+          <a:xfrm>
+            <a:off x="9658807" y="4315968"/>
+            <a:ext cx="118872" cy="182880"/>
+          </a:xfrm>
+          <a:prstGeom prst="rect">
+            <a:avLst/>
+          </a:prstGeom>
+          <a:solidFill>
+            <a:srgbClr val="A8854A"/>
+          </a:solidFill>
+          <a:ln w="12700">
+            <a:solidFill>
+              <a:srgbClr val="A8854A"/>
+            </a:solidFill>
+            <a:prstDash val="solid"/>
+          </a:ln>
+        </p:spPr>
+      </p:sp>
+      <p:sp>
+        <p:nvSpPr>
+          <p:cNvPr id="132" name="Shape 129"/>
+          <p:cNvSpPr/>
+          <p:nvPr/>
+        </p:nvSpPr>
+        <p:spPr>
+          <a:xfrm>
+            <a:off x="9805111" y="4315968"/>
+            <a:ext cx="118872" cy="182880"/>
+          </a:xfrm>
+          <a:prstGeom prst="rect">
+            <a:avLst/>
+          </a:prstGeom>
+          <a:solidFill>
+            <a:srgbClr val="A8854A"/>
+          </a:solidFill>
+          <a:ln w="12700">
+            <a:solidFill>
+              <a:srgbClr val="A8854A"/>
+            </a:solidFill>
+            <a:prstDash val="solid"/>
+          </a:ln>
+        </p:spPr>
+      </p:sp>
+      <p:sp>
+        <p:nvSpPr>
+          <p:cNvPr id="133" name="Shape 130"/>
+          <p:cNvSpPr/>
+          <p:nvPr/>
+        </p:nvSpPr>
+        <p:spPr>
+          <a:xfrm>
+            <a:off x="9951415" y="4315968"/>
+            <a:ext cx="118872" cy="182880"/>
+          </a:xfrm>
+          <a:prstGeom prst="rect">
+            <a:avLst/>
+          </a:prstGeom>
+          <a:solidFill>
+            <a:srgbClr val="A8854A"/>
+          </a:solidFill>
+          <a:ln w="12700">
+            <a:solidFill>
+              <a:srgbClr val="A8854A"/>
+            </a:solidFill>
+            <a:prstDash val="solid"/>
+          </a:ln>
+        </p:spPr>
+      </p:sp>
+      <p:sp>
+        <p:nvSpPr>
+          <p:cNvPr id="134" name="Shape 131"/>
+          <p:cNvSpPr/>
+          <p:nvPr/>
+        </p:nvSpPr>
+        <p:spPr>
+          <a:xfrm>
+            <a:off x="10097719" y="4315968"/>
+            <a:ext cx="118872" cy="182880"/>
+          </a:xfrm>
+          <a:prstGeom prst="rect">
+            <a:avLst/>
+          </a:prstGeom>
+          <a:solidFill>
+            <a:srgbClr val="A8854A"/>
+          </a:solidFill>
+          <a:ln w="12700">
+            <a:solidFill>
+              <a:srgbClr val="A8854A"/>
+            </a:solidFill>
+            <a:prstDash val="solid"/>
+          </a:ln>
+        </p:spPr>
+      </p:sp>
+      <p:sp>
+        <p:nvSpPr>
+          <p:cNvPr id="135" name="Shape 132"/>
+          <p:cNvSpPr/>
+          <p:nvPr/>
+        </p:nvSpPr>
+        <p:spPr>
+          <a:xfrm>
+            <a:off x="10244023" y="4315968"/>
+            <a:ext cx="118872" cy="182880"/>
+          </a:xfrm>
+          <a:prstGeom prst="rect">
+            <a:avLst/>
+          </a:prstGeom>
+          <a:solidFill>
+            <a:srgbClr val="A8854A"/>
+          </a:solidFill>
+          <a:ln w="12700">
+            <a:solidFill>
+              <a:srgbClr val="A8854A"/>
+            </a:solidFill>
+            <a:prstDash val="solid"/>
+          </a:ln>
+        </p:spPr>
+      </p:sp>
+      <p:sp>
+        <p:nvSpPr>
+          <p:cNvPr id="136" name="Shape 133"/>
+          <p:cNvSpPr/>
+          <p:nvPr/>
+        </p:nvSpPr>
+        <p:spPr>
+          <a:xfrm>
+            <a:off x="10390327" y="4315968"/>
+            <a:ext cx="118872" cy="182880"/>
+          </a:xfrm>
+          <a:prstGeom prst="rect">
+            <a:avLst/>
+          </a:prstGeom>
+          <a:solidFill>
+            <a:srgbClr val="A8854A"/>
+          </a:solidFill>
+          <a:ln w="12700">
+            <a:solidFill>
+              <a:srgbClr val="A8854A"/>
+            </a:solidFill>
+            <a:prstDash val="solid"/>
+          </a:ln>
+        </p:spPr>
+      </p:sp>
+      <p:sp>
+        <p:nvSpPr>
+          <p:cNvPr id="137" name="Shape 134"/>
+          <p:cNvSpPr/>
+          <p:nvPr/>
+        </p:nvSpPr>
+        <p:spPr>
+          <a:xfrm>
+            <a:off x="10536631" y="4315968"/>
+            <a:ext cx="118872" cy="182880"/>
+          </a:xfrm>
+          <a:prstGeom prst="rect">
+            <a:avLst/>
+          </a:prstGeom>
+          <a:solidFill>
+            <a:srgbClr val="A8854A"/>
+          </a:solidFill>
+          <a:ln w="12700">
+            <a:solidFill>
+              <a:srgbClr val="A8854A"/>
+            </a:solidFill>
+            <a:prstDash val="solid"/>
+          </a:ln>
+        </p:spPr>
+      </p:sp>
+      <p:sp>
+        <p:nvSpPr>
+          <p:cNvPr id="138" name="Shape 135"/>
+          <p:cNvSpPr/>
+          <p:nvPr/>
+        </p:nvSpPr>
+        <p:spPr>
+          <a:xfrm>
+            <a:off x="10682935" y="4315968"/>
+            <a:ext cx="118872" cy="182880"/>
+          </a:xfrm>
+          <a:prstGeom prst="rect">
+            <a:avLst/>
+          </a:prstGeom>
+          <a:solidFill>
+            <a:srgbClr val="A8854A"/>
+          </a:solidFill>
+          <a:ln w="12700">
+            <a:solidFill>
+              <a:srgbClr val="A8854A"/>
+            </a:solidFill>
+            <a:prstDash val="solid"/>
+          </a:ln>
+        </p:spPr>
+      </p:sp>
+      <p:sp>
+        <p:nvSpPr>
+          <p:cNvPr id="139" name="Shape 136"/>
+          <p:cNvSpPr/>
+          <p:nvPr/>
+        </p:nvSpPr>
+        <p:spPr>
+          <a:xfrm>
+            <a:off x="10829239" y="4315968"/>
+            <a:ext cx="118872" cy="182880"/>
+          </a:xfrm>
+          <a:prstGeom prst="rect">
+            <a:avLst/>
+          </a:prstGeom>
+          <a:solidFill>
+            <a:srgbClr val="A8854A"/>
+          </a:solidFill>
+          <a:ln w="12700">
+            <a:solidFill>
+              <a:srgbClr val="A8854A"/>
+            </a:solidFill>
+            <a:prstDash val="solid"/>
+          </a:ln>
+        </p:spPr>
+      </p:sp>
+      <p:sp>
+        <p:nvSpPr>
+          <p:cNvPr id="140" name="Shape 137"/>
+          <p:cNvSpPr/>
+          <p:nvPr/>
+        </p:nvSpPr>
+        <p:spPr>
+          <a:xfrm>
+            <a:off x="10975543" y="4315968"/>
+            <a:ext cx="118872" cy="182880"/>
+          </a:xfrm>
+          <a:prstGeom prst="rect">
+            <a:avLst/>
+          </a:prstGeom>
+          <a:solidFill>
+            <a:srgbClr val="34466A"/>
+          </a:solidFill>
+          <a:ln w="12700">
+            <a:solidFill>
+              <a:srgbClr val="34466A"/>
+            </a:solidFill>
+            <a:prstDash val="solid"/>
+          </a:ln>
+        </p:spPr>
+      </p:sp>
+      <p:sp>
+        <p:nvSpPr>
+          <p:cNvPr id="141" name="Shape 138"/>
+          <p:cNvSpPr/>
+          <p:nvPr/>
+        </p:nvSpPr>
+        <p:spPr>
+          <a:xfrm>
+            <a:off x="11121847" y="4315968"/>
+            <a:ext cx="118872" cy="182880"/>
+          </a:xfrm>
+          <a:prstGeom prst="rect">
+            <a:avLst/>
+          </a:prstGeom>
+          <a:solidFill>
+            <a:srgbClr val="34466A"/>
+          </a:solidFill>
+          <a:ln w="12700">
+            <a:solidFill>
+              <a:srgbClr val="34466A"/>
+            </a:solidFill>
+            <a:prstDash val="solid"/>
+          </a:ln>
+        </p:spPr>
+      </p:sp>
+      <p:sp>
+        <p:nvSpPr>
+          <p:cNvPr id="142" name="Shape 139"/>
+          <p:cNvSpPr/>
+          <p:nvPr/>
+        </p:nvSpPr>
+        <p:spPr>
+          <a:xfrm>
+            <a:off x="11268151" y="4315968"/>
+            <a:ext cx="118872" cy="182880"/>
+          </a:xfrm>
+          <a:prstGeom prst="rect">
+            <a:avLst/>
+          </a:prstGeom>
+          <a:solidFill>
+            <a:srgbClr val="34466A"/>
+          </a:solidFill>
+          <a:ln w="12700">
+            <a:solidFill>
+              <a:srgbClr val="34466A"/>
+            </a:solidFill>
+            <a:prstDash val="solid"/>
+          </a:ln>
+        </p:spPr>
+      </p:sp>
+      <p:sp>
+        <p:nvSpPr>
+          <p:cNvPr id="143" name="Text 140"/>
+          <p:cNvSpPr txBox="1"/>
+          <p:nvPr/>
+        </p:nvSpPr>
+        <p:spPr>
+          <a:xfrm>
+            <a:off x="6461608" y="4572000"/>
+            <a:ext cx="4952848" cy="237744"/>
+          </a:xfrm>
+          <a:prstGeom prst="rect">
+            <a:avLst/>
+          </a:prstGeom>
+          <a:noFill/>
+          <a:ln/>
+        </p:spPr>
+        <p:txBody>
+          <a:bodyPr wrap="square" lIns="0" tIns="0" rIns="0" bIns="0" rtlCol="0" anchor="t"/>
+          <a:lstStyle/>
+          <a:p>
+            <a:pPr indent="0" marL="0">
+              <a:buNone/>
+            </a:pPr>
+            <a:r>
+              <a:rPr lang="en-US" sz="1000" dirty="0">
+                <a:solidFill>
+                  <a:srgbClr val="C9D0DA"/>
+                </a:solidFill>
+                <a:latin typeface="Yu Gothic" pitchFamily="34" charset="0"/>
+                <a:ea typeface="Yu Gothic" pitchFamily="34" charset="-122"/>
+                <a:cs typeface="Yu Gothic" pitchFamily="34" charset="-120"/>
+              </a:rPr>
+              <a:t>1981年以前の建築は耐震の証明が必要</a:t>
+            </a:r>
+            <a:endParaRPr lang="en-US" sz="1000" dirty="0"/>
+          </a:p>
+        </p:txBody>
+      </p:sp>
+      <p:sp>
+        <p:nvSpPr>
+          <p:cNvPr id="144" name="Shape 141"/>
+          <p:cNvSpPr/>
+          <p:nvPr/>
+        </p:nvSpPr>
+        <p:spPr>
+          <a:xfrm>
+            <a:off x="548640" y="5029200"/>
+            <a:ext cx="11094415" cy="777240"/>
+          </a:xfrm>
+          <a:prstGeom prst="roundRect">
+            <a:avLst>
+              <a:gd name="adj" fmla="val 9412"/>
+            </a:avLst>
+          </a:prstGeom>
+          <a:solidFill>
+            <a:srgbClr val="E9DFCB"/>
+          </a:solidFill>
+          <a:ln w="12700">
+            <a:solidFill>
+              <a:srgbClr val="E9DFCB"/>
+            </a:solidFill>
+            <a:prstDash val="solid"/>
+          </a:ln>
+        </p:spPr>
+      </p:sp>
+      <p:sp>
+        <p:nvSpPr>
+          <p:cNvPr id="145" name="Text 142"/>
+          <p:cNvSpPr txBox="1"/>
+          <p:nvPr/>
+        </p:nvSpPr>
+        <p:spPr>
+          <a:xfrm>
+            <a:off x="777240" y="5029200"/>
+            <a:ext cx="1463040" cy="777240"/>
+          </a:xfrm>
+          <a:prstGeom prst="rect">
+            <a:avLst/>
+          </a:prstGeom>
+          <a:noFill/>
+          <a:ln/>
+        </p:spPr>
+        <p:txBody>
+          <a:bodyPr wrap="square" lIns="0" tIns="0" rIns="0" bIns="0" rtlCol="0" anchor="ctr"/>
+          <a:lstStyle/>
+          <a:p>
+            <a:pPr indent="0" marL="0">
+              <a:buNone/>
+            </a:pPr>
+            <a:r>
+              <a:rPr lang="en-US" sz="1300" b="1" dirty="0">
+                <a:solidFill>
+                  <a:srgbClr val="A8854A"/>
+                </a:solidFill>
+                <a:latin typeface="Yu Gothic" pitchFamily="34" charset="0"/>
+                <a:ea typeface="Yu Gothic" pitchFamily="34" charset="-122"/>
+                <a:cs typeface="Yu Gothic" pitchFamily="34" charset="-120"/>
+              </a:rPr>
+              <a:t>共通の主な要件</a:t>
+            </a:r>
+            <a:endParaRPr lang="en-US" sz="1300" dirty="0"/>
+          </a:p>
+        </p:txBody>
+      </p:sp>
+      <p:sp>
+        <p:nvSpPr>
+          <p:cNvPr id="146" name="Text 143"/>
+          <p:cNvSpPr txBox="1"/>
+          <p:nvPr/>
+        </p:nvSpPr>
+        <p:spPr>
+          <a:xfrm>
+            <a:off x="2240280" y="5029200"/>
+            <a:ext cx="9174175" cy="777240"/>
+          </a:xfrm>
+          <a:prstGeom prst="rect">
+            <a:avLst/>
+          </a:prstGeom>
+          <a:noFill/>
+          <a:ln/>
+        </p:spPr>
+        <p:txBody>
+          <a:bodyPr wrap="square" lIns="0" tIns="0" rIns="0" bIns="0" rtlCol="0" anchor="ctr"/>
+          <a:lstStyle/>
+          <a:p>
+            <a:pPr indent="0" marL="0">
+              <a:buNone/>
+            </a:pPr>
+            <a:r>
+              <a:rPr lang="en-US" sz="1200" dirty="0">
+                <a:solidFill>
+                  <a:srgbClr val="2B2F36"/>
+                </a:solidFill>
+                <a:latin typeface="Yu Gothic" pitchFamily="34" charset="0"/>
+                <a:ea typeface="Yu Gothic" pitchFamily="34" charset="-122"/>
+                <a:cs typeface="Yu Gothic" pitchFamily="34" charset="-120"/>
+              </a:rPr>
+              <a:t>控除率0.7%・一般世帯の限度額／床面積40㎡以上（40〜50㎡は合計所得1,000万円以下の年のみ）／合計所得2,000万円以下／返済期間10年以上／取得から6か月以内に入居／親族等からの取得は対象外</a:t>
+            </a:r>
+            <a:endParaRPr lang="en-US" sz="1200" dirty="0"/>
+          </a:p>
+        </p:txBody>
+      </p:sp>
+      <p:sp>
+        <p:nvSpPr>
+          <p:cNvPr id="147" name="Text 144"/>
+          <p:cNvSpPr txBox="1"/>
+          <p:nvPr/>
+        </p:nvSpPr>
+        <p:spPr>
+          <a:xfrm>
+            <a:off x="548640" y="5870448"/>
+            <a:ext cx="11094415" cy="457200"/>
+          </a:xfrm>
+          <a:prstGeom prst="rect">
+            <a:avLst/>
+          </a:prstGeom>
+          <a:noFill/>
+          <a:ln/>
+        </p:spPr>
+        <p:txBody>
+          <a:bodyPr wrap="square" lIns="0" tIns="0" rIns="0" bIns="0" rtlCol="0" anchor="b"/>
+          <a:lstStyle/>
+          <a:p>
+            <a:pPr indent="0" marL="0">
+              <a:buNone/>
+            </a:pPr>
+            <a:r>
+              <a:rPr lang="en-US" sz="1000" dirty="0">
+                <a:solidFill>
+                  <a:srgbClr val="6B7280"/>
+                </a:solidFill>
+                <a:latin typeface="Yu Gothic" pitchFamily="34" charset="0"/>
+                <a:ea typeface="Yu Gothic" pitchFamily="34" charset="-122"/>
+                <a:cs typeface="Yu Gothic" pitchFamily="34" charset="-120"/>
+              </a:rPr>
+              <a:t>※ 制度の基準日：2026年10月時点（令和8年度税制改正後・2026〜2030年入居）。子育て世帯・若者夫婦世帯（19歳未満の扶養親族がいる、または夫婦のいずれかが40歳未満）は上乗せあり（50㎡以上）。2028年以降入居の災害レッドゾーン内の新築は対象外。買取再販住宅の限度額は〔要確認〕。出典：財務省「令和8年度税制改正の大綱」、国土交通省「住宅ローン減税」、国税庁 タックスアンサーNo.1211-1。</a:t>
+            </a:r>
+            <a:endParaRPr lang="en-US" sz="1000" dirty="0"/>
+          </a:p>
+        </p:txBody>
+      </p:sp>
+      <p:sp>
+        <p:nvSpPr>
+          <p:cNvPr id="25" name="Slide Number Placeholder 0"/>
+          <p:cNvSpPr>
+            <a:spLocks noGrp="1"/>
+          </p:cNvSpPr>
+          <p:nvPr>
+            <p:ph type="sldNum" sz="quarter" idx="4294967295"/>
+          </p:nvPr>
+        </p:nvSpPr>
+        <p:spPr>
+          <a:xfrm>
+            <a:off x="11183112" y="6419088"/>
+            <a:ext cx="457200" cy="274320"/>
+          </a:xfrm>
+          <a:prstGeom prst="rect">
+            <a:avLst/>
+          </a:prstGeom>
+          <a:extLst>
+            <a:ext uri="{C572A759-6A51-4108-AA02-DFA0A04FC94B}">
+              <ma14:wrappingTextBoxFlag xmlns:ma14="http://schemas.microsoft.com/office/mac/drawingml/2011/main" val="0"/>
+            </a:ext>
+          </a:extLst>
+        </p:spPr>
+        <p:txBody>
+          <a:bodyPr/>
+          <a:lstStyle>
+            <a:lvl1pPr>
+              <a:defRPr sz="900">
+                <a:solidFill>
+                  <a:srgbClr val="6B7280"/>
+                </a:solidFill>
+                <a:latin typeface="Yu Gothic"/>
+                <a:ea typeface="Yu Gothic"/>
+                <a:cs typeface="Yu Gothic"/>
+              </a:defRPr>
+            </a:lvl1pPr>
+          </a:lstStyle>
+          <a:p>
+            <a:pPr algn="r"/>
+            <a:fld id="{F7021451-1387-4CA6-816F-3879F97B5CBC}" type="slidenum">
+              <a:rPr b="0" lang="en-US"/>
+              <a:t>19</a:t>
+            </a:fld>
+            <a:endParaRPr lang="en-US"/>
+          </a:p>
+        </p:txBody>
+      </p:sp>
+    </p:spTree>
+  </p:cSld>
+  <p:clrMapOvr>
+    <a:masterClrMapping/>
+  </p:clrMapOvr>
+</p:sld>
+</file>
+
 <file path=ppt/slides/slide2.xml><?xml version="1.0" encoding="utf-8"?>
 <p:sld xmlns:a="http://schemas.openxmlformats.org/drawingml/2006/main" xmlns:r="http://schemas.openxmlformats.org/officeDocument/2006/relationships" xmlns:p="http://schemas.openxmlformats.org/presentationml/2006/main">
   <p:cSld name="Slide 2">
@@ -19973,6 +25193,2724 @@
             <a:fld id="{F7021451-1387-4CA6-816F-3879F97B5CBC}" type="slidenum">
               <a:rPr b="0" lang="en-US"/>
               <a:t>2</a:t>
+            </a:fld>
+            <a:endParaRPr lang="en-US"/>
+          </a:p>
+        </p:txBody>
+      </p:sp>
+    </p:spTree>
+  </p:cSld>
+  <p:clrMapOvr>
+    <a:masterClrMapping/>
+  </p:clrMapOvr>
+</p:sld>
+</file>
+
+<file path=ppt/slides/slide20.xml><?xml version="1.0" encoding="utf-8"?>
+<p:sld xmlns:a="http://schemas.openxmlformats.org/drawingml/2006/main" xmlns:r="http://schemas.openxmlformats.org/officeDocument/2006/relationships" xmlns:p="http://schemas.openxmlformats.org/presentationml/2006/main">
+  <p:cSld name="Slide 20">
+    <p:spTree>
+      <p:nvGrpSpPr>
+        <p:cNvPr id="1" name=""/>
+        <p:cNvGrpSpPr/>
+        <p:nvPr/>
+      </p:nvGrpSpPr>
+      <p:grpSpPr>
+        <a:xfrm>
+          <a:off x="0" y="0"/>
+          <a:ext cx="0" cy="0"/>
+          <a:chOff x="0" y="0"/>
+          <a:chExt cx="0" cy="0"/>
+        </a:xfrm>
+      </p:grpSpPr>
+      <p:sp>
+        <p:nvSpPr>
+          <p:cNvPr id="2" name="Text 2"/>
+          <p:cNvSpPr/>
+          <p:nvPr>
+            <p:ph idx="102" type="body" hasCustomPrompt="1"/>
+          </p:nvPr>
+        </p:nvSpPr>
+        <p:spPr>
+          <a:xfrm>
+            <a:off x="548640" y="365760"/>
+            <a:ext cx="11094415" cy="310896"/>
+          </a:xfrm>
+          <a:prstGeom prst="rect">
+            <a:avLst/>
+          </a:prstGeom>
+          <a:noFill/>
+          <a:ln/>
+        </p:spPr>
+        <p:txBody>
+          <a:bodyPr wrap="square" lIns="0" tIns="0" rIns="0" bIns="0" rtlCol="0" anchor="ctr"/>
+          <a:lstStyle/>
+          <a:p>
+            <a:pPr algn="l" indent="0" marL="0">
+              <a:buNone/>
+            </a:pPr>
+            <a:r>
+              <a:rPr lang="en-US" sz="1200" b="1" dirty="0">
+                <a:solidFill>
+                  <a:srgbClr val="A8854A"/>
+                </a:solidFill>
+                <a:latin typeface="Yu Gothic" pitchFamily="34" charset="0"/>
+                <a:ea typeface="Yu Gothic" pitchFamily="34" charset="-122"/>
+                <a:cs typeface="Yu Gothic" pitchFamily="34" charset="-120"/>
+              </a:rPr>
+              <a:t>P20｜住宅ローン控除で税負担はどのくらい軽くなる？</a:t>
+            </a:r>
+            <a:endParaRPr lang="en-US" sz="1200" dirty="0"/>
+          </a:p>
+        </p:txBody>
+      </p:sp>
+      <p:sp>
+        <p:nvSpPr>
+          <p:cNvPr id="3" name="Text 2"/>
+          <p:cNvSpPr/>
+          <p:nvPr>
+            <p:ph idx="103" type="title" hasCustomPrompt="1"/>
+          </p:nvPr>
+        </p:nvSpPr>
+        <p:spPr>
+          <a:xfrm>
+            <a:off x="548640" y="694944"/>
+            <a:ext cx="11094415" cy="731520"/>
+          </a:xfrm>
+          <a:prstGeom prst="rect">
+            <a:avLst/>
+          </a:prstGeom>
+          <a:noFill/>
+          <a:ln/>
+        </p:spPr>
+        <p:txBody>
+          <a:bodyPr wrap="square" lIns="0" tIns="0" rIns="0" bIns="0" rtlCol="0" anchor="ctr"/>
+          <a:lstStyle/>
+          <a:p>
+            <a:pPr algn="l" indent="0" marL="0">
+              <a:buNone/>
+            </a:pPr>
+            <a:r>
+              <a:rPr lang="en-US" sz="2600" b="1" dirty="0">
+                <a:solidFill>
+                  <a:srgbClr val="1C2B45"/>
+                </a:solidFill>
+                <a:latin typeface="Yu Mincho" pitchFamily="34" charset="0"/>
+                <a:ea typeface="Yu Mincho" pitchFamily="34" charset="-122"/>
+                <a:cs typeface="Yu Mincho" pitchFamily="34" charset="-120"/>
+              </a:rPr>
+              <a:t>13年間で約244万円の見込み。ただし「上限」と「実際」は別もの</a:t>
+            </a:r>
+            <a:endParaRPr lang="en-US" sz="2600" dirty="0"/>
+          </a:p>
+        </p:txBody>
+      </p:sp>
+      <p:graphicFrame>
+        <p:nvGraphicFramePr>
+          <p:cNvPr id="5" name="Chart 0" descr=""/>
+          <p:cNvGraphicFramePr/>
+          <p:nvPr/>
+        </p:nvGraphicFramePr>
+        <p:xfrm>
+          <a:off x="548640" y="1645920"/>
+          <a:ext cx="6858000" cy="4114800"/>
+        </p:xfrm>
+        <a:graphic xmlns:a="http://schemas.openxmlformats.org/drawingml/2006/main">
+          <a:graphicData uri="http://schemas.openxmlformats.org/drawingml/2006/chart">
+            <c:chart xmlns:c="http://schemas.openxmlformats.org/drawingml/2006/chart" r:id="rId1"/>
+          </a:graphicData>
+        </a:graphic>
+      </p:graphicFrame>
+      <p:sp>
+        <p:nvSpPr>
+          <p:cNvPr id="6" name="Shape 2"/>
+          <p:cNvSpPr/>
+          <p:nvPr/>
+        </p:nvSpPr>
+        <p:spPr>
+          <a:xfrm>
+            <a:off x="7680960" y="1645920"/>
+            <a:ext cx="3962095" cy="1874520"/>
+          </a:xfrm>
+          <a:prstGeom prst="roundRect">
+            <a:avLst>
+              <a:gd name="adj" fmla="val 3902"/>
+            </a:avLst>
+          </a:prstGeom>
+          <a:solidFill>
+            <a:srgbClr val="1C2B45"/>
+          </a:solidFill>
+          <a:ln w="12700">
+            <a:solidFill>
+              <a:srgbClr val="1C2B45"/>
+            </a:solidFill>
+            <a:prstDash val="solid"/>
+          </a:ln>
+        </p:spPr>
+      </p:sp>
+      <p:sp>
+        <p:nvSpPr>
+          <p:cNvPr id="7" name="Text 3"/>
+          <p:cNvSpPr txBox="1"/>
+          <p:nvPr/>
+        </p:nvSpPr>
+        <p:spPr>
+          <a:xfrm>
+            <a:off x="7909560" y="1737360"/>
+            <a:ext cx="3504895" cy="274320"/>
+          </a:xfrm>
+          <a:prstGeom prst="rect">
+            <a:avLst/>
+          </a:prstGeom>
+          <a:noFill/>
+          <a:ln/>
+        </p:spPr>
+        <p:txBody>
+          <a:bodyPr wrap="square" lIns="0" tIns="0" rIns="0" bIns="0" rtlCol="0" anchor="t"/>
+          <a:lstStyle/>
+          <a:p>
+            <a:pPr indent="0" marL="0">
+              <a:buNone/>
+            </a:pPr>
+            <a:r>
+              <a:rPr lang="en-US" sz="1200" b="1" dirty="0">
+                <a:solidFill>
+                  <a:srgbClr val="E9DFCB"/>
+                </a:solidFill>
+                <a:latin typeface="Yu Gothic" pitchFamily="34" charset="0"/>
+                <a:ea typeface="Yu Gothic" pitchFamily="34" charset="-122"/>
+                <a:cs typeface="Yu Gothic" pitchFamily="34" charset="-120"/>
+              </a:rPr>
+              <a:t>13年間の控除見込額（概算）</a:t>
+            </a:r>
+            <a:endParaRPr lang="en-US" sz="1200" dirty="0"/>
+          </a:p>
+        </p:txBody>
+      </p:sp>
+      <p:sp>
+        <p:nvSpPr>
+          <p:cNvPr id="8" name="Text 4"/>
+          <p:cNvSpPr txBox="1"/>
+          <p:nvPr/>
+        </p:nvSpPr>
+        <p:spPr>
+          <a:xfrm>
+            <a:off x="7909560" y="2011680"/>
+            <a:ext cx="3504895" cy="594360"/>
+          </a:xfrm>
+          <a:prstGeom prst="rect">
+            <a:avLst/>
+          </a:prstGeom>
+          <a:noFill/>
+          <a:ln/>
+        </p:spPr>
+        <p:txBody>
+          <a:bodyPr wrap="square" lIns="0" tIns="0" rIns="0" bIns="0" rtlCol="0" anchor="t"/>
+          <a:lstStyle/>
+          <a:p>
+            <a:pPr indent="0" marL="0">
+              <a:buNone/>
+            </a:pPr>
+            <a:r>
+              <a:rPr lang="en-US" sz="3200" b="1" dirty="0">
+                <a:solidFill>
+                  <a:srgbClr val="FFFFFF"/>
+                </a:solidFill>
+                <a:latin typeface="Yu Gothic" pitchFamily="34" charset="0"/>
+                <a:ea typeface="Yu Gothic" pitchFamily="34" charset="-122"/>
+                <a:cs typeface="Yu Gothic" pitchFamily="34" charset="-120"/>
+              </a:rPr>
+              <a:t>約243.7万円</a:t>
+            </a:r>
+            <a:endParaRPr lang="en-US" sz="3200" dirty="0"/>
+          </a:p>
+        </p:txBody>
+      </p:sp>
+      <p:sp>
+        <p:nvSpPr>
+          <p:cNvPr id="9" name="Text 5"/>
+          <p:cNvSpPr txBox="1"/>
+          <p:nvPr/>
+        </p:nvSpPr>
+        <p:spPr>
+          <a:xfrm>
+            <a:off x="7909560" y="2633472"/>
+            <a:ext cx="3504895" cy="274320"/>
+          </a:xfrm>
+          <a:prstGeom prst="rect">
+            <a:avLst/>
+          </a:prstGeom>
+          <a:noFill/>
+          <a:ln/>
+        </p:spPr>
+        <p:txBody>
+          <a:bodyPr wrap="square" lIns="0" tIns="0" rIns="0" bIns="0" rtlCol="0" anchor="t"/>
+          <a:lstStyle/>
+          <a:p>
+            <a:pPr indent="0" marL="0">
+              <a:buNone/>
+            </a:pPr>
+            <a:r>
+              <a:rPr lang="en-US" sz="1100" dirty="0">
+                <a:solidFill>
+                  <a:srgbClr val="E6E9EE"/>
+                </a:solidFill>
+                <a:latin typeface="Yu Gothic" pitchFamily="34" charset="0"/>
+                <a:ea typeface="Yu Gothic" pitchFamily="34" charset="-122"/>
+                <a:cs typeface="Yu Gothic" pitchFamily="34" charset="-120"/>
+              </a:rPr>
+              <a:t>初年度 209,500円　2年目以降 平均 185,650円</a:t>
+            </a:r>
+            <a:endParaRPr lang="en-US" sz="1100" dirty="0"/>
+          </a:p>
+        </p:txBody>
+      </p:sp>
+      <p:sp>
+        <p:nvSpPr>
+          <p:cNvPr id="10" name="Text 6"/>
+          <p:cNvSpPr txBox="1"/>
+          <p:nvPr/>
+        </p:nvSpPr>
+        <p:spPr>
+          <a:xfrm>
+            <a:off x="7909560" y="2907792"/>
+            <a:ext cx="3504895" cy="274320"/>
+          </a:xfrm>
+          <a:prstGeom prst="rect">
+            <a:avLst/>
+          </a:prstGeom>
+          <a:noFill/>
+          <a:ln/>
+        </p:spPr>
+        <p:txBody>
+          <a:bodyPr wrap="square" lIns="0" tIns="0" rIns="0" bIns="0" rtlCol="0" anchor="t"/>
+          <a:lstStyle/>
+          <a:p>
+            <a:pPr indent="0" marL="0">
+              <a:buNone/>
+            </a:pPr>
+            <a:r>
+              <a:rPr lang="en-US" sz="1100" dirty="0">
+                <a:solidFill>
+                  <a:srgbClr val="E6E9EE"/>
+                </a:solidFill>
+                <a:latin typeface="Yu Gothic" pitchFamily="34" charset="0"/>
+                <a:ea typeface="Yu Gothic" pitchFamily="34" charset="-122"/>
+                <a:cs typeface="Yu Gothic" pitchFamily="34" charset="-120"/>
+              </a:rPr>
+              <a:t>所得税から 145.6万円／住民税から 98.1万円</a:t>
+            </a:r>
+            <a:endParaRPr lang="en-US" sz="1100" dirty="0"/>
+          </a:p>
+        </p:txBody>
+      </p:sp>
+      <p:sp>
+        <p:nvSpPr>
+          <p:cNvPr id="11" name="Text 7"/>
+          <p:cNvSpPr txBox="1"/>
+          <p:nvPr/>
+        </p:nvSpPr>
+        <p:spPr>
+          <a:xfrm>
+            <a:off x="7909560" y="3182112"/>
+            <a:ext cx="3504895" cy="274320"/>
+          </a:xfrm>
+          <a:prstGeom prst="rect">
+            <a:avLst/>
+          </a:prstGeom>
+          <a:noFill/>
+          <a:ln/>
+        </p:spPr>
+        <p:txBody>
+          <a:bodyPr wrap="square" lIns="0" tIns="0" rIns="0" bIns="0" rtlCol="0" anchor="t"/>
+          <a:lstStyle/>
+          <a:p>
+            <a:pPr indent="0" marL="0">
+              <a:buNone/>
+            </a:pPr>
+            <a:r>
+              <a:rPr lang="en-US" sz="1100" dirty="0">
+                <a:solidFill>
+                  <a:srgbClr val="E9DFCB"/>
+                </a:solidFill>
+                <a:latin typeface="Yu Gothic" pitchFamily="34" charset="0"/>
+                <a:ea typeface="Yu Gothic" pitchFamily="34" charset="-122"/>
+                <a:cs typeface="Yu Gothic" pitchFamily="34" charset="-120"/>
+              </a:rPr>
+              <a:t>上限 245.5万円・控除しきれない 1.7万円</a:t>
+            </a:r>
+            <a:endParaRPr lang="en-US" sz="1100" dirty="0"/>
+          </a:p>
+        </p:txBody>
+      </p:sp>
+      <p:sp>
+        <p:nvSpPr>
+          <p:cNvPr id="12" name="Shape 8"/>
+          <p:cNvSpPr/>
+          <p:nvPr/>
+        </p:nvSpPr>
+        <p:spPr>
+          <a:xfrm>
+            <a:off x="7680960" y="3657600"/>
+            <a:ext cx="3962095" cy="2103120"/>
+          </a:xfrm>
+          <a:prstGeom prst="roundRect">
+            <a:avLst>
+              <a:gd name="adj" fmla="val 3478"/>
+            </a:avLst>
+          </a:prstGeom>
+          <a:solidFill>
+            <a:srgbClr val="F2F3F5"/>
+          </a:solidFill>
+          <a:ln w="12700">
+            <a:solidFill>
+              <a:srgbClr val="F2F3F5"/>
+            </a:solidFill>
+            <a:prstDash val="solid"/>
+          </a:ln>
+        </p:spPr>
+      </p:sp>
+      <p:sp>
+        <p:nvSpPr>
+          <p:cNvPr id="13" name="Text 9"/>
+          <p:cNvSpPr txBox="1"/>
+          <p:nvPr/>
+        </p:nvSpPr>
+        <p:spPr>
+          <a:xfrm>
+            <a:off x="7909560" y="3749040"/>
+            <a:ext cx="3504895" cy="320040"/>
+          </a:xfrm>
+          <a:prstGeom prst="rect">
+            <a:avLst/>
+          </a:prstGeom>
+          <a:noFill/>
+          <a:ln/>
+        </p:spPr>
+        <p:txBody>
+          <a:bodyPr wrap="square" lIns="0" tIns="0" rIns="0" bIns="0" rtlCol="0" anchor="t"/>
+          <a:lstStyle/>
+          <a:p>
+            <a:pPr indent="0" marL="0">
+              <a:buNone/>
+            </a:pPr>
+            <a:r>
+              <a:rPr lang="en-US" sz="1400" b="1" dirty="0">
+                <a:solidFill>
+                  <a:srgbClr val="1C2B45"/>
+                </a:solidFill>
+                <a:latin typeface="Yu Gothic" pitchFamily="34" charset="0"/>
+                <a:ea typeface="Yu Gothic" pitchFamily="34" charset="-122"/>
+                <a:cs typeface="Yu Gothic" pitchFamily="34" charset="-120"/>
+              </a:rPr>
+              <a:t>返済額は変わらない</a:t>
+            </a:r>
+            <a:endParaRPr lang="en-US" sz="1400" dirty="0"/>
+          </a:p>
+        </p:txBody>
+      </p:sp>
+      <p:sp>
+        <p:nvSpPr>
+          <p:cNvPr id="14" name="Text 10"/>
+          <p:cNvSpPr txBox="1"/>
+          <p:nvPr/>
+        </p:nvSpPr>
+        <p:spPr>
+          <a:xfrm>
+            <a:off x="7909560" y="4114800"/>
+            <a:ext cx="2514600" cy="365760"/>
+          </a:xfrm>
+          <a:prstGeom prst="rect">
+            <a:avLst/>
+          </a:prstGeom>
+          <a:noFill/>
+          <a:ln/>
+        </p:spPr>
+        <p:txBody>
+          <a:bodyPr wrap="square" lIns="0" tIns="0" rIns="0" bIns="0" rtlCol="0" anchor="ctr"/>
+          <a:lstStyle/>
+          <a:p>
+            <a:pPr indent="0" marL="0">
+              <a:buNone/>
+            </a:pPr>
+            <a:r>
+              <a:rPr lang="en-US" sz="1100" dirty="0">
+                <a:solidFill>
+                  <a:srgbClr val="6B7280"/>
+                </a:solidFill>
+                <a:latin typeface="Yu Gothic" pitchFamily="34" charset="0"/>
+                <a:ea typeface="Yu Gothic" pitchFamily="34" charset="-122"/>
+                <a:cs typeface="Yu Gothic" pitchFamily="34" charset="-120"/>
+              </a:rPr>
+              <a:t>毎月のローン返済（変わらない）</a:t>
+            </a:r>
+            <a:endParaRPr lang="en-US" sz="1100" dirty="0"/>
+          </a:p>
+        </p:txBody>
+      </p:sp>
+      <p:sp>
+        <p:nvSpPr>
+          <p:cNvPr id="15" name="Text 11"/>
+          <p:cNvSpPr txBox="1"/>
+          <p:nvPr/>
+        </p:nvSpPr>
+        <p:spPr>
+          <a:xfrm>
+            <a:off x="10332720" y="4114800"/>
+            <a:ext cx="1127455" cy="365760"/>
+          </a:xfrm>
+          <a:prstGeom prst="rect">
+            <a:avLst/>
+          </a:prstGeom>
+          <a:noFill/>
+          <a:ln/>
+        </p:spPr>
+        <p:txBody>
+          <a:bodyPr wrap="square" lIns="0" tIns="0" rIns="0" bIns="0" rtlCol="0" anchor="ctr"/>
+          <a:lstStyle/>
+          <a:p>
+            <a:pPr algn="r" indent="0" marL="0">
+              <a:buNone/>
+            </a:pPr>
+            <a:r>
+              <a:rPr lang="en-US" sz="1200" b="1" dirty="0">
+                <a:solidFill>
+                  <a:srgbClr val="1C2B45"/>
+                </a:solidFill>
+                <a:latin typeface="Yu Gothic" pitchFamily="34" charset="0"/>
+                <a:ea typeface="Yu Gothic" pitchFamily="34" charset="-122"/>
+                <a:cs typeface="Yu Gothic" pitchFamily="34" charset="-120"/>
+              </a:rPr>
+              <a:t>97,979円</a:t>
+            </a:r>
+            <a:endParaRPr lang="en-US" sz="1200" dirty="0"/>
+          </a:p>
+        </p:txBody>
+      </p:sp>
+      <p:sp>
+        <p:nvSpPr>
+          <p:cNvPr id="16" name="Text 12"/>
+          <p:cNvSpPr txBox="1"/>
+          <p:nvPr/>
+        </p:nvSpPr>
+        <p:spPr>
+          <a:xfrm>
+            <a:off x="7909560" y="4507992"/>
+            <a:ext cx="2514600" cy="365760"/>
+          </a:xfrm>
+          <a:prstGeom prst="rect">
+            <a:avLst/>
+          </a:prstGeom>
+          <a:noFill/>
+          <a:ln/>
+        </p:spPr>
+        <p:txBody>
+          <a:bodyPr wrap="square" lIns="0" tIns="0" rIns="0" bIns="0" rtlCol="0" anchor="ctr"/>
+          <a:lstStyle/>
+          <a:p>
+            <a:pPr indent="0" marL="0">
+              <a:buNone/>
+            </a:pPr>
+            <a:r>
+              <a:rPr lang="en-US" sz="1100" dirty="0">
+                <a:solidFill>
+                  <a:srgbClr val="6B7280"/>
+                </a:solidFill>
+                <a:latin typeface="Yu Gothic" pitchFamily="34" charset="0"/>
+                <a:ea typeface="Yu Gothic" pitchFamily="34" charset="-122"/>
+                <a:cs typeface="Yu Gothic" pitchFamily="34" charset="-120"/>
+              </a:rPr>
+              <a:t>住居費（返済＋税・保険・修繕）</a:t>
+            </a:r>
+            <a:endParaRPr lang="en-US" sz="1100" dirty="0"/>
+          </a:p>
+        </p:txBody>
+      </p:sp>
+      <p:sp>
+        <p:nvSpPr>
+          <p:cNvPr id="17" name="Text 13"/>
+          <p:cNvSpPr txBox="1"/>
+          <p:nvPr/>
+        </p:nvSpPr>
+        <p:spPr>
+          <a:xfrm>
+            <a:off x="10332720" y="4507992"/>
+            <a:ext cx="1127455" cy="365760"/>
+          </a:xfrm>
+          <a:prstGeom prst="rect">
+            <a:avLst/>
+          </a:prstGeom>
+          <a:noFill/>
+          <a:ln/>
+        </p:spPr>
+        <p:txBody>
+          <a:bodyPr wrap="square" lIns="0" tIns="0" rIns="0" bIns="0" rtlCol="0" anchor="ctr"/>
+          <a:lstStyle/>
+          <a:p>
+            <a:pPr algn="r" indent="0" marL="0">
+              <a:buNone/>
+            </a:pPr>
+            <a:r>
+              <a:rPr lang="en-US" sz="1200" b="1" dirty="0">
+                <a:solidFill>
+                  <a:srgbClr val="1C2B45"/>
+                </a:solidFill>
+                <a:latin typeface="Yu Gothic" pitchFamily="34" charset="0"/>
+                <a:ea typeface="Yu Gothic" pitchFamily="34" charset="-122"/>
+                <a:cs typeface="Yu Gothic" pitchFamily="34" charset="-120"/>
+              </a:rPr>
+              <a:t>月12.5万円</a:t>
+            </a:r>
+            <a:endParaRPr lang="en-US" sz="1200" dirty="0"/>
+          </a:p>
+        </p:txBody>
+      </p:sp>
+      <p:sp>
+        <p:nvSpPr>
+          <p:cNvPr id="18" name="Text 14"/>
+          <p:cNvSpPr txBox="1"/>
+          <p:nvPr/>
+        </p:nvSpPr>
+        <p:spPr>
+          <a:xfrm>
+            <a:off x="7909560" y="4901184"/>
+            <a:ext cx="2514600" cy="365760"/>
+          </a:xfrm>
+          <a:prstGeom prst="rect">
+            <a:avLst/>
+          </a:prstGeom>
+          <a:noFill/>
+          <a:ln/>
+        </p:spPr>
+        <p:txBody>
+          <a:bodyPr wrap="square" lIns="0" tIns="0" rIns="0" bIns="0" rtlCol="0" anchor="ctr"/>
+          <a:lstStyle/>
+          <a:p>
+            <a:pPr indent="0" marL="0">
+              <a:buNone/>
+            </a:pPr>
+            <a:r>
+              <a:rPr lang="en-US" sz="1100" dirty="0">
+                <a:solidFill>
+                  <a:srgbClr val="6B7280"/>
+                </a:solidFill>
+                <a:latin typeface="Yu Gothic" pitchFamily="34" charset="0"/>
+                <a:ea typeface="Yu Gothic" pitchFamily="34" charset="-122"/>
+                <a:cs typeface="Yu Gothic" pitchFamily="34" charset="-120"/>
+              </a:rPr>
+              <a:t>控除を月割りにした参考値</a:t>
+            </a:r>
+            <a:endParaRPr lang="en-US" sz="1100" dirty="0"/>
+          </a:p>
+        </p:txBody>
+      </p:sp>
+      <p:sp>
+        <p:nvSpPr>
+          <p:cNvPr id="19" name="Text 15"/>
+          <p:cNvSpPr txBox="1"/>
+          <p:nvPr/>
+        </p:nvSpPr>
+        <p:spPr>
+          <a:xfrm>
+            <a:off x="10332720" y="4901184"/>
+            <a:ext cx="1127455" cy="365760"/>
+          </a:xfrm>
+          <a:prstGeom prst="rect">
+            <a:avLst/>
+          </a:prstGeom>
+          <a:noFill/>
+          <a:ln/>
+        </p:spPr>
+        <p:txBody>
+          <a:bodyPr wrap="square" lIns="0" tIns="0" rIns="0" bIns="0" rtlCol="0" anchor="ctr"/>
+          <a:lstStyle/>
+          <a:p>
+            <a:pPr algn="r" indent="0" marL="0">
+              <a:buNone/>
+            </a:pPr>
+            <a:r>
+              <a:rPr lang="en-US" sz="1200" b="1" dirty="0">
+                <a:solidFill>
+                  <a:srgbClr val="1C2B45"/>
+                </a:solidFill>
+                <a:latin typeface="Yu Gothic" pitchFamily="34" charset="0"/>
+                <a:ea typeface="Yu Gothic" pitchFamily="34" charset="-122"/>
+                <a:cs typeface="Yu Gothic" pitchFamily="34" charset="-120"/>
+              </a:rPr>
+              <a:t>約1.6万円/月</a:t>
+            </a:r>
+            <a:endParaRPr lang="en-US" sz="1200" dirty="0"/>
+          </a:p>
+        </p:txBody>
+      </p:sp>
+      <p:sp>
+        <p:nvSpPr>
+          <p:cNvPr id="20" name="Text 16"/>
+          <p:cNvSpPr txBox="1"/>
+          <p:nvPr/>
+        </p:nvSpPr>
+        <p:spPr>
+          <a:xfrm>
+            <a:off x="7909560" y="5294376"/>
+            <a:ext cx="2514600" cy="365760"/>
+          </a:xfrm>
+          <a:prstGeom prst="rect">
+            <a:avLst/>
+          </a:prstGeom>
+          <a:noFill/>
+          <a:ln/>
+        </p:spPr>
+        <p:txBody>
+          <a:bodyPr wrap="square" lIns="0" tIns="0" rIns="0" bIns="0" rtlCol="0" anchor="ctr"/>
+          <a:lstStyle/>
+          <a:p>
+            <a:pPr indent="0" marL="0">
+              <a:buNone/>
+            </a:pPr>
+            <a:r>
+              <a:rPr lang="en-US" sz="1100" dirty="0">
+                <a:solidFill>
+                  <a:srgbClr val="6B7280"/>
+                </a:solidFill>
+                <a:latin typeface="Yu Gothic" pitchFamily="34" charset="0"/>
+                <a:ea typeface="Yu Gothic" pitchFamily="34" charset="-122"/>
+                <a:cs typeface="Yu Gothic" pitchFamily="34" charset="-120"/>
+              </a:rPr>
+              <a:t>14年目以降の住居費（控除なし）</a:t>
+            </a:r>
+            <a:endParaRPr lang="en-US" sz="1100" dirty="0"/>
+          </a:p>
+        </p:txBody>
+      </p:sp>
+      <p:sp>
+        <p:nvSpPr>
+          <p:cNvPr id="21" name="Text 17"/>
+          <p:cNvSpPr txBox="1"/>
+          <p:nvPr/>
+        </p:nvSpPr>
+        <p:spPr>
+          <a:xfrm>
+            <a:off x="10332720" y="5294376"/>
+            <a:ext cx="1127455" cy="365760"/>
+          </a:xfrm>
+          <a:prstGeom prst="rect">
+            <a:avLst/>
+          </a:prstGeom>
+          <a:noFill/>
+          <a:ln/>
+        </p:spPr>
+        <p:txBody>
+          <a:bodyPr wrap="square" lIns="0" tIns="0" rIns="0" bIns="0" rtlCol="0" anchor="ctr"/>
+          <a:lstStyle/>
+          <a:p>
+            <a:pPr algn="r" indent="0" marL="0">
+              <a:buNone/>
+            </a:pPr>
+            <a:r>
+              <a:rPr lang="en-US" sz="1200" b="1" dirty="0">
+                <a:solidFill>
+                  <a:srgbClr val="1C2B45"/>
+                </a:solidFill>
+                <a:latin typeface="Yu Gothic" pitchFamily="34" charset="0"/>
+                <a:ea typeface="Yu Gothic" pitchFamily="34" charset="-122"/>
+                <a:cs typeface="Yu Gothic" pitchFamily="34" charset="-120"/>
+              </a:rPr>
+              <a:t>月12.5万円</a:t>
+            </a:r>
+            <a:endParaRPr lang="en-US" sz="1200" dirty="0"/>
+          </a:p>
+        </p:txBody>
+      </p:sp>
+      <p:sp>
+        <p:nvSpPr>
+          <p:cNvPr id="22" name="Text 18"/>
+          <p:cNvSpPr txBox="1"/>
+          <p:nvPr/>
+        </p:nvSpPr>
+        <p:spPr>
+          <a:xfrm>
+            <a:off x="548640" y="5870448"/>
+            <a:ext cx="11094415" cy="457200"/>
+          </a:xfrm>
+          <a:prstGeom prst="rect">
+            <a:avLst/>
+          </a:prstGeom>
+          <a:noFill/>
+          <a:ln/>
+        </p:spPr>
+        <p:txBody>
+          <a:bodyPr wrap="square" lIns="0" tIns="0" rIns="0" bIns="0" rtlCol="0" anchor="b"/>
+          <a:lstStyle/>
+          <a:p>
+            <a:pPr indent="0" marL="0">
+              <a:buNone/>
+            </a:pPr>
+            <a:r>
+              <a:rPr lang="en-US" sz="1000" dirty="0">
+                <a:solidFill>
+                  <a:srgbClr val="6B7280"/>
+                </a:solidFill>
+                <a:latin typeface="Yu Gothic" pitchFamily="34" charset="0"/>
+                <a:ea typeface="Yu Gothic" pitchFamily="34" charset="-122"/>
+                <a:cs typeface="Yu Gothic" pitchFamily="34" charset="-120"/>
+              </a:rPr>
+              <a:t>※ 制度の基準日：2026年10月時点（令和8年度税制改正後・2026〜2030年入居）。年収550万円・単身・給与所得のみ、社会保険料は年収の15%と仮定した概算（所得税112,000円・課税総所得209.5万円）。2028年以降も令和8・9年分の基礎控除等の特例が続くと仮定（税額を低めに見積もる保守的な前提）。住民税からの控除は所得税の課税総所得金額等×5%（最高97,500円）。確定額ではありません。</a:t>
+            </a:r>
+            <a:endParaRPr lang="en-US" sz="1000" dirty="0"/>
+          </a:p>
+        </p:txBody>
+      </p:sp>
+      <p:sp>
+        <p:nvSpPr>
+          <p:cNvPr id="25" name="Slide Number Placeholder 0"/>
+          <p:cNvSpPr>
+            <a:spLocks noGrp="1"/>
+          </p:cNvSpPr>
+          <p:nvPr>
+            <p:ph type="sldNum" sz="quarter" idx="4294967295"/>
+          </p:nvPr>
+        </p:nvSpPr>
+        <p:spPr>
+          <a:xfrm>
+            <a:off x="11183112" y="6419088"/>
+            <a:ext cx="457200" cy="274320"/>
+          </a:xfrm>
+          <a:prstGeom prst="rect">
+            <a:avLst/>
+          </a:prstGeom>
+          <a:extLst>
+            <a:ext uri="{C572A759-6A51-4108-AA02-DFA0A04FC94B}">
+              <ma14:wrappingTextBoxFlag xmlns:ma14="http://schemas.microsoft.com/office/mac/drawingml/2011/main" val="0"/>
+            </a:ext>
+          </a:extLst>
+        </p:spPr>
+        <p:txBody>
+          <a:bodyPr/>
+          <a:lstStyle>
+            <a:lvl1pPr>
+              <a:defRPr sz="900">
+                <a:solidFill>
+                  <a:srgbClr val="6B7280"/>
+                </a:solidFill>
+                <a:latin typeface="Yu Gothic"/>
+                <a:ea typeface="Yu Gothic"/>
+                <a:cs typeface="Yu Gothic"/>
+              </a:defRPr>
+            </a:lvl1pPr>
+          </a:lstStyle>
+          <a:p>
+            <a:pPr algn="r"/>
+            <a:fld id="{F7021451-1387-4CA6-816F-3879F97B5CBC}" type="slidenum">
+              <a:rPr b="0" lang="en-US"/>
+              <a:t>20</a:t>
+            </a:fld>
+            <a:endParaRPr lang="en-US"/>
+          </a:p>
+        </p:txBody>
+      </p:sp>
+    </p:spTree>
+  </p:cSld>
+  <p:clrMapOvr>
+    <a:masterClrMapping/>
+  </p:clrMapOvr>
+</p:sld>
+</file>
+
+<file path=ppt/slides/slide21.xml><?xml version="1.0" encoding="utf-8"?>
+<p:sld xmlns:a="http://schemas.openxmlformats.org/drawingml/2006/main" xmlns:r="http://schemas.openxmlformats.org/officeDocument/2006/relationships" xmlns:p="http://schemas.openxmlformats.org/presentationml/2006/main">
+  <p:cSld name="Slide 21">
+    <p:spTree>
+      <p:nvGrpSpPr>
+        <p:cNvPr id="1" name=""/>
+        <p:cNvGrpSpPr/>
+        <p:nvPr/>
+      </p:nvGrpSpPr>
+      <p:grpSpPr>
+        <a:xfrm>
+          <a:off x="0" y="0"/>
+          <a:ext cx="0" cy="0"/>
+          <a:chOff x="0" y="0"/>
+          <a:chExt cx="0" cy="0"/>
+        </a:xfrm>
+      </p:grpSpPr>
+      <p:sp>
+        <p:nvSpPr>
+          <p:cNvPr id="2" name="Text 2"/>
+          <p:cNvSpPr/>
+          <p:nvPr>
+            <p:ph idx="102" type="body" hasCustomPrompt="1"/>
+          </p:nvPr>
+        </p:nvSpPr>
+        <p:spPr>
+          <a:xfrm>
+            <a:off x="548640" y="365760"/>
+            <a:ext cx="11094415" cy="310896"/>
+          </a:xfrm>
+          <a:prstGeom prst="rect">
+            <a:avLst/>
+          </a:prstGeom>
+          <a:noFill/>
+          <a:ln/>
+        </p:spPr>
+        <p:txBody>
+          <a:bodyPr wrap="square" lIns="0" tIns="0" rIns="0" bIns="0" rtlCol="0" anchor="ctr"/>
+          <a:lstStyle/>
+          <a:p>
+            <a:pPr algn="l" indent="0" marL="0">
+              <a:buNone/>
+            </a:pPr>
+            <a:r>
+              <a:rPr lang="en-US" sz="1200" b="1" dirty="0">
+                <a:solidFill>
+                  <a:srgbClr val="A8854A"/>
+                </a:solidFill>
+                <a:latin typeface="Yu Gothic" pitchFamily="34" charset="0"/>
+                <a:ea typeface="Yu Gothic" pitchFamily="34" charset="-122"/>
+                <a:cs typeface="Yu Gothic" pitchFamily="34" charset="-120"/>
+              </a:rPr>
+              <a:t>P21｜住宅ローン控除を含めた新築・中古の購入比較</a:t>
+            </a:r>
+            <a:endParaRPr lang="en-US" sz="1200" dirty="0"/>
+          </a:p>
+        </p:txBody>
+      </p:sp>
+      <p:sp>
+        <p:nvSpPr>
+          <p:cNvPr id="3" name="Text 2"/>
+          <p:cNvSpPr/>
+          <p:nvPr>
+            <p:ph idx="103" type="title" hasCustomPrompt="1"/>
+          </p:nvPr>
+        </p:nvSpPr>
+        <p:spPr>
+          <a:xfrm>
+            <a:off x="548640" y="694944"/>
+            <a:ext cx="11094415" cy="731520"/>
+          </a:xfrm>
+          <a:prstGeom prst="rect">
+            <a:avLst/>
+          </a:prstGeom>
+          <a:noFill/>
+          <a:ln/>
+        </p:spPr>
+        <p:txBody>
+          <a:bodyPr wrap="square" lIns="0" tIns="0" rIns="0" bIns="0" rtlCol="0" anchor="ctr"/>
+          <a:lstStyle/>
+          <a:p>
+            <a:pPr algn="l" indent="0" marL="0">
+              <a:buNone/>
+            </a:pPr>
+            <a:r>
+              <a:rPr lang="en-US" sz="2600" b="1" dirty="0">
+                <a:solidFill>
+                  <a:srgbClr val="1C2B45"/>
+                </a:solidFill>
+                <a:latin typeface="Yu Mincho" pitchFamily="34" charset="0"/>
+                <a:ea typeface="Yu Mincho" pitchFamily="34" charset="-122"/>
+                <a:cs typeface="Yu Mincho" pitchFamily="34" charset="-120"/>
+              </a:rPr>
+              <a:t>控除は判断材料のひとつ。10年間の支出と、手元に残る価値で比べる</a:t>
+            </a:r>
+            <a:endParaRPr lang="en-US" sz="2600" dirty="0"/>
+          </a:p>
+        </p:txBody>
+      </p:sp>
+      <p:sp>
+        <p:nvSpPr>
+          <p:cNvPr id="5" name="Shape 2"/>
+          <p:cNvSpPr/>
+          <p:nvPr/>
+        </p:nvSpPr>
+        <p:spPr>
+          <a:xfrm>
+            <a:off x="548640" y="1645920"/>
+            <a:ext cx="5410048" cy="4160520"/>
+          </a:xfrm>
+          <a:prstGeom prst="roundRect">
+            <a:avLst>
+              <a:gd name="adj" fmla="val 1758"/>
+            </a:avLst>
+          </a:prstGeom>
+          <a:solidFill>
+            <a:srgbClr val="F2F3F5"/>
+          </a:solidFill>
+          <a:ln w="12700">
+            <a:solidFill>
+              <a:srgbClr val="F2F3F5"/>
+            </a:solidFill>
+            <a:prstDash val="solid"/>
+          </a:ln>
+        </p:spPr>
+      </p:sp>
+      <p:sp>
+        <p:nvSpPr>
+          <p:cNvPr id="6" name="Text 3"/>
+          <p:cNvSpPr txBox="1"/>
+          <p:nvPr/>
+        </p:nvSpPr>
+        <p:spPr>
+          <a:xfrm>
+            <a:off x="777240" y="1719072"/>
+            <a:ext cx="4952848" cy="347472"/>
+          </a:xfrm>
+          <a:prstGeom prst="rect">
+            <a:avLst/>
+          </a:prstGeom>
+          <a:noFill/>
+          <a:ln/>
+        </p:spPr>
+        <p:txBody>
+          <a:bodyPr wrap="square" lIns="0" tIns="0" rIns="0" bIns="0" rtlCol="0" anchor="ctr"/>
+          <a:lstStyle/>
+          <a:p>
+            <a:pPr indent="0" marL="0">
+              <a:buNone/>
+            </a:pPr>
+            <a:r>
+              <a:rPr lang="en-US" sz="1500" b="1" dirty="0">
+                <a:solidFill>
+                  <a:srgbClr val="1C2B45"/>
+                </a:solidFill>
+                <a:latin typeface="Yu Gothic" pitchFamily="34" charset="0"/>
+                <a:ea typeface="Yu Gothic" pitchFamily="34" charset="-122"/>
+                <a:cs typeface="Yu Gothic" pitchFamily="34" charset="-120"/>
+              </a:rPr>
+              <a:t>新築（本件・ZEH水準と仮定）</a:t>
+            </a:r>
+            <a:endParaRPr lang="en-US" sz="1500" dirty="0"/>
+          </a:p>
+        </p:txBody>
+      </p:sp>
+      <p:sp>
+        <p:nvSpPr>
+          <p:cNvPr id="7" name="Text 4"/>
+          <p:cNvSpPr txBox="1"/>
+          <p:nvPr/>
+        </p:nvSpPr>
+        <p:spPr>
+          <a:xfrm>
+            <a:off x="777240" y="2121408"/>
+            <a:ext cx="2286000" cy="310896"/>
+          </a:xfrm>
+          <a:prstGeom prst="rect">
+            <a:avLst/>
+          </a:prstGeom>
+          <a:noFill/>
+          <a:ln/>
+        </p:spPr>
+        <p:txBody>
+          <a:bodyPr wrap="square" lIns="0" tIns="0" rIns="0" bIns="0" rtlCol="0" anchor="ctr"/>
+          <a:lstStyle/>
+          <a:p>
+            <a:pPr indent="0" marL="0">
+              <a:buNone/>
+            </a:pPr>
+            <a:r>
+              <a:rPr lang="en-US" sz="1100" dirty="0">
+                <a:solidFill>
+                  <a:srgbClr val="6B7280"/>
+                </a:solidFill>
+                <a:latin typeface="Yu Gothic" pitchFamily="34" charset="0"/>
+                <a:ea typeface="Yu Gothic" pitchFamily="34" charset="-122"/>
+                <a:cs typeface="Yu Gothic" pitchFamily="34" charset="-120"/>
+              </a:rPr>
+              <a:t>物件価格／購入諸費用</a:t>
+            </a:r>
+            <a:endParaRPr lang="en-US" sz="1100" dirty="0"/>
+          </a:p>
+        </p:txBody>
+      </p:sp>
+      <p:sp>
+        <p:nvSpPr>
+          <p:cNvPr id="8" name="Text 5"/>
+          <p:cNvSpPr txBox="1"/>
+          <p:nvPr/>
+        </p:nvSpPr>
+        <p:spPr>
+          <a:xfrm>
+            <a:off x="2926080" y="2121408"/>
+            <a:ext cx="2804008" cy="310896"/>
+          </a:xfrm>
+          <a:prstGeom prst="rect">
+            <a:avLst/>
+          </a:prstGeom>
+          <a:noFill/>
+          <a:ln/>
+        </p:spPr>
+        <p:txBody>
+          <a:bodyPr wrap="square" lIns="0" tIns="0" rIns="0" bIns="0" rtlCol="0" anchor="ctr"/>
+          <a:lstStyle/>
+          <a:p>
+            <a:pPr algn="r" indent="0" marL="0">
+              <a:buNone/>
+            </a:pPr>
+            <a:r>
+              <a:rPr lang="en-US" sz="1300" b="1" dirty="0">
+                <a:solidFill>
+                  <a:srgbClr val="1C2B45"/>
+                </a:solidFill>
+                <a:latin typeface="Yu Gothic" pitchFamily="34" charset="0"/>
+                <a:ea typeface="Yu Gothic" pitchFamily="34" charset="-122"/>
+                <a:cs typeface="Yu Gothic" pitchFamily="34" charset="-120"/>
+              </a:rPr>
+              <a:t>3,500万円／245.0万円</a:t>
+            </a:r>
+            <a:endParaRPr lang="en-US" sz="1300" dirty="0"/>
+          </a:p>
+        </p:txBody>
+      </p:sp>
+      <p:sp>
+        <p:nvSpPr>
+          <p:cNvPr id="9" name="Text 6"/>
+          <p:cNvSpPr txBox="1"/>
+          <p:nvPr/>
+        </p:nvSpPr>
+        <p:spPr>
+          <a:xfrm>
+            <a:off x="777240" y="2450592"/>
+            <a:ext cx="2286000" cy="310896"/>
+          </a:xfrm>
+          <a:prstGeom prst="rect">
+            <a:avLst/>
+          </a:prstGeom>
+          <a:noFill/>
+          <a:ln/>
+        </p:spPr>
+        <p:txBody>
+          <a:bodyPr wrap="square" lIns="0" tIns="0" rIns="0" bIns="0" rtlCol="0" anchor="ctr"/>
+          <a:lstStyle/>
+          <a:p>
+            <a:pPr indent="0" marL="0">
+              <a:buNone/>
+            </a:pPr>
+            <a:r>
+              <a:rPr lang="en-US" sz="1100" dirty="0">
+                <a:solidFill>
+                  <a:srgbClr val="6B7280"/>
+                </a:solidFill>
+                <a:latin typeface="Yu Gothic" pitchFamily="34" charset="0"/>
+                <a:ea typeface="Yu Gothic" pitchFamily="34" charset="-122"/>
+                <a:cs typeface="Yu Gothic" pitchFamily="34" charset="-120"/>
+              </a:rPr>
+              <a:t>借入額／毎月の返済</a:t>
+            </a:r>
+            <a:endParaRPr lang="en-US" sz="1100" dirty="0"/>
+          </a:p>
+        </p:txBody>
+      </p:sp>
+      <p:sp>
+        <p:nvSpPr>
+          <p:cNvPr id="10" name="Text 7"/>
+          <p:cNvSpPr txBox="1"/>
+          <p:nvPr/>
+        </p:nvSpPr>
+        <p:spPr>
+          <a:xfrm>
+            <a:off x="2926080" y="2450592"/>
+            <a:ext cx="2804008" cy="310896"/>
+          </a:xfrm>
+          <a:prstGeom prst="rect">
+            <a:avLst/>
+          </a:prstGeom>
+          <a:noFill/>
+          <a:ln/>
+        </p:spPr>
+        <p:txBody>
+          <a:bodyPr wrap="square" lIns="0" tIns="0" rIns="0" bIns="0" rtlCol="0" anchor="ctr"/>
+          <a:lstStyle/>
+          <a:p>
+            <a:pPr algn="r" indent="0" marL="0">
+              <a:buNone/>
+            </a:pPr>
+            <a:r>
+              <a:rPr lang="en-US" sz="1300" b="1" dirty="0">
+                <a:solidFill>
+                  <a:srgbClr val="1C2B45"/>
+                </a:solidFill>
+                <a:latin typeface="Yu Gothic" pitchFamily="34" charset="0"/>
+                <a:ea typeface="Yu Gothic" pitchFamily="34" charset="-122"/>
+                <a:cs typeface="Yu Gothic" pitchFamily="34" charset="-120"/>
+              </a:rPr>
+              <a:t>3,200万円／97,979円</a:t>
+            </a:r>
+            <a:endParaRPr lang="en-US" sz="1300" dirty="0"/>
+          </a:p>
+        </p:txBody>
+      </p:sp>
+      <p:sp>
+        <p:nvSpPr>
+          <p:cNvPr id="11" name="Text 8"/>
+          <p:cNvSpPr txBox="1"/>
+          <p:nvPr/>
+        </p:nvSpPr>
+        <p:spPr>
+          <a:xfrm>
+            <a:off x="777240" y="2779776"/>
+            <a:ext cx="2286000" cy="310896"/>
+          </a:xfrm>
+          <a:prstGeom prst="rect">
+            <a:avLst/>
+          </a:prstGeom>
+          <a:noFill/>
+          <a:ln/>
+        </p:spPr>
+        <p:txBody>
+          <a:bodyPr wrap="square" lIns="0" tIns="0" rIns="0" bIns="0" rtlCol="0" anchor="ctr"/>
+          <a:lstStyle/>
+          <a:p>
+            <a:pPr indent="0" marL="0">
+              <a:buNone/>
+            </a:pPr>
+            <a:r>
+              <a:rPr lang="en-US" sz="1100" dirty="0">
+                <a:solidFill>
+                  <a:srgbClr val="6B7280"/>
+                </a:solidFill>
+                <a:latin typeface="Yu Gothic" pitchFamily="34" charset="0"/>
+                <a:ea typeface="Yu Gothic" pitchFamily="34" charset="-122"/>
+                <a:cs typeface="Yu Gothic" pitchFamily="34" charset="-120"/>
+              </a:rPr>
+              <a:t>控除の枠（限度額・期間）</a:t>
+            </a:r>
+            <a:endParaRPr lang="en-US" sz="1100" dirty="0"/>
+          </a:p>
+        </p:txBody>
+      </p:sp>
+      <p:sp>
+        <p:nvSpPr>
+          <p:cNvPr id="12" name="Text 9"/>
+          <p:cNvSpPr txBox="1"/>
+          <p:nvPr/>
+        </p:nvSpPr>
+        <p:spPr>
+          <a:xfrm>
+            <a:off x="2926080" y="2779776"/>
+            <a:ext cx="2804008" cy="310896"/>
+          </a:xfrm>
+          <a:prstGeom prst="rect">
+            <a:avLst/>
+          </a:prstGeom>
+          <a:noFill/>
+          <a:ln/>
+        </p:spPr>
+        <p:txBody>
+          <a:bodyPr wrap="square" lIns="0" tIns="0" rIns="0" bIns="0" rtlCol="0" anchor="ctr"/>
+          <a:lstStyle/>
+          <a:p>
+            <a:pPr algn="r" indent="0" marL="0">
+              <a:buNone/>
+            </a:pPr>
+            <a:r>
+              <a:rPr lang="en-US" sz="1300" b="1" dirty="0">
+                <a:solidFill>
+                  <a:srgbClr val="1C2B45"/>
+                </a:solidFill>
+                <a:latin typeface="Yu Gothic" pitchFamily="34" charset="0"/>
+                <a:ea typeface="Yu Gothic" pitchFamily="34" charset="-122"/>
+                <a:cs typeface="Yu Gothic" pitchFamily="34" charset="-120"/>
+              </a:rPr>
+              <a:t>3,500万円・13年</a:t>
+            </a:r>
+            <a:endParaRPr lang="en-US" sz="1300" dirty="0"/>
+          </a:p>
+        </p:txBody>
+      </p:sp>
+      <p:sp>
+        <p:nvSpPr>
+          <p:cNvPr id="13" name="Text 10"/>
+          <p:cNvSpPr txBox="1"/>
+          <p:nvPr/>
+        </p:nvSpPr>
+        <p:spPr>
+          <a:xfrm>
+            <a:off x="777240" y="3108960"/>
+            <a:ext cx="2286000" cy="310896"/>
+          </a:xfrm>
+          <a:prstGeom prst="rect">
+            <a:avLst/>
+          </a:prstGeom>
+          <a:noFill/>
+          <a:ln/>
+        </p:spPr>
+        <p:txBody>
+          <a:bodyPr wrap="square" lIns="0" tIns="0" rIns="0" bIns="0" rtlCol="0" anchor="ctr"/>
+          <a:lstStyle/>
+          <a:p>
+            <a:pPr indent="0" marL="0">
+              <a:buNone/>
+            </a:pPr>
+            <a:r>
+              <a:rPr lang="en-US" sz="1100" dirty="0">
+                <a:solidFill>
+                  <a:srgbClr val="6B7280"/>
+                </a:solidFill>
+                <a:latin typeface="Yu Gothic" pitchFamily="34" charset="0"/>
+                <a:ea typeface="Yu Gothic" pitchFamily="34" charset="-122"/>
+                <a:cs typeface="Yu Gothic" pitchFamily="34" charset="-120"/>
+              </a:rPr>
+              <a:t>初年度／累計の控除見込み</a:t>
+            </a:r>
+            <a:endParaRPr lang="en-US" sz="1100" dirty="0"/>
+          </a:p>
+        </p:txBody>
+      </p:sp>
+      <p:sp>
+        <p:nvSpPr>
+          <p:cNvPr id="14" name="Text 11"/>
+          <p:cNvSpPr txBox="1"/>
+          <p:nvPr/>
+        </p:nvSpPr>
+        <p:spPr>
+          <a:xfrm>
+            <a:off x="2926080" y="3108960"/>
+            <a:ext cx="2804008" cy="310896"/>
+          </a:xfrm>
+          <a:prstGeom prst="rect">
+            <a:avLst/>
+          </a:prstGeom>
+          <a:noFill/>
+          <a:ln/>
+        </p:spPr>
+        <p:txBody>
+          <a:bodyPr wrap="square" lIns="0" tIns="0" rIns="0" bIns="0" rtlCol="0" anchor="ctr"/>
+          <a:lstStyle/>
+          <a:p>
+            <a:pPr algn="r" indent="0" marL="0">
+              <a:buNone/>
+            </a:pPr>
+            <a:r>
+              <a:rPr lang="en-US" sz="1300" b="1" dirty="0">
+                <a:solidFill>
+                  <a:srgbClr val="1C2B45"/>
+                </a:solidFill>
+                <a:latin typeface="Yu Gothic" pitchFamily="34" charset="0"/>
+                <a:ea typeface="Yu Gothic" pitchFamily="34" charset="-122"/>
+                <a:cs typeface="Yu Gothic" pitchFamily="34" charset="-120"/>
+              </a:rPr>
+              <a:t>209,500円／243.7万円</a:t>
+            </a:r>
+            <a:endParaRPr lang="en-US" sz="1300" dirty="0"/>
+          </a:p>
+        </p:txBody>
+      </p:sp>
+      <p:sp>
+        <p:nvSpPr>
+          <p:cNvPr id="15" name="Text 12"/>
+          <p:cNvSpPr txBox="1"/>
+          <p:nvPr/>
+        </p:nvSpPr>
+        <p:spPr>
+          <a:xfrm>
+            <a:off x="777240" y="3438144"/>
+            <a:ext cx="2286000" cy="310896"/>
+          </a:xfrm>
+          <a:prstGeom prst="rect">
+            <a:avLst/>
+          </a:prstGeom>
+          <a:noFill/>
+          <a:ln/>
+        </p:spPr>
+        <p:txBody>
+          <a:bodyPr wrap="square" lIns="0" tIns="0" rIns="0" bIns="0" rtlCol="0" anchor="ctr"/>
+          <a:lstStyle/>
+          <a:p>
+            <a:pPr indent="0" marL="0">
+              <a:buNone/>
+            </a:pPr>
+            <a:r>
+              <a:rPr lang="en-US" sz="1100" dirty="0">
+                <a:solidFill>
+                  <a:srgbClr val="6B7280"/>
+                </a:solidFill>
+                <a:latin typeface="Yu Gothic" pitchFamily="34" charset="0"/>
+                <a:ea typeface="Yu Gothic" pitchFamily="34" charset="-122"/>
+                <a:cs typeface="Yu Gothic" pitchFamily="34" charset="-120"/>
+              </a:rPr>
+              <a:t>固定資産税等／修繕積立</a:t>
+            </a:r>
+            <a:endParaRPr lang="en-US" sz="1100" dirty="0"/>
+          </a:p>
+        </p:txBody>
+      </p:sp>
+      <p:sp>
+        <p:nvSpPr>
+          <p:cNvPr id="16" name="Text 13"/>
+          <p:cNvSpPr txBox="1"/>
+          <p:nvPr/>
+        </p:nvSpPr>
+        <p:spPr>
+          <a:xfrm>
+            <a:off x="2926080" y="3438144"/>
+            <a:ext cx="2804008" cy="310896"/>
+          </a:xfrm>
+          <a:prstGeom prst="rect">
+            <a:avLst/>
+          </a:prstGeom>
+          <a:noFill/>
+          <a:ln/>
+        </p:spPr>
+        <p:txBody>
+          <a:bodyPr wrap="square" lIns="0" tIns="0" rIns="0" bIns="0" rtlCol="0" anchor="ctr"/>
+          <a:lstStyle/>
+          <a:p>
+            <a:pPr algn="r" indent="0" marL="0">
+              <a:buNone/>
+            </a:pPr>
+            <a:r>
+              <a:rPr lang="en-US" sz="1300" b="1" dirty="0">
+                <a:solidFill>
+                  <a:srgbClr val="1C2B45"/>
+                </a:solidFill>
+                <a:latin typeface="Yu Gothic" pitchFamily="34" charset="0"/>
+                <a:ea typeface="Yu Gothic" pitchFamily="34" charset="-122"/>
+                <a:cs typeface="Yu Gothic" pitchFamily="34" charset="-120"/>
+              </a:rPr>
+              <a:t>年12万円／月1.5万円</a:t>
+            </a:r>
+            <a:endParaRPr lang="en-US" sz="1300" dirty="0"/>
+          </a:p>
+        </p:txBody>
+      </p:sp>
+      <p:sp>
+        <p:nvSpPr>
+          <p:cNvPr id="17" name="Text 14"/>
+          <p:cNvSpPr txBox="1"/>
+          <p:nvPr/>
+        </p:nvSpPr>
+        <p:spPr>
+          <a:xfrm>
+            <a:off x="777240" y="3767328"/>
+            <a:ext cx="2286000" cy="310896"/>
+          </a:xfrm>
+          <a:prstGeom prst="rect">
+            <a:avLst/>
+          </a:prstGeom>
+          <a:noFill/>
+          <a:ln/>
+        </p:spPr>
+        <p:txBody>
+          <a:bodyPr wrap="square" lIns="0" tIns="0" rIns="0" bIns="0" rtlCol="0" anchor="ctr"/>
+          <a:lstStyle/>
+          <a:p>
+            <a:pPr indent="0" marL="0">
+              <a:buNone/>
+            </a:pPr>
+            <a:r>
+              <a:rPr lang="en-US" sz="1100" dirty="0">
+                <a:solidFill>
+                  <a:srgbClr val="6B7280"/>
+                </a:solidFill>
+                <a:latin typeface="Yu Gothic" pitchFamily="34" charset="0"/>
+                <a:ea typeface="Yu Gothic" pitchFamily="34" charset="-122"/>
+                <a:cs typeface="Yu Gothic" pitchFamily="34" charset="-120"/>
+              </a:rPr>
+              <a:t>年間住居費（控除前）</a:t>
+            </a:r>
+            <a:endParaRPr lang="en-US" sz="1100" dirty="0"/>
+          </a:p>
+        </p:txBody>
+      </p:sp>
+      <p:sp>
+        <p:nvSpPr>
+          <p:cNvPr id="18" name="Text 15"/>
+          <p:cNvSpPr txBox="1"/>
+          <p:nvPr/>
+        </p:nvSpPr>
+        <p:spPr>
+          <a:xfrm>
+            <a:off x="2926080" y="3767328"/>
+            <a:ext cx="2804008" cy="310896"/>
+          </a:xfrm>
+          <a:prstGeom prst="rect">
+            <a:avLst/>
+          </a:prstGeom>
+          <a:noFill/>
+          <a:ln/>
+        </p:spPr>
+        <p:txBody>
+          <a:bodyPr wrap="square" lIns="0" tIns="0" rIns="0" bIns="0" rtlCol="0" anchor="ctr"/>
+          <a:lstStyle/>
+          <a:p>
+            <a:pPr algn="r" indent="0" marL="0">
+              <a:buNone/>
+            </a:pPr>
+            <a:r>
+              <a:rPr lang="en-US" sz="1300" b="1" dirty="0">
+                <a:solidFill>
+                  <a:srgbClr val="1C2B45"/>
+                </a:solidFill>
+                <a:latin typeface="Yu Gothic" pitchFamily="34" charset="0"/>
+                <a:ea typeface="Yu Gothic" pitchFamily="34" charset="-122"/>
+                <a:cs typeface="Yu Gothic" pitchFamily="34" charset="-120"/>
+              </a:rPr>
+              <a:t>150.6万円</a:t>
+            </a:r>
+            <a:endParaRPr lang="en-US" sz="1300" dirty="0"/>
+          </a:p>
+        </p:txBody>
+      </p:sp>
+      <p:sp>
+        <p:nvSpPr>
+          <p:cNvPr id="19" name="Text 16"/>
+          <p:cNvSpPr txBox="1"/>
+          <p:nvPr/>
+        </p:nvSpPr>
+        <p:spPr>
+          <a:xfrm>
+            <a:off x="777240" y="4096512"/>
+            <a:ext cx="2286000" cy="310896"/>
+          </a:xfrm>
+          <a:prstGeom prst="rect">
+            <a:avLst/>
+          </a:prstGeom>
+          <a:noFill/>
+          <a:ln/>
+        </p:spPr>
+        <p:txBody>
+          <a:bodyPr wrap="square" lIns="0" tIns="0" rIns="0" bIns="0" rtlCol="0" anchor="ctr"/>
+          <a:lstStyle/>
+          <a:p>
+            <a:pPr indent="0" marL="0">
+              <a:buNone/>
+            </a:pPr>
+            <a:r>
+              <a:rPr lang="en-US" sz="1100" dirty="0">
+                <a:solidFill>
+                  <a:srgbClr val="6B7280"/>
+                </a:solidFill>
+                <a:latin typeface="Yu Gothic" pitchFamily="34" charset="0"/>
+                <a:ea typeface="Yu Gothic" pitchFamily="34" charset="-122"/>
+                <a:cs typeface="Yu Gothic" pitchFamily="34" charset="-120"/>
+              </a:rPr>
+              <a:t>10年後の残債／想定売却価格</a:t>
+            </a:r>
+            <a:endParaRPr lang="en-US" sz="1100" dirty="0"/>
+          </a:p>
+        </p:txBody>
+      </p:sp>
+      <p:sp>
+        <p:nvSpPr>
+          <p:cNvPr id="20" name="Text 17"/>
+          <p:cNvSpPr txBox="1"/>
+          <p:nvPr/>
+        </p:nvSpPr>
+        <p:spPr>
+          <a:xfrm>
+            <a:off x="2926080" y="4096512"/>
+            <a:ext cx="2804008" cy="310896"/>
+          </a:xfrm>
+          <a:prstGeom prst="rect">
+            <a:avLst/>
+          </a:prstGeom>
+          <a:noFill/>
+          <a:ln/>
+        </p:spPr>
+        <p:txBody>
+          <a:bodyPr wrap="square" lIns="0" tIns="0" rIns="0" bIns="0" rtlCol="0" anchor="ctr"/>
+          <a:lstStyle/>
+          <a:p>
+            <a:pPr algn="r" indent="0" marL="0">
+              <a:buNone/>
+            </a:pPr>
+            <a:r>
+              <a:rPr lang="en-US" sz="1300" b="1" dirty="0">
+                <a:solidFill>
+                  <a:srgbClr val="1C2B45"/>
+                </a:solidFill>
+                <a:latin typeface="Yu Gothic" pitchFamily="34" charset="0"/>
+                <a:ea typeface="Yu Gothic" pitchFamily="34" charset="-122"/>
+                <a:cs typeface="Yu Gothic" pitchFamily="34" charset="-120"/>
+              </a:rPr>
+              <a:t>2,450万円／2,500万円</a:t>
+            </a:r>
+            <a:endParaRPr lang="en-US" sz="1300" dirty="0"/>
+          </a:p>
+        </p:txBody>
+      </p:sp>
+      <p:sp>
+        <p:nvSpPr>
+          <p:cNvPr id="21" name="Text 18"/>
+          <p:cNvSpPr txBox="1"/>
+          <p:nvPr/>
+        </p:nvSpPr>
+        <p:spPr>
+          <a:xfrm>
+            <a:off x="777240" y="4526280"/>
+            <a:ext cx="4952848" cy="274320"/>
+          </a:xfrm>
+          <a:prstGeom prst="rect">
+            <a:avLst/>
+          </a:prstGeom>
+          <a:noFill/>
+          <a:ln/>
+        </p:spPr>
+        <p:txBody>
+          <a:bodyPr wrap="square" lIns="0" tIns="0" rIns="0" bIns="0" rtlCol="0" anchor="t"/>
+          <a:lstStyle/>
+          <a:p>
+            <a:pPr indent="0" marL="0">
+              <a:buNone/>
+            </a:pPr>
+            <a:r>
+              <a:rPr lang="en-US" sz="1100" b="1" dirty="0">
+                <a:solidFill>
+                  <a:srgbClr val="A8854A"/>
+                </a:solidFill>
+                <a:latin typeface="Yu Gothic" pitchFamily="34" charset="0"/>
+                <a:ea typeface="Yu Gothic" pitchFamily="34" charset="-122"/>
+                <a:cs typeface="Yu Gothic" pitchFamily="34" charset="-120"/>
+              </a:rPr>
+              <a:t>10年間の累計支出（初期費用＋住居費）</a:t>
+            </a:r>
+            <a:endParaRPr lang="en-US" sz="1100" dirty="0"/>
+          </a:p>
+        </p:txBody>
+      </p:sp>
+      <p:sp>
+        <p:nvSpPr>
+          <p:cNvPr id="22" name="Text 19"/>
+          <p:cNvSpPr txBox="1"/>
+          <p:nvPr/>
+        </p:nvSpPr>
+        <p:spPr>
+          <a:xfrm>
+            <a:off x="777240" y="4846320"/>
+            <a:ext cx="777240" cy="329184"/>
+          </a:xfrm>
+          <a:prstGeom prst="rect">
+            <a:avLst/>
+          </a:prstGeom>
+          <a:noFill/>
+          <a:ln/>
+        </p:spPr>
+        <p:txBody>
+          <a:bodyPr wrap="square" lIns="0" tIns="0" rIns="0" bIns="0" rtlCol="0" anchor="ctr"/>
+          <a:lstStyle/>
+          <a:p>
+            <a:pPr indent="0" marL="0">
+              <a:buNone/>
+            </a:pPr>
+            <a:r>
+              <a:rPr lang="en-US" sz="1100" dirty="0">
+                <a:solidFill>
+                  <a:srgbClr val="2B2F36"/>
+                </a:solidFill>
+                <a:latin typeface="Yu Gothic" pitchFamily="34" charset="0"/>
+                <a:ea typeface="Yu Gothic" pitchFamily="34" charset="-122"/>
+                <a:cs typeface="Yu Gothic" pitchFamily="34" charset="-120"/>
+              </a:rPr>
+              <a:t>控除なし</a:t>
+            </a:r>
+            <a:endParaRPr lang="en-US" sz="1100" dirty="0"/>
+          </a:p>
+        </p:txBody>
+      </p:sp>
+      <p:sp>
+        <p:nvSpPr>
+          <p:cNvPr id="23" name="Shape 20"/>
+          <p:cNvSpPr/>
+          <p:nvPr/>
+        </p:nvSpPr>
+        <p:spPr>
+          <a:xfrm>
+            <a:off x="1554480" y="4882896"/>
+            <a:ext cx="3032608" cy="256032"/>
+          </a:xfrm>
+          <a:prstGeom prst="rect">
+            <a:avLst/>
+          </a:prstGeom>
+          <a:solidFill>
+            <a:srgbClr val="9AA5B4"/>
+          </a:solidFill>
+          <a:ln w="12700">
+            <a:solidFill>
+              <a:srgbClr val="9AA5B4"/>
+            </a:solidFill>
+            <a:prstDash val="solid"/>
+          </a:ln>
+        </p:spPr>
+      </p:sp>
+      <p:sp>
+        <p:nvSpPr>
+          <p:cNvPr id="24" name="Text 21"/>
+          <p:cNvSpPr txBox="1"/>
+          <p:nvPr/>
+        </p:nvSpPr>
+        <p:spPr>
+          <a:xfrm>
+            <a:off x="4632808" y="4846320"/>
+            <a:ext cx="1188720" cy="329184"/>
+          </a:xfrm>
+          <a:prstGeom prst="rect">
+            <a:avLst/>
+          </a:prstGeom>
+          <a:noFill/>
+          <a:ln/>
+        </p:spPr>
+        <p:txBody>
+          <a:bodyPr wrap="square" lIns="0" tIns="0" rIns="0" bIns="0" rtlCol="0" anchor="ctr"/>
+          <a:lstStyle/>
+          <a:p>
+            <a:pPr indent="0" marL="0">
+              <a:buNone/>
+            </a:pPr>
+            <a:r>
+              <a:rPr lang="en-US" sz="1200" b="1" dirty="0">
+                <a:solidFill>
+                  <a:srgbClr val="1C2B45"/>
+                </a:solidFill>
+                <a:latin typeface="Yu Gothic" pitchFamily="34" charset="0"/>
+                <a:ea typeface="Yu Gothic" pitchFamily="34" charset="-122"/>
+                <a:cs typeface="Yu Gothic" pitchFamily="34" charset="-120"/>
+              </a:rPr>
+              <a:t>2,051万円</a:t>
+            </a:r>
+            <a:endParaRPr lang="en-US" sz="1200" dirty="0"/>
+          </a:p>
+        </p:txBody>
+      </p:sp>
+      <p:sp>
+        <p:nvSpPr>
+          <p:cNvPr id="25" name="Text 22"/>
+          <p:cNvSpPr txBox="1"/>
+          <p:nvPr/>
+        </p:nvSpPr>
+        <p:spPr>
+          <a:xfrm>
+            <a:off x="777240" y="5257800"/>
+            <a:ext cx="777240" cy="329184"/>
+          </a:xfrm>
+          <a:prstGeom prst="rect">
+            <a:avLst/>
+          </a:prstGeom>
+          <a:noFill/>
+          <a:ln/>
+        </p:spPr>
+        <p:txBody>
+          <a:bodyPr wrap="square" lIns="0" tIns="0" rIns="0" bIns="0" rtlCol="0" anchor="ctr"/>
+          <a:lstStyle/>
+          <a:p>
+            <a:pPr indent="0" marL="0">
+              <a:buNone/>
+            </a:pPr>
+            <a:r>
+              <a:rPr lang="en-US" sz="1100" dirty="0">
+                <a:solidFill>
+                  <a:srgbClr val="2B2F36"/>
+                </a:solidFill>
+                <a:latin typeface="Yu Gothic" pitchFamily="34" charset="0"/>
+                <a:ea typeface="Yu Gothic" pitchFamily="34" charset="-122"/>
+                <a:cs typeface="Yu Gothic" pitchFamily="34" charset="-120"/>
+              </a:rPr>
+              <a:t>控除あり</a:t>
+            </a:r>
+            <a:endParaRPr lang="en-US" sz="1100" dirty="0"/>
+          </a:p>
+        </p:txBody>
+      </p:sp>
+      <p:sp>
+        <p:nvSpPr>
+          <p:cNvPr id="26" name="Shape 23"/>
+          <p:cNvSpPr/>
+          <p:nvPr/>
+        </p:nvSpPr>
+        <p:spPr>
+          <a:xfrm>
+            <a:off x="1554480" y="5294376"/>
+            <a:ext cx="2743787" cy="256032"/>
+          </a:xfrm>
+          <a:prstGeom prst="rect">
+            <a:avLst/>
+          </a:prstGeom>
+          <a:solidFill>
+            <a:srgbClr val="1C2B45"/>
+          </a:solidFill>
+          <a:ln w="12700">
+            <a:solidFill>
+              <a:srgbClr val="1C2B45"/>
+            </a:solidFill>
+            <a:prstDash val="solid"/>
+          </a:ln>
+        </p:spPr>
+      </p:sp>
+      <p:sp>
+        <p:nvSpPr>
+          <p:cNvPr id="27" name="Text 24"/>
+          <p:cNvSpPr txBox="1"/>
+          <p:nvPr/>
+        </p:nvSpPr>
+        <p:spPr>
+          <a:xfrm>
+            <a:off x="4343987" y="5257800"/>
+            <a:ext cx="1188720" cy="329184"/>
+          </a:xfrm>
+          <a:prstGeom prst="rect">
+            <a:avLst/>
+          </a:prstGeom>
+          <a:noFill/>
+          <a:ln/>
+        </p:spPr>
+        <p:txBody>
+          <a:bodyPr wrap="square" lIns="0" tIns="0" rIns="0" bIns="0" rtlCol="0" anchor="ctr"/>
+          <a:lstStyle/>
+          <a:p>
+            <a:pPr indent="0" marL="0">
+              <a:buNone/>
+            </a:pPr>
+            <a:r>
+              <a:rPr lang="en-US" sz="1200" b="1" dirty="0">
+                <a:solidFill>
+                  <a:srgbClr val="1C2B45"/>
+                </a:solidFill>
+                <a:latin typeface="Yu Gothic" pitchFamily="34" charset="0"/>
+                <a:ea typeface="Yu Gothic" pitchFamily="34" charset="-122"/>
+                <a:cs typeface="Yu Gothic" pitchFamily="34" charset="-120"/>
+              </a:rPr>
+              <a:t>1,855万円</a:t>
+            </a:r>
+            <a:endParaRPr lang="en-US" sz="1200" dirty="0"/>
+          </a:p>
+        </p:txBody>
+      </p:sp>
+      <p:sp>
+        <p:nvSpPr>
+          <p:cNvPr id="28" name="Shape 25"/>
+          <p:cNvSpPr/>
+          <p:nvPr/>
+        </p:nvSpPr>
+        <p:spPr>
+          <a:xfrm>
+            <a:off x="6233008" y="1645920"/>
+            <a:ext cx="5410048" cy="4160520"/>
+          </a:xfrm>
+          <a:prstGeom prst="roundRect">
+            <a:avLst>
+              <a:gd name="adj" fmla="val 1758"/>
+            </a:avLst>
+          </a:prstGeom>
+          <a:solidFill>
+            <a:srgbClr val="1C2B45"/>
+          </a:solidFill>
+          <a:ln w="12700">
+            <a:solidFill>
+              <a:srgbClr val="1C2B45"/>
+            </a:solidFill>
+            <a:prstDash val="solid"/>
+          </a:ln>
+        </p:spPr>
+      </p:sp>
+      <p:sp>
+        <p:nvSpPr>
+          <p:cNvPr id="29" name="Text 26"/>
+          <p:cNvSpPr txBox="1"/>
+          <p:nvPr/>
+        </p:nvSpPr>
+        <p:spPr>
+          <a:xfrm>
+            <a:off x="6461608" y="1719072"/>
+            <a:ext cx="4952848" cy="347472"/>
+          </a:xfrm>
+          <a:prstGeom prst="rect">
+            <a:avLst/>
+          </a:prstGeom>
+          <a:noFill/>
+          <a:ln/>
+        </p:spPr>
+        <p:txBody>
+          <a:bodyPr wrap="square" lIns="0" tIns="0" rIns="0" bIns="0" rtlCol="0" anchor="ctr"/>
+          <a:lstStyle/>
+          <a:p>
+            <a:pPr indent="0" marL="0">
+              <a:buNone/>
+            </a:pPr>
+            <a:r>
+              <a:rPr lang="en-US" sz="1500" b="1" dirty="0">
+                <a:solidFill>
+                  <a:srgbClr val="FFFFFF"/>
+                </a:solidFill>
+                <a:latin typeface="Yu Gothic" pitchFamily="34" charset="0"/>
+                <a:ea typeface="Yu Gothic" pitchFamily="34" charset="-122"/>
+                <a:cs typeface="Yu Gothic" pitchFamily="34" charset="-120"/>
+              </a:rPr>
+              <a:t>中古（築15年・その他の住宅と仮定）</a:t>
+            </a:r>
+            <a:endParaRPr lang="en-US" sz="1500" dirty="0"/>
+          </a:p>
+        </p:txBody>
+      </p:sp>
+      <p:sp>
+        <p:nvSpPr>
+          <p:cNvPr id="30" name="Text 27"/>
+          <p:cNvSpPr txBox="1"/>
+          <p:nvPr/>
+        </p:nvSpPr>
+        <p:spPr>
+          <a:xfrm>
+            <a:off x="6461608" y="2121408"/>
+            <a:ext cx="2286000" cy="310896"/>
+          </a:xfrm>
+          <a:prstGeom prst="rect">
+            <a:avLst/>
+          </a:prstGeom>
+          <a:noFill/>
+          <a:ln/>
+        </p:spPr>
+        <p:txBody>
+          <a:bodyPr wrap="square" lIns="0" tIns="0" rIns="0" bIns="0" rtlCol="0" anchor="ctr"/>
+          <a:lstStyle/>
+          <a:p>
+            <a:pPr indent="0" marL="0">
+              <a:buNone/>
+            </a:pPr>
+            <a:r>
+              <a:rPr lang="en-US" sz="1100" dirty="0">
+                <a:solidFill>
+                  <a:srgbClr val="C9D0DA"/>
+                </a:solidFill>
+                <a:latin typeface="Yu Gothic" pitchFamily="34" charset="0"/>
+                <a:ea typeface="Yu Gothic" pitchFamily="34" charset="-122"/>
+                <a:cs typeface="Yu Gothic" pitchFamily="34" charset="-120"/>
+              </a:rPr>
+              <a:t>物件価格／購入諸費用</a:t>
+            </a:r>
+            <a:endParaRPr lang="en-US" sz="1100" dirty="0"/>
+          </a:p>
+        </p:txBody>
+      </p:sp>
+      <p:sp>
+        <p:nvSpPr>
+          <p:cNvPr id="31" name="Text 28"/>
+          <p:cNvSpPr txBox="1"/>
+          <p:nvPr/>
+        </p:nvSpPr>
+        <p:spPr>
+          <a:xfrm>
+            <a:off x="8610448" y="2121408"/>
+            <a:ext cx="2804008" cy="310896"/>
+          </a:xfrm>
+          <a:prstGeom prst="rect">
+            <a:avLst/>
+          </a:prstGeom>
+          <a:noFill/>
+          <a:ln/>
+        </p:spPr>
+        <p:txBody>
+          <a:bodyPr wrap="square" lIns="0" tIns="0" rIns="0" bIns="0" rtlCol="0" anchor="ctr"/>
+          <a:lstStyle/>
+          <a:p>
+            <a:pPr algn="r" indent="0" marL="0">
+              <a:buNone/>
+            </a:pPr>
+            <a:r>
+              <a:rPr lang="en-US" sz="1300" b="1" dirty="0">
+                <a:solidFill>
+                  <a:srgbClr val="FFFFFF"/>
+                </a:solidFill>
+                <a:latin typeface="Yu Gothic" pitchFamily="34" charset="0"/>
+                <a:ea typeface="Yu Gothic" pitchFamily="34" charset="-122"/>
+                <a:cs typeface="Yu Gothic" pitchFamily="34" charset="-120"/>
+              </a:rPr>
+              <a:t>2,500万円／200.0万円</a:t>
+            </a:r>
+            <a:endParaRPr lang="en-US" sz="1300" dirty="0"/>
+          </a:p>
+        </p:txBody>
+      </p:sp>
+      <p:sp>
+        <p:nvSpPr>
+          <p:cNvPr id="32" name="Text 29"/>
+          <p:cNvSpPr txBox="1"/>
+          <p:nvPr/>
+        </p:nvSpPr>
+        <p:spPr>
+          <a:xfrm>
+            <a:off x="6461608" y="2450592"/>
+            <a:ext cx="2286000" cy="310896"/>
+          </a:xfrm>
+          <a:prstGeom prst="rect">
+            <a:avLst/>
+          </a:prstGeom>
+          <a:noFill/>
+          <a:ln/>
+        </p:spPr>
+        <p:txBody>
+          <a:bodyPr wrap="square" lIns="0" tIns="0" rIns="0" bIns="0" rtlCol="0" anchor="ctr"/>
+          <a:lstStyle/>
+          <a:p>
+            <a:pPr indent="0" marL="0">
+              <a:buNone/>
+            </a:pPr>
+            <a:r>
+              <a:rPr lang="en-US" sz="1100" dirty="0">
+                <a:solidFill>
+                  <a:srgbClr val="C9D0DA"/>
+                </a:solidFill>
+                <a:latin typeface="Yu Gothic" pitchFamily="34" charset="0"/>
+                <a:ea typeface="Yu Gothic" pitchFamily="34" charset="-122"/>
+                <a:cs typeface="Yu Gothic" pitchFamily="34" charset="-120"/>
+              </a:rPr>
+              <a:t>借入額／毎月の返済</a:t>
+            </a:r>
+            <a:endParaRPr lang="en-US" sz="1100" dirty="0"/>
+          </a:p>
+        </p:txBody>
+      </p:sp>
+      <p:sp>
+        <p:nvSpPr>
+          <p:cNvPr id="33" name="Text 30"/>
+          <p:cNvSpPr txBox="1"/>
+          <p:nvPr/>
+        </p:nvSpPr>
+        <p:spPr>
+          <a:xfrm>
+            <a:off x="8610448" y="2450592"/>
+            <a:ext cx="2804008" cy="310896"/>
+          </a:xfrm>
+          <a:prstGeom prst="rect">
+            <a:avLst/>
+          </a:prstGeom>
+          <a:noFill/>
+          <a:ln/>
+        </p:spPr>
+        <p:txBody>
+          <a:bodyPr wrap="square" lIns="0" tIns="0" rIns="0" bIns="0" rtlCol="0" anchor="ctr"/>
+          <a:lstStyle/>
+          <a:p>
+            <a:pPr algn="r" indent="0" marL="0">
+              <a:buNone/>
+            </a:pPr>
+            <a:r>
+              <a:rPr lang="en-US" sz="1300" b="1" dirty="0">
+                <a:solidFill>
+                  <a:srgbClr val="FFFFFF"/>
+                </a:solidFill>
+                <a:latin typeface="Yu Gothic" pitchFamily="34" charset="0"/>
+                <a:ea typeface="Yu Gothic" pitchFamily="34" charset="-122"/>
+                <a:cs typeface="Yu Gothic" pitchFamily="34" charset="-120"/>
+              </a:rPr>
+              <a:t>2,200万円／67,361円</a:t>
+            </a:r>
+            <a:endParaRPr lang="en-US" sz="1300" dirty="0"/>
+          </a:p>
+        </p:txBody>
+      </p:sp>
+      <p:sp>
+        <p:nvSpPr>
+          <p:cNvPr id="34" name="Text 31"/>
+          <p:cNvSpPr txBox="1"/>
+          <p:nvPr/>
+        </p:nvSpPr>
+        <p:spPr>
+          <a:xfrm>
+            <a:off x="6461608" y="2779776"/>
+            <a:ext cx="2286000" cy="310896"/>
+          </a:xfrm>
+          <a:prstGeom prst="rect">
+            <a:avLst/>
+          </a:prstGeom>
+          <a:noFill/>
+          <a:ln/>
+        </p:spPr>
+        <p:txBody>
+          <a:bodyPr wrap="square" lIns="0" tIns="0" rIns="0" bIns="0" rtlCol="0" anchor="ctr"/>
+          <a:lstStyle/>
+          <a:p>
+            <a:pPr indent="0" marL="0">
+              <a:buNone/>
+            </a:pPr>
+            <a:r>
+              <a:rPr lang="en-US" sz="1100" dirty="0">
+                <a:solidFill>
+                  <a:srgbClr val="C9D0DA"/>
+                </a:solidFill>
+                <a:latin typeface="Yu Gothic" pitchFamily="34" charset="0"/>
+                <a:ea typeface="Yu Gothic" pitchFamily="34" charset="-122"/>
+                <a:cs typeface="Yu Gothic" pitchFamily="34" charset="-120"/>
+              </a:rPr>
+              <a:t>控除の枠（限度額・期間）</a:t>
+            </a:r>
+            <a:endParaRPr lang="en-US" sz="1100" dirty="0"/>
+          </a:p>
+        </p:txBody>
+      </p:sp>
+      <p:sp>
+        <p:nvSpPr>
+          <p:cNvPr id="35" name="Text 32"/>
+          <p:cNvSpPr txBox="1"/>
+          <p:nvPr/>
+        </p:nvSpPr>
+        <p:spPr>
+          <a:xfrm>
+            <a:off x="8610448" y="2779776"/>
+            <a:ext cx="2804008" cy="310896"/>
+          </a:xfrm>
+          <a:prstGeom prst="rect">
+            <a:avLst/>
+          </a:prstGeom>
+          <a:noFill/>
+          <a:ln/>
+        </p:spPr>
+        <p:txBody>
+          <a:bodyPr wrap="square" lIns="0" tIns="0" rIns="0" bIns="0" rtlCol="0" anchor="ctr"/>
+          <a:lstStyle/>
+          <a:p>
+            <a:pPr algn="r" indent="0" marL="0">
+              <a:buNone/>
+            </a:pPr>
+            <a:r>
+              <a:rPr lang="en-US" sz="1300" b="1" dirty="0">
+                <a:solidFill>
+                  <a:srgbClr val="FFFFFF"/>
+                </a:solidFill>
+                <a:latin typeface="Yu Gothic" pitchFamily="34" charset="0"/>
+                <a:ea typeface="Yu Gothic" pitchFamily="34" charset="-122"/>
+                <a:cs typeface="Yu Gothic" pitchFamily="34" charset="-120"/>
+              </a:rPr>
+              <a:t>2,000万円・10年</a:t>
+            </a:r>
+            <a:endParaRPr lang="en-US" sz="1300" dirty="0"/>
+          </a:p>
+        </p:txBody>
+      </p:sp>
+      <p:sp>
+        <p:nvSpPr>
+          <p:cNvPr id="36" name="Text 33"/>
+          <p:cNvSpPr txBox="1"/>
+          <p:nvPr/>
+        </p:nvSpPr>
+        <p:spPr>
+          <a:xfrm>
+            <a:off x="6461608" y="3108960"/>
+            <a:ext cx="2286000" cy="310896"/>
+          </a:xfrm>
+          <a:prstGeom prst="rect">
+            <a:avLst/>
+          </a:prstGeom>
+          <a:noFill/>
+          <a:ln/>
+        </p:spPr>
+        <p:txBody>
+          <a:bodyPr wrap="square" lIns="0" tIns="0" rIns="0" bIns="0" rtlCol="0" anchor="ctr"/>
+          <a:lstStyle/>
+          <a:p>
+            <a:pPr indent="0" marL="0">
+              <a:buNone/>
+            </a:pPr>
+            <a:r>
+              <a:rPr lang="en-US" sz="1100" dirty="0">
+                <a:solidFill>
+                  <a:srgbClr val="C9D0DA"/>
+                </a:solidFill>
+                <a:latin typeface="Yu Gothic" pitchFamily="34" charset="0"/>
+                <a:ea typeface="Yu Gothic" pitchFamily="34" charset="-122"/>
+                <a:cs typeface="Yu Gothic" pitchFamily="34" charset="-120"/>
+              </a:rPr>
+              <a:t>初年度／累計の控除見込み</a:t>
+            </a:r>
+            <a:endParaRPr lang="en-US" sz="1100" dirty="0"/>
+          </a:p>
+        </p:txBody>
+      </p:sp>
+      <p:sp>
+        <p:nvSpPr>
+          <p:cNvPr id="37" name="Text 34"/>
+          <p:cNvSpPr txBox="1"/>
+          <p:nvPr/>
+        </p:nvSpPr>
+        <p:spPr>
+          <a:xfrm>
+            <a:off x="8610448" y="3108960"/>
+            <a:ext cx="2804008" cy="310896"/>
+          </a:xfrm>
+          <a:prstGeom prst="rect">
+            <a:avLst/>
+          </a:prstGeom>
+          <a:noFill/>
+          <a:ln/>
+        </p:spPr>
+        <p:txBody>
+          <a:bodyPr wrap="square" lIns="0" tIns="0" rIns="0" bIns="0" rtlCol="0" anchor="ctr"/>
+          <a:lstStyle/>
+          <a:p>
+            <a:pPr algn="r" indent="0" marL="0">
+              <a:buNone/>
+            </a:pPr>
+            <a:r>
+              <a:rPr lang="en-US" sz="1300" b="1" dirty="0">
+                <a:solidFill>
+                  <a:srgbClr val="FFFFFF"/>
+                </a:solidFill>
+                <a:latin typeface="Yu Gothic" pitchFamily="34" charset="0"/>
+                <a:ea typeface="Yu Gothic" pitchFamily="34" charset="-122"/>
+                <a:cs typeface="Yu Gothic" pitchFamily="34" charset="-120"/>
+              </a:rPr>
+              <a:t>140,000円／133.0万円</a:t>
+            </a:r>
+            <a:endParaRPr lang="en-US" sz="1300" dirty="0"/>
+          </a:p>
+        </p:txBody>
+      </p:sp>
+      <p:sp>
+        <p:nvSpPr>
+          <p:cNvPr id="38" name="Text 35"/>
+          <p:cNvSpPr txBox="1"/>
+          <p:nvPr/>
+        </p:nvSpPr>
+        <p:spPr>
+          <a:xfrm>
+            <a:off x="6461608" y="3438144"/>
+            <a:ext cx="2286000" cy="310896"/>
+          </a:xfrm>
+          <a:prstGeom prst="rect">
+            <a:avLst/>
+          </a:prstGeom>
+          <a:noFill/>
+          <a:ln/>
+        </p:spPr>
+        <p:txBody>
+          <a:bodyPr wrap="square" lIns="0" tIns="0" rIns="0" bIns="0" rtlCol="0" anchor="ctr"/>
+          <a:lstStyle/>
+          <a:p>
+            <a:pPr indent="0" marL="0">
+              <a:buNone/>
+            </a:pPr>
+            <a:r>
+              <a:rPr lang="en-US" sz="1100" dirty="0">
+                <a:solidFill>
+                  <a:srgbClr val="C9D0DA"/>
+                </a:solidFill>
+                <a:latin typeface="Yu Gothic" pitchFamily="34" charset="0"/>
+                <a:ea typeface="Yu Gothic" pitchFamily="34" charset="-122"/>
+                <a:cs typeface="Yu Gothic" pitchFamily="34" charset="-120"/>
+              </a:rPr>
+              <a:t>固定資産税等／修繕積立</a:t>
+            </a:r>
+            <a:endParaRPr lang="en-US" sz="1100" dirty="0"/>
+          </a:p>
+        </p:txBody>
+      </p:sp>
+      <p:sp>
+        <p:nvSpPr>
+          <p:cNvPr id="39" name="Text 36"/>
+          <p:cNvSpPr txBox="1"/>
+          <p:nvPr/>
+        </p:nvSpPr>
+        <p:spPr>
+          <a:xfrm>
+            <a:off x="8610448" y="3438144"/>
+            <a:ext cx="2804008" cy="310896"/>
+          </a:xfrm>
+          <a:prstGeom prst="rect">
+            <a:avLst/>
+          </a:prstGeom>
+          <a:noFill/>
+          <a:ln/>
+        </p:spPr>
+        <p:txBody>
+          <a:bodyPr wrap="square" lIns="0" tIns="0" rIns="0" bIns="0" rtlCol="0" anchor="ctr"/>
+          <a:lstStyle/>
+          <a:p>
+            <a:pPr algn="r" indent="0" marL="0">
+              <a:buNone/>
+            </a:pPr>
+            <a:r>
+              <a:rPr lang="en-US" sz="1300" b="1" dirty="0">
+                <a:solidFill>
+                  <a:srgbClr val="FFFFFF"/>
+                </a:solidFill>
+                <a:latin typeface="Yu Gothic" pitchFamily="34" charset="0"/>
+                <a:ea typeface="Yu Gothic" pitchFamily="34" charset="-122"/>
+                <a:cs typeface="Yu Gothic" pitchFamily="34" charset="-120"/>
+              </a:rPr>
+              <a:t>年9万円／月2.5万円</a:t>
+            </a:r>
+            <a:endParaRPr lang="en-US" sz="1300" dirty="0"/>
+          </a:p>
+        </p:txBody>
+      </p:sp>
+      <p:sp>
+        <p:nvSpPr>
+          <p:cNvPr id="40" name="Text 37"/>
+          <p:cNvSpPr txBox="1"/>
+          <p:nvPr/>
+        </p:nvSpPr>
+        <p:spPr>
+          <a:xfrm>
+            <a:off x="6461608" y="3767328"/>
+            <a:ext cx="2286000" cy="310896"/>
+          </a:xfrm>
+          <a:prstGeom prst="rect">
+            <a:avLst/>
+          </a:prstGeom>
+          <a:noFill/>
+          <a:ln/>
+        </p:spPr>
+        <p:txBody>
+          <a:bodyPr wrap="square" lIns="0" tIns="0" rIns="0" bIns="0" rtlCol="0" anchor="ctr"/>
+          <a:lstStyle/>
+          <a:p>
+            <a:pPr indent="0" marL="0">
+              <a:buNone/>
+            </a:pPr>
+            <a:r>
+              <a:rPr lang="en-US" sz="1100" dirty="0">
+                <a:solidFill>
+                  <a:srgbClr val="C9D0DA"/>
+                </a:solidFill>
+                <a:latin typeface="Yu Gothic" pitchFamily="34" charset="0"/>
+                <a:ea typeface="Yu Gothic" pitchFamily="34" charset="-122"/>
+                <a:cs typeface="Yu Gothic" pitchFamily="34" charset="-120"/>
+              </a:rPr>
+              <a:t>年間住居費（控除前）</a:t>
+            </a:r>
+            <a:endParaRPr lang="en-US" sz="1100" dirty="0"/>
+          </a:p>
+        </p:txBody>
+      </p:sp>
+      <p:sp>
+        <p:nvSpPr>
+          <p:cNvPr id="41" name="Text 38"/>
+          <p:cNvSpPr txBox="1"/>
+          <p:nvPr/>
+        </p:nvSpPr>
+        <p:spPr>
+          <a:xfrm>
+            <a:off x="8610448" y="3767328"/>
+            <a:ext cx="2804008" cy="310896"/>
+          </a:xfrm>
+          <a:prstGeom prst="rect">
+            <a:avLst/>
+          </a:prstGeom>
+          <a:noFill/>
+          <a:ln/>
+        </p:spPr>
+        <p:txBody>
+          <a:bodyPr wrap="square" lIns="0" tIns="0" rIns="0" bIns="0" rtlCol="0" anchor="ctr"/>
+          <a:lstStyle/>
+          <a:p>
+            <a:pPr algn="r" indent="0" marL="0">
+              <a:buNone/>
+            </a:pPr>
+            <a:r>
+              <a:rPr lang="en-US" sz="1300" b="1" dirty="0">
+                <a:solidFill>
+                  <a:srgbClr val="FFFFFF"/>
+                </a:solidFill>
+                <a:latin typeface="Yu Gothic" pitchFamily="34" charset="0"/>
+                <a:ea typeface="Yu Gothic" pitchFamily="34" charset="-122"/>
+                <a:cs typeface="Yu Gothic" pitchFamily="34" charset="-120"/>
+              </a:rPr>
+              <a:t>122.8万円</a:t>
+            </a:r>
+            <a:endParaRPr lang="en-US" sz="1300" dirty="0"/>
+          </a:p>
+        </p:txBody>
+      </p:sp>
+      <p:sp>
+        <p:nvSpPr>
+          <p:cNvPr id="42" name="Text 39"/>
+          <p:cNvSpPr txBox="1"/>
+          <p:nvPr/>
+        </p:nvSpPr>
+        <p:spPr>
+          <a:xfrm>
+            <a:off x="6461608" y="4096512"/>
+            <a:ext cx="2286000" cy="310896"/>
+          </a:xfrm>
+          <a:prstGeom prst="rect">
+            <a:avLst/>
+          </a:prstGeom>
+          <a:noFill/>
+          <a:ln/>
+        </p:spPr>
+        <p:txBody>
+          <a:bodyPr wrap="square" lIns="0" tIns="0" rIns="0" bIns="0" rtlCol="0" anchor="ctr"/>
+          <a:lstStyle/>
+          <a:p>
+            <a:pPr indent="0" marL="0">
+              <a:buNone/>
+            </a:pPr>
+            <a:r>
+              <a:rPr lang="en-US" sz="1100" dirty="0">
+                <a:solidFill>
+                  <a:srgbClr val="C9D0DA"/>
+                </a:solidFill>
+                <a:latin typeface="Yu Gothic" pitchFamily="34" charset="0"/>
+                <a:ea typeface="Yu Gothic" pitchFamily="34" charset="-122"/>
+                <a:cs typeface="Yu Gothic" pitchFamily="34" charset="-120"/>
+              </a:rPr>
+              <a:t>10年後の残債／想定売却価格</a:t>
+            </a:r>
+            <a:endParaRPr lang="en-US" sz="1100" dirty="0"/>
+          </a:p>
+        </p:txBody>
+      </p:sp>
+      <p:sp>
+        <p:nvSpPr>
+          <p:cNvPr id="43" name="Text 40"/>
+          <p:cNvSpPr txBox="1"/>
+          <p:nvPr/>
+        </p:nvSpPr>
+        <p:spPr>
+          <a:xfrm>
+            <a:off x="8610448" y="4096512"/>
+            <a:ext cx="2804008" cy="310896"/>
+          </a:xfrm>
+          <a:prstGeom prst="rect">
+            <a:avLst/>
+          </a:prstGeom>
+          <a:noFill/>
+          <a:ln/>
+        </p:spPr>
+        <p:txBody>
+          <a:bodyPr wrap="square" lIns="0" tIns="0" rIns="0" bIns="0" rtlCol="0" anchor="ctr"/>
+          <a:lstStyle/>
+          <a:p>
+            <a:pPr algn="r" indent="0" marL="0">
+              <a:buNone/>
+            </a:pPr>
+            <a:r>
+              <a:rPr lang="en-US" sz="1300" b="1" dirty="0">
+                <a:solidFill>
+                  <a:srgbClr val="FFFFFF"/>
+                </a:solidFill>
+                <a:latin typeface="Yu Gothic" pitchFamily="34" charset="0"/>
+                <a:ea typeface="Yu Gothic" pitchFamily="34" charset="-122"/>
+                <a:cs typeface="Yu Gothic" pitchFamily="34" charset="-120"/>
+              </a:rPr>
+              <a:t>1,684万円／1,900万円</a:t>
+            </a:r>
+            <a:endParaRPr lang="en-US" sz="1300" dirty="0"/>
+          </a:p>
+        </p:txBody>
+      </p:sp>
+      <p:sp>
+        <p:nvSpPr>
+          <p:cNvPr id="44" name="Text 41"/>
+          <p:cNvSpPr txBox="1"/>
+          <p:nvPr/>
+        </p:nvSpPr>
+        <p:spPr>
+          <a:xfrm>
+            <a:off x="6461608" y="4526280"/>
+            <a:ext cx="4952848" cy="274320"/>
+          </a:xfrm>
+          <a:prstGeom prst="rect">
+            <a:avLst/>
+          </a:prstGeom>
+          <a:noFill/>
+          <a:ln/>
+        </p:spPr>
+        <p:txBody>
+          <a:bodyPr wrap="square" lIns="0" tIns="0" rIns="0" bIns="0" rtlCol="0" anchor="t"/>
+          <a:lstStyle/>
+          <a:p>
+            <a:pPr indent="0" marL="0">
+              <a:buNone/>
+            </a:pPr>
+            <a:r>
+              <a:rPr lang="en-US" sz="1100" b="1" dirty="0">
+                <a:solidFill>
+                  <a:srgbClr val="E9DFCB"/>
+                </a:solidFill>
+                <a:latin typeface="Yu Gothic" pitchFamily="34" charset="0"/>
+                <a:ea typeface="Yu Gothic" pitchFamily="34" charset="-122"/>
+                <a:cs typeface="Yu Gothic" pitchFamily="34" charset="-120"/>
+              </a:rPr>
+              <a:t>10年間の累計支出（初期費用＋住居費）</a:t>
+            </a:r>
+            <a:endParaRPr lang="en-US" sz="1100" dirty="0"/>
+          </a:p>
+        </p:txBody>
+      </p:sp>
+      <p:sp>
+        <p:nvSpPr>
+          <p:cNvPr id="45" name="Text 42"/>
+          <p:cNvSpPr txBox="1"/>
+          <p:nvPr/>
+        </p:nvSpPr>
+        <p:spPr>
+          <a:xfrm>
+            <a:off x="6461608" y="4846320"/>
+            <a:ext cx="777240" cy="329184"/>
+          </a:xfrm>
+          <a:prstGeom prst="rect">
+            <a:avLst/>
+          </a:prstGeom>
+          <a:noFill/>
+          <a:ln/>
+        </p:spPr>
+        <p:txBody>
+          <a:bodyPr wrap="square" lIns="0" tIns="0" rIns="0" bIns="0" rtlCol="0" anchor="ctr"/>
+          <a:lstStyle/>
+          <a:p>
+            <a:pPr indent="0" marL="0">
+              <a:buNone/>
+            </a:pPr>
+            <a:r>
+              <a:rPr lang="en-US" sz="1100" dirty="0">
+                <a:solidFill>
+                  <a:srgbClr val="FFFFFF"/>
+                </a:solidFill>
+                <a:latin typeface="Yu Gothic" pitchFamily="34" charset="0"/>
+                <a:ea typeface="Yu Gothic" pitchFamily="34" charset="-122"/>
+                <a:cs typeface="Yu Gothic" pitchFamily="34" charset="-120"/>
+              </a:rPr>
+              <a:t>控除なし</a:t>
+            </a:r>
+            <a:endParaRPr lang="en-US" sz="1100" dirty="0"/>
+          </a:p>
+        </p:txBody>
+      </p:sp>
+      <p:sp>
+        <p:nvSpPr>
+          <p:cNvPr id="46" name="Shape 43"/>
+          <p:cNvSpPr/>
+          <p:nvPr/>
+        </p:nvSpPr>
+        <p:spPr>
+          <a:xfrm>
+            <a:off x="7238848" y="4882896"/>
+            <a:ext cx="2555817" cy="256032"/>
+          </a:xfrm>
+          <a:prstGeom prst="rect">
+            <a:avLst/>
+          </a:prstGeom>
+          <a:solidFill>
+            <a:srgbClr val="6B7A96"/>
+          </a:solidFill>
+          <a:ln w="12700">
+            <a:solidFill>
+              <a:srgbClr val="6B7A96"/>
+            </a:solidFill>
+            <a:prstDash val="solid"/>
+          </a:ln>
+        </p:spPr>
+      </p:sp>
+      <p:sp>
+        <p:nvSpPr>
+          <p:cNvPr id="47" name="Text 44"/>
+          <p:cNvSpPr txBox="1"/>
+          <p:nvPr/>
+        </p:nvSpPr>
+        <p:spPr>
+          <a:xfrm>
+            <a:off x="9840385" y="4846320"/>
+            <a:ext cx="1188720" cy="329184"/>
+          </a:xfrm>
+          <a:prstGeom prst="rect">
+            <a:avLst/>
+          </a:prstGeom>
+          <a:noFill/>
+          <a:ln/>
+        </p:spPr>
+        <p:txBody>
+          <a:bodyPr wrap="square" lIns="0" tIns="0" rIns="0" bIns="0" rtlCol="0" anchor="ctr"/>
+          <a:lstStyle/>
+          <a:p>
+            <a:pPr indent="0" marL="0">
+              <a:buNone/>
+            </a:pPr>
+            <a:r>
+              <a:rPr lang="en-US" sz="1200" b="1" dirty="0">
+                <a:solidFill>
+                  <a:srgbClr val="FFFFFF"/>
+                </a:solidFill>
+                <a:latin typeface="Yu Gothic" pitchFamily="34" charset="0"/>
+                <a:ea typeface="Yu Gothic" pitchFamily="34" charset="-122"/>
+                <a:cs typeface="Yu Gothic" pitchFamily="34" charset="-120"/>
+              </a:rPr>
+              <a:t>1,728万円</a:t>
+            </a:r>
+            <a:endParaRPr lang="en-US" sz="1200" dirty="0"/>
+          </a:p>
+        </p:txBody>
+      </p:sp>
+      <p:sp>
+        <p:nvSpPr>
+          <p:cNvPr id="48" name="Text 45"/>
+          <p:cNvSpPr txBox="1"/>
+          <p:nvPr/>
+        </p:nvSpPr>
+        <p:spPr>
+          <a:xfrm>
+            <a:off x="6461608" y="5257800"/>
+            <a:ext cx="777240" cy="329184"/>
+          </a:xfrm>
+          <a:prstGeom prst="rect">
+            <a:avLst/>
+          </a:prstGeom>
+          <a:noFill/>
+          <a:ln/>
+        </p:spPr>
+        <p:txBody>
+          <a:bodyPr wrap="square" lIns="0" tIns="0" rIns="0" bIns="0" rtlCol="0" anchor="ctr"/>
+          <a:lstStyle/>
+          <a:p>
+            <a:pPr indent="0" marL="0">
+              <a:buNone/>
+            </a:pPr>
+            <a:r>
+              <a:rPr lang="en-US" sz="1100" dirty="0">
+                <a:solidFill>
+                  <a:srgbClr val="FFFFFF"/>
+                </a:solidFill>
+                <a:latin typeface="Yu Gothic" pitchFamily="34" charset="0"/>
+                <a:ea typeface="Yu Gothic" pitchFamily="34" charset="-122"/>
+                <a:cs typeface="Yu Gothic" pitchFamily="34" charset="-120"/>
+              </a:rPr>
+              <a:t>控除あり</a:t>
+            </a:r>
+            <a:endParaRPr lang="en-US" sz="1100" dirty="0"/>
+          </a:p>
+        </p:txBody>
+      </p:sp>
+      <p:sp>
+        <p:nvSpPr>
+          <p:cNvPr id="49" name="Shape 46"/>
+          <p:cNvSpPr/>
+          <p:nvPr/>
+        </p:nvSpPr>
+        <p:spPr>
+          <a:xfrm>
+            <a:off x="7238848" y="5294376"/>
+            <a:ext cx="2359198" cy="256032"/>
+          </a:xfrm>
+          <a:prstGeom prst="rect">
+            <a:avLst/>
+          </a:prstGeom>
+          <a:solidFill>
+            <a:srgbClr val="A8854A"/>
+          </a:solidFill>
+          <a:ln w="12700">
+            <a:solidFill>
+              <a:srgbClr val="A8854A"/>
+            </a:solidFill>
+            <a:prstDash val="solid"/>
+          </a:ln>
+        </p:spPr>
+      </p:sp>
+      <p:sp>
+        <p:nvSpPr>
+          <p:cNvPr id="50" name="Text 47"/>
+          <p:cNvSpPr txBox="1"/>
+          <p:nvPr/>
+        </p:nvSpPr>
+        <p:spPr>
+          <a:xfrm>
+            <a:off x="9643766" y="5257800"/>
+            <a:ext cx="1188720" cy="329184"/>
+          </a:xfrm>
+          <a:prstGeom prst="rect">
+            <a:avLst/>
+          </a:prstGeom>
+          <a:noFill/>
+          <a:ln/>
+        </p:spPr>
+        <p:txBody>
+          <a:bodyPr wrap="square" lIns="0" tIns="0" rIns="0" bIns="0" rtlCol="0" anchor="ctr"/>
+          <a:lstStyle/>
+          <a:p>
+            <a:pPr indent="0" marL="0">
+              <a:buNone/>
+            </a:pPr>
+            <a:r>
+              <a:rPr lang="en-US" sz="1200" b="1" dirty="0">
+                <a:solidFill>
+                  <a:srgbClr val="FFFFFF"/>
+                </a:solidFill>
+                <a:latin typeface="Yu Gothic" pitchFamily="34" charset="0"/>
+                <a:ea typeface="Yu Gothic" pitchFamily="34" charset="-122"/>
+                <a:cs typeface="Yu Gothic" pitchFamily="34" charset="-120"/>
+              </a:rPr>
+              <a:t>1,595万円</a:t>
+            </a:r>
+            <a:endParaRPr lang="en-US" sz="1200" dirty="0"/>
+          </a:p>
+        </p:txBody>
+      </p:sp>
+      <p:sp>
+        <p:nvSpPr>
+          <p:cNvPr id="51" name="Text 48"/>
+          <p:cNvSpPr txBox="1"/>
+          <p:nvPr/>
+        </p:nvSpPr>
+        <p:spPr>
+          <a:xfrm>
+            <a:off x="548640" y="5870448"/>
+            <a:ext cx="11094415" cy="457200"/>
+          </a:xfrm>
+          <a:prstGeom prst="rect">
+            <a:avLst/>
+          </a:prstGeom>
+          <a:noFill/>
+          <a:ln/>
+        </p:spPr>
+        <p:txBody>
+          <a:bodyPr wrap="square" lIns="0" tIns="0" rIns="0" bIns="0" rtlCol="0" anchor="b"/>
+          <a:lstStyle/>
+          <a:p>
+            <a:pPr indent="0" marL="0">
+              <a:buNone/>
+            </a:pPr>
+            <a:r>
+              <a:rPr lang="en-US" sz="1000" dirty="0">
+                <a:solidFill>
+                  <a:srgbClr val="6B7280"/>
+                </a:solidFill>
+                <a:latin typeface="Yu Gothic" pitchFamily="34" charset="0"/>
+                <a:ea typeface="Yu Gothic" pitchFamily="34" charset="-122"/>
+                <a:cs typeface="Yu Gothic" pitchFamily="34" charset="-120"/>
+              </a:rPr>
+              <a:t>※ 中古のサンプル（価格2,500万円・土地110㎡/建物90㎡・2012年築・頭金300万円・諸費用8%・固定資産税等 年9万円・修繕 月2.5万円・10年後の建物価値40%）と新築の住宅性能（ZEH水準）はすべて仮定値。金利1.5%・35年・2027年3月入居。売却価格は横ばいシナリオ。控除は概算（P20と同じ税額の前提）。</a:t>
+            </a:r>
+            <a:endParaRPr lang="en-US" sz="1000" dirty="0"/>
+          </a:p>
+        </p:txBody>
+      </p:sp>
+      <p:sp>
+        <p:nvSpPr>
+          <p:cNvPr id="25" name="Slide Number Placeholder 0"/>
+          <p:cNvSpPr>
+            <a:spLocks noGrp="1"/>
+          </p:cNvSpPr>
+          <p:nvPr>
+            <p:ph type="sldNum" sz="quarter" idx="4294967295"/>
+          </p:nvPr>
+        </p:nvSpPr>
+        <p:spPr>
+          <a:xfrm>
+            <a:off x="11183112" y="6419088"/>
+            <a:ext cx="457200" cy="274320"/>
+          </a:xfrm>
+          <a:prstGeom prst="rect">
+            <a:avLst/>
+          </a:prstGeom>
+          <a:extLst>
+            <a:ext uri="{C572A759-6A51-4108-AA02-DFA0A04FC94B}">
+              <ma14:wrappingTextBoxFlag xmlns:ma14="http://schemas.microsoft.com/office/mac/drawingml/2011/main" val="0"/>
+            </a:ext>
+          </a:extLst>
+        </p:spPr>
+        <p:txBody>
+          <a:bodyPr/>
+          <a:lstStyle>
+            <a:lvl1pPr>
+              <a:defRPr sz="900">
+                <a:solidFill>
+                  <a:srgbClr val="6B7280"/>
+                </a:solidFill>
+                <a:latin typeface="Yu Gothic"/>
+                <a:ea typeface="Yu Gothic"/>
+                <a:cs typeface="Yu Gothic"/>
+              </a:defRPr>
+            </a:lvl1pPr>
+          </a:lstStyle>
+          <a:p>
+            <a:pPr algn="r"/>
+            <a:fld id="{F7021451-1387-4CA6-816F-3879F97B5CBC}" type="slidenum">
+              <a:rPr b="0" lang="en-US"/>
+              <a:t>21</a:t>
             </a:fld>
             <a:endParaRPr lang="en-US"/>
           </a:p>
